--- a/Green and Blue Futuristic Technology Computer Science Presentation (1).pptx
+++ b/Green and Blue Futuristic Technology Computer Science Presentation (1).pptx
@@ -24,22 +24,21 @@
     <p:sldId id="272" r:id="rId22"/>
     <p:sldId id="273" r:id="rId23"/>
     <p:sldId id="274" r:id="rId24"/>
-    <p:sldId id="275" r:id="rId25"/>
   </p:sldIdLst>
   <p:sldSz cx="18288000" cy="10287000"/>
   <p:notesSz cx="6858000" cy="9144000"/>
   <p:embeddedFontLst>
     <p:embeddedFont>
       <p:font typeface="TT Lakes Neue Expanded Bold" charset="1" panose="02010001040000080307"/>
+      <p:regular r:id="rId25"/>
+    </p:embeddedFont>
+    <p:embeddedFont>
+      <p:font typeface="Poppins" charset="1" panose="00000500000000000000"/>
       <p:regular r:id="rId26"/>
     </p:embeddedFont>
     <p:embeddedFont>
-      <p:font typeface="Poppins" charset="1" panose="00000500000000000000"/>
+      <p:font typeface="Poppins Bold" charset="1" panose="00000800000000000000"/>
       <p:regular r:id="rId27"/>
-    </p:embeddedFont>
-    <p:embeddedFont>
-      <p:font typeface="Poppins Bold" charset="1" panose="00000800000000000000"/>
-      <p:regular r:id="rId28"/>
     </p:embeddedFont>
   </p:embeddedFontLst>
   <p:defaultTextStyle>
@@ -4424,811 +4423,6 @@
       </p:sp>
       <p:sp>
         <p:nvSpPr>
-          <p:cNvPr name="TextBox 11" id="11"/>
-          <p:cNvSpPr txBox="true"/>
-          <p:nvPr/>
-        </p:nvSpPr>
-        <p:spPr>
-          <a:xfrm rot="0">
-            <a:off x="8245241" y="9751450"/>
-            <a:ext cx="1684932" cy="233169"/>
-          </a:xfrm>
-          <a:prstGeom prst="rect">
-            <a:avLst/>
-          </a:prstGeom>
-        </p:spPr>
-        <p:txBody>
-          <a:bodyPr anchor="t" rtlCol="false" tIns="0" lIns="0" bIns="0" rIns="0">
-            <a:spAutoFit/>
-          </a:bodyPr>
-          <a:lstStyle/>
-          <a:p>
-            <a:pPr algn="ctr">
-              <a:lnSpc>
-                <a:spcPts val="1826"/>
-              </a:lnSpc>
-            </a:pPr>
-            <a:r>
-              <a:rPr lang="en-US" b="true" sz="1739">
-                <a:solidFill>
-                  <a:srgbClr val="FFFFFF"/>
-                </a:solidFill>
-                <a:latin typeface="TT Lakes Neue Expanded Bold"/>
-                <a:ea typeface="TT Lakes Neue Expanded Bold"/>
-                <a:cs typeface="TT Lakes Neue Expanded Bold"/>
-                <a:sym typeface="TT Lakes Neue Expanded Bold"/>
-              </a:rPr>
-              <a:t>PAGE 10</a:t>
-            </a:r>
-          </a:p>
-        </p:txBody>
-      </p:sp>
-      <p:sp>
-        <p:nvSpPr>
-          <p:cNvPr name="TextBox 12" id="12"/>
-          <p:cNvSpPr txBox="true"/>
-          <p:nvPr/>
-        </p:nvSpPr>
-        <p:spPr>
-          <a:xfrm rot="0">
-            <a:off x="3868899" y="783121"/>
-            <a:ext cx="10793017" cy="1909603"/>
-          </a:xfrm>
-          <a:prstGeom prst="rect">
-            <a:avLst/>
-          </a:prstGeom>
-        </p:spPr>
-        <p:txBody>
-          <a:bodyPr anchor="t" rtlCol="false" tIns="0" lIns="0" bIns="0" rIns="0">
-            <a:spAutoFit/>
-          </a:bodyPr>
-          <a:lstStyle/>
-          <a:p>
-            <a:pPr algn="ctr">
-              <a:lnSpc>
-                <a:spcPts val="4978"/>
-              </a:lnSpc>
-            </a:pPr>
-            <a:r>
-              <a:rPr lang="en-US" b="true" sz="4741">
-                <a:solidFill>
-                  <a:srgbClr val="FFFFFF"/>
-                </a:solidFill>
-                <a:latin typeface="TT Lakes Neue Expanded Bold"/>
-                <a:ea typeface="TT Lakes Neue Expanded Bold"/>
-                <a:cs typeface="TT Lakes Neue Expanded Bold"/>
-                <a:sym typeface="TT Lakes Neue Expanded Bold"/>
-              </a:rPr>
-              <a:t>CR02 - INTEGRAZIONE AMBER (MANUTENZIONE ADATTIVA)</a:t>
-            </a:r>
-          </a:p>
-        </p:txBody>
-      </p:sp>
-      <p:sp>
-        <p:nvSpPr>
-          <p:cNvPr name="Freeform 13" id="13"/>
-          <p:cNvSpPr/>
-          <p:nvPr/>
-        </p:nvSpPr>
-        <p:spPr>
-          <a:xfrm flipH="false" flipV="true" rot="0">
-            <a:off x="-3709327" y="5778350"/>
-            <a:ext cx="5081025" cy="5978571"/>
-          </a:xfrm>
-          <a:custGeom>
-            <a:avLst/>
-            <a:gdLst/>
-            <a:ahLst/>
-            <a:cxnLst/>
-            <a:rect r="r" b="b" t="t" l="l"/>
-            <a:pathLst>
-              <a:path h="5978571" w="5081025">
-                <a:moveTo>
-                  <a:pt x="0" y="5978571"/>
-                </a:moveTo>
-                <a:lnTo>
-                  <a:pt x="5081025" y="5978571"/>
-                </a:lnTo>
-                <a:lnTo>
-                  <a:pt x="5081025" y="0"/>
-                </a:lnTo>
-                <a:lnTo>
-                  <a:pt x="0" y="0"/>
-                </a:lnTo>
-                <a:lnTo>
-                  <a:pt x="0" y="5978571"/>
-                </a:lnTo>
-                <a:close/>
-              </a:path>
-            </a:pathLst>
-          </a:custGeom>
-          <a:blipFill>
-            <a:blip r:embed="rId4"/>
-            <a:stretch>
-              <a:fillRect l="0" t="0" r="0" b="0"/>
-            </a:stretch>
-          </a:blipFill>
-        </p:spPr>
-      </p:sp>
-      <p:sp>
-        <p:nvSpPr>
-          <p:cNvPr name="TextBox 14" id="14"/>
-          <p:cNvSpPr txBox="true"/>
-          <p:nvPr/>
-        </p:nvSpPr>
-        <p:spPr>
-          <a:xfrm rot="0">
-            <a:off x="7767800" y="4054799"/>
-            <a:ext cx="4324746" cy="591307"/>
-          </a:xfrm>
-          <a:prstGeom prst="rect">
-            <a:avLst/>
-          </a:prstGeom>
-        </p:spPr>
-        <p:txBody>
-          <a:bodyPr anchor="t" rtlCol="false" tIns="0" lIns="0" bIns="0" rIns="0">
-            <a:spAutoFit/>
-          </a:bodyPr>
-          <a:lstStyle/>
-          <a:p>
-            <a:pPr algn="just">
-              <a:lnSpc>
-                <a:spcPts val="4241"/>
-              </a:lnSpc>
-              <a:spcBef>
-                <a:spcPct val="0"/>
-              </a:spcBef>
-            </a:pPr>
-            <a:r>
-              <a:rPr lang="en-US" b="true" sz="4039" spc="137">
-                <a:solidFill>
-                  <a:srgbClr val="FFDE59"/>
-                </a:solidFill>
-                <a:latin typeface="Poppins Bold"/>
-                <a:ea typeface="Poppins Bold"/>
-                <a:cs typeface="Poppins Bold"/>
-                <a:sym typeface="Poppins Bold"/>
-              </a:rPr>
-              <a:t>OBIETTIVO</a:t>
-            </a:r>
-          </a:p>
-        </p:txBody>
-      </p:sp>
-      <p:sp>
-        <p:nvSpPr>
-          <p:cNvPr name="TextBox 15" id="15"/>
-          <p:cNvSpPr txBox="true"/>
-          <p:nvPr/>
-        </p:nvSpPr>
-        <p:spPr>
-          <a:xfrm rot="0">
-            <a:off x="2945421" y="5098438"/>
-            <a:ext cx="12639973" cy="1796989"/>
-          </a:xfrm>
-          <a:prstGeom prst="rect">
-            <a:avLst/>
-          </a:prstGeom>
-        </p:spPr>
-        <p:txBody>
-          <a:bodyPr anchor="t" rtlCol="false" tIns="0" lIns="0" bIns="0" rIns="0">
-            <a:spAutoFit/>
-          </a:bodyPr>
-          <a:lstStyle/>
-          <a:p>
-            <a:pPr algn="ctr">
-              <a:lnSpc>
-                <a:spcPts val="3496"/>
-              </a:lnSpc>
-              <a:spcBef>
-                <a:spcPct val="0"/>
-              </a:spcBef>
-            </a:pPr>
-            <a:r>
-              <a:rPr lang="en-US" sz="3330" spc="113">
-                <a:solidFill>
-                  <a:srgbClr val="FFFFFF"/>
-                </a:solidFill>
-                <a:latin typeface="Poppins"/>
-                <a:ea typeface="Poppins"/>
-                <a:cs typeface="Poppins"/>
-                <a:sym typeface="Poppins"/>
-              </a:rPr>
-              <a:t>L'istanza interna di parsing falliva sui file con sintassi Java moderne (livello 17/21). L'obiettivo era aggiornare l'infrastruttura e configurare il parser per supportare Amber</a:t>
-            </a:r>
-          </a:p>
-        </p:txBody>
-      </p:sp>
-      <p:sp>
-        <p:nvSpPr>
-          <p:cNvPr name="Freeform 16" id="16"/>
-          <p:cNvSpPr/>
-          <p:nvPr/>
-        </p:nvSpPr>
-        <p:spPr>
-          <a:xfrm flipH="false" flipV="false" rot="0">
-            <a:off x="2327569" y="159045"/>
-            <a:ext cx="1235703" cy="1235703"/>
-          </a:xfrm>
-          <a:custGeom>
-            <a:avLst/>
-            <a:gdLst/>
-            <a:ahLst/>
-            <a:cxnLst/>
-            <a:rect r="r" b="b" t="t" l="l"/>
-            <a:pathLst>
-              <a:path h="1235703" w="1235703">
-                <a:moveTo>
-                  <a:pt x="0" y="0"/>
-                </a:moveTo>
-                <a:lnTo>
-                  <a:pt x="1235703" y="0"/>
-                </a:lnTo>
-                <a:lnTo>
-                  <a:pt x="1235703" y="1235704"/>
-                </a:lnTo>
-                <a:lnTo>
-                  <a:pt x="0" y="1235704"/>
-                </a:lnTo>
-                <a:lnTo>
-                  <a:pt x="0" y="0"/>
-                </a:lnTo>
-                <a:close/>
-              </a:path>
-            </a:pathLst>
-          </a:custGeom>
-          <a:blipFill>
-            <a:blip r:embed="rId7"/>
-            <a:stretch>
-              <a:fillRect l="0" t="0" r="0" b="0"/>
-            </a:stretch>
-          </a:blipFill>
-        </p:spPr>
-      </p:sp>
-      <p:sp>
-        <p:nvSpPr>
-          <p:cNvPr name="Freeform 17" id="17"/>
-          <p:cNvSpPr/>
-          <p:nvPr/>
-        </p:nvSpPr>
-        <p:spPr>
-          <a:xfrm flipH="false" flipV="false" rot="0">
-            <a:off x="318810" y="250453"/>
-            <a:ext cx="1052888" cy="1052888"/>
-          </a:xfrm>
-          <a:custGeom>
-            <a:avLst/>
-            <a:gdLst/>
-            <a:ahLst/>
-            <a:cxnLst/>
-            <a:rect r="r" b="b" t="t" l="l"/>
-            <a:pathLst>
-              <a:path h="1052888" w="1052888">
-                <a:moveTo>
-                  <a:pt x="0" y="0"/>
-                </a:moveTo>
-                <a:lnTo>
-                  <a:pt x="1052888" y="0"/>
-                </a:lnTo>
-                <a:lnTo>
-                  <a:pt x="1052888" y="1052888"/>
-                </a:lnTo>
-                <a:lnTo>
-                  <a:pt x="0" y="1052888"/>
-                </a:lnTo>
-                <a:lnTo>
-                  <a:pt x="0" y="0"/>
-                </a:lnTo>
-                <a:close/>
-              </a:path>
-            </a:pathLst>
-          </a:custGeom>
-          <a:blipFill>
-            <a:blip r:embed="rId8"/>
-            <a:stretch>
-              <a:fillRect l="0" t="0" r="0" b="0"/>
-            </a:stretch>
-          </a:blipFill>
-        </p:spPr>
-      </p:sp>
-    </p:spTree>
-  </p:cSld>
-  <p:clrMapOvr>
-    <a:masterClrMapping/>
-  </p:clrMapOvr>
-</p:sld>
-</file>
-
-<file path=ppt/slides/slide11.xml><?xml version="1.0" encoding="utf-8"?>
-<p:sld xmlns:p="http://schemas.openxmlformats.org/presentationml/2006/main" xmlns:a="http://schemas.openxmlformats.org/drawingml/2006/main" xmlns:r="http://schemas.openxmlformats.org/officeDocument/2006/relationships">
-  <p:cSld>
-    <p:bg>
-      <p:bgPr>
-        <a:gradFill rotWithShape="true">
-          <a:gsLst>
-            <a:gs pos="0">
-              <a:srgbClr val="0097B2">
-                <a:alpha val="100000"/>
-              </a:srgbClr>
-            </a:gs>
-            <a:gs pos="50000">
-              <a:srgbClr val="3A6A9E">
-                <a:alpha val="100000"/>
-              </a:srgbClr>
-            </a:gs>
-            <a:gs pos="100000">
-              <a:srgbClr val="103863">
-                <a:alpha val="100000"/>
-              </a:srgbClr>
-            </a:gs>
-          </a:gsLst>
-          <a:lin ang="5400000"/>
-        </a:gradFill>
-      </p:bgPr>
-    </p:bg>
-    <p:spTree>
-      <p:nvGrpSpPr>
-        <p:cNvPr id="1" name=""/>
-        <p:cNvGrpSpPr/>
-        <p:nvPr/>
-      </p:nvGrpSpPr>
-      <p:grpSpPr>
-        <a:xfrm>
-          <a:off x="0" y="0"/>
-          <a:ext cx="0" cy="0"/>
-          <a:chOff x="0" y="0"/>
-          <a:chExt cx="0" cy="0"/>
-        </a:xfrm>
-      </p:grpSpPr>
-      <p:grpSp>
-        <p:nvGrpSpPr>
-          <p:cNvPr name="Group 2" id="2"/>
-          <p:cNvGrpSpPr/>
-          <p:nvPr/>
-        </p:nvGrpSpPr>
-        <p:grpSpPr>
-          <a:xfrm rot="0">
-            <a:off x="-365251" y="-1543050"/>
-            <a:ext cx="4199655" cy="3086100"/>
-            <a:chOff x="0" y="0"/>
-            <a:chExt cx="1106082" cy="812800"/>
-          </a:xfrm>
-        </p:grpSpPr>
-        <p:sp>
-          <p:nvSpPr>
-            <p:cNvPr name="Freeform 3" id="3"/>
-            <p:cNvSpPr/>
-            <p:nvPr/>
-          </p:nvSpPr>
-          <p:spPr>
-            <a:xfrm flipH="false" flipV="false" rot="0">
-              <a:off x="0" y="0"/>
-              <a:ext cx="1106082" cy="812800"/>
-            </a:xfrm>
-            <a:custGeom>
-              <a:avLst/>
-              <a:gdLst/>
-              <a:ahLst/>
-              <a:cxnLst/>
-              <a:rect r="r" b="b" t="t" l="l"/>
-              <a:pathLst>
-                <a:path h="812800" w="1106082">
-                  <a:moveTo>
-                    <a:pt x="46087" y="0"/>
-                  </a:moveTo>
-                  <a:lnTo>
-                    <a:pt x="1059995" y="0"/>
-                  </a:lnTo>
-                  <a:cubicBezTo>
-                    <a:pt x="1072218" y="0"/>
-                    <a:pt x="1083941" y="4856"/>
-                    <a:pt x="1092584" y="13498"/>
-                  </a:cubicBezTo>
-                  <a:cubicBezTo>
-                    <a:pt x="1101226" y="22141"/>
-                    <a:pt x="1106082" y="33864"/>
-                    <a:pt x="1106082" y="46087"/>
-                  </a:cubicBezTo>
-                  <a:lnTo>
-                    <a:pt x="1106082" y="766713"/>
-                  </a:lnTo>
-                  <a:cubicBezTo>
-                    <a:pt x="1106082" y="778936"/>
-                    <a:pt x="1101226" y="790659"/>
-                    <a:pt x="1092584" y="799302"/>
-                  </a:cubicBezTo>
-                  <a:cubicBezTo>
-                    <a:pt x="1083941" y="807944"/>
-                    <a:pt x="1072218" y="812800"/>
-                    <a:pt x="1059995" y="812800"/>
-                  </a:cubicBezTo>
-                  <a:lnTo>
-                    <a:pt x="46087" y="812800"/>
-                  </a:lnTo>
-                  <a:cubicBezTo>
-                    <a:pt x="33864" y="812800"/>
-                    <a:pt x="22141" y="807944"/>
-                    <a:pt x="13498" y="799302"/>
-                  </a:cubicBezTo>
-                  <a:cubicBezTo>
-                    <a:pt x="4856" y="790659"/>
-                    <a:pt x="0" y="778936"/>
-                    <a:pt x="0" y="766713"/>
-                  </a:cubicBezTo>
-                  <a:lnTo>
-                    <a:pt x="0" y="46087"/>
-                  </a:lnTo>
-                  <a:cubicBezTo>
-                    <a:pt x="0" y="33864"/>
-                    <a:pt x="4856" y="22141"/>
-                    <a:pt x="13498" y="13498"/>
-                  </a:cubicBezTo>
-                  <a:cubicBezTo>
-                    <a:pt x="22141" y="4856"/>
-                    <a:pt x="33864" y="0"/>
-                    <a:pt x="46087" y="0"/>
-                  </a:cubicBezTo>
-                  <a:close/>
-                </a:path>
-              </a:pathLst>
-            </a:custGeom>
-            <a:gradFill rotWithShape="true">
-              <a:gsLst>
-                <a:gs pos="0">
-                  <a:srgbClr val="0097B2">
-                    <a:alpha val="100000"/>
-                  </a:srgbClr>
-                </a:gs>
-                <a:gs pos="50000">
-                  <a:srgbClr val="3A6A9E">
-                    <a:alpha val="100000"/>
-                  </a:srgbClr>
-                </a:gs>
-                <a:gs pos="100000">
-                  <a:srgbClr val="103863">
-                    <a:alpha val="100000"/>
-                  </a:srgbClr>
-                </a:gs>
-              </a:gsLst>
-              <a:lin ang="0"/>
-            </a:gradFill>
-            <a:ln w="19050" cap="rnd">
-              <a:solidFill>
-                <a:srgbClr val="000000"/>
-              </a:solidFill>
-              <a:prstDash val="solid"/>
-              <a:round/>
-            </a:ln>
-          </p:spPr>
-        </p:sp>
-        <p:sp>
-          <p:nvSpPr>
-            <p:cNvPr name="TextBox 4" id="4"/>
-            <p:cNvSpPr txBox="true"/>
-            <p:nvPr/>
-          </p:nvSpPr>
-          <p:spPr>
-            <a:xfrm>
-              <a:off x="0" y="28575"/>
-              <a:ext cx="1106082" cy="784225"/>
-            </a:xfrm>
-            <a:prstGeom prst="rect">
-              <a:avLst/>
-            </a:prstGeom>
-          </p:spPr>
-          <p:txBody>
-            <a:bodyPr anchor="ctr" rtlCol="false" tIns="50800" lIns="50800" bIns="50800" rIns="50800"/>
-            <a:lstStyle/>
-            <a:p>
-              <a:pPr algn="ctr">
-                <a:lnSpc>
-                  <a:spcPts val="1826"/>
-                </a:lnSpc>
-              </a:pPr>
-            </a:p>
-          </p:txBody>
-        </p:sp>
-      </p:grpSp>
-      <p:sp>
-        <p:nvSpPr>
-          <p:cNvPr name="Freeform 5" id="5"/>
-          <p:cNvSpPr/>
-          <p:nvPr/>
-        </p:nvSpPr>
-        <p:spPr>
-          <a:xfrm flipH="false" flipV="false" rot="0">
-            <a:off x="5430107" y="8767636"/>
-            <a:ext cx="7315200" cy="2433967"/>
-          </a:xfrm>
-          <a:custGeom>
-            <a:avLst/>
-            <a:gdLst/>
-            <a:ahLst/>
-            <a:cxnLst/>
-            <a:rect r="r" b="b" t="t" l="l"/>
-            <a:pathLst>
-              <a:path h="2433967" w="7315200">
-                <a:moveTo>
-                  <a:pt x="0" y="0"/>
-                </a:moveTo>
-                <a:lnTo>
-                  <a:pt x="7315200" y="0"/>
-                </a:lnTo>
-                <a:lnTo>
-                  <a:pt x="7315200" y="2433966"/>
-                </a:lnTo>
-                <a:lnTo>
-                  <a:pt x="0" y="2433966"/>
-                </a:lnTo>
-                <a:lnTo>
-                  <a:pt x="0" y="0"/>
-                </a:lnTo>
-                <a:close/>
-              </a:path>
-            </a:pathLst>
-          </a:custGeom>
-          <a:blipFill>
-            <a:blip r:embed="rId2">
-              <a:extLst>
-                <a:ext uri="{96DAC541-7B7A-43D3-8B79-37D633B846F1}">
-                  <asvg:svgBlip xmlns:asvg="http://schemas.microsoft.com/office/drawing/2016/SVG/main" r:embed="rId3"/>
-                </a:ext>
-              </a:extLst>
-            </a:blip>
-            <a:stretch>
-              <a:fillRect l="0" t="0" r="0" b="0"/>
-            </a:stretch>
-          </a:blipFill>
-        </p:spPr>
-      </p:sp>
-      <p:grpSp>
-        <p:nvGrpSpPr>
-          <p:cNvPr name="Group 6" id="6"/>
-          <p:cNvGrpSpPr/>
-          <p:nvPr/>
-        </p:nvGrpSpPr>
-        <p:grpSpPr>
-          <a:xfrm rot="0">
-            <a:off x="7600950" y="9365373"/>
-            <a:ext cx="3086100" cy="3086100"/>
-            <a:chOff x="0" y="0"/>
-            <a:chExt cx="812800" cy="812800"/>
-          </a:xfrm>
-        </p:grpSpPr>
-        <p:sp>
-          <p:nvSpPr>
-            <p:cNvPr name="Freeform 7" id="7"/>
-            <p:cNvSpPr/>
-            <p:nvPr/>
-          </p:nvSpPr>
-          <p:spPr>
-            <a:xfrm flipH="false" flipV="false" rot="0">
-              <a:off x="0" y="0"/>
-              <a:ext cx="812800" cy="812800"/>
-            </a:xfrm>
-            <a:custGeom>
-              <a:avLst/>
-              <a:gdLst/>
-              <a:ahLst/>
-              <a:cxnLst/>
-              <a:rect r="r" b="b" t="t" l="l"/>
-              <a:pathLst>
-                <a:path h="812800" w="812800">
-                  <a:moveTo>
-                    <a:pt x="62716" y="0"/>
-                  </a:moveTo>
-                  <a:lnTo>
-                    <a:pt x="750084" y="0"/>
-                  </a:lnTo>
-                  <a:cubicBezTo>
-                    <a:pt x="766717" y="0"/>
-                    <a:pt x="782669" y="6608"/>
-                    <a:pt x="794431" y="18369"/>
-                  </a:cubicBezTo>
-                  <a:cubicBezTo>
-                    <a:pt x="806192" y="30131"/>
-                    <a:pt x="812800" y="46083"/>
-                    <a:pt x="812800" y="62716"/>
-                  </a:cubicBezTo>
-                  <a:lnTo>
-                    <a:pt x="812800" y="750084"/>
-                  </a:lnTo>
-                  <a:cubicBezTo>
-                    <a:pt x="812800" y="766717"/>
-                    <a:pt x="806192" y="782669"/>
-                    <a:pt x="794431" y="794431"/>
-                  </a:cubicBezTo>
-                  <a:cubicBezTo>
-                    <a:pt x="782669" y="806192"/>
-                    <a:pt x="766717" y="812800"/>
-                    <a:pt x="750084" y="812800"/>
-                  </a:cubicBezTo>
-                  <a:lnTo>
-                    <a:pt x="62716" y="812800"/>
-                  </a:lnTo>
-                  <a:cubicBezTo>
-                    <a:pt x="46083" y="812800"/>
-                    <a:pt x="30131" y="806192"/>
-                    <a:pt x="18369" y="794431"/>
-                  </a:cubicBezTo>
-                  <a:cubicBezTo>
-                    <a:pt x="6608" y="782669"/>
-                    <a:pt x="0" y="766717"/>
-                    <a:pt x="0" y="750084"/>
-                  </a:cubicBezTo>
-                  <a:lnTo>
-                    <a:pt x="0" y="62716"/>
-                  </a:lnTo>
-                  <a:cubicBezTo>
-                    <a:pt x="0" y="46083"/>
-                    <a:pt x="6608" y="30131"/>
-                    <a:pt x="18369" y="18369"/>
-                  </a:cubicBezTo>
-                  <a:cubicBezTo>
-                    <a:pt x="30131" y="6608"/>
-                    <a:pt x="46083" y="0"/>
-                    <a:pt x="62716" y="0"/>
-                  </a:cubicBezTo>
-                  <a:close/>
-                </a:path>
-              </a:pathLst>
-            </a:custGeom>
-            <a:gradFill rotWithShape="true">
-              <a:gsLst>
-                <a:gs pos="0">
-                  <a:srgbClr val="0097B2">
-                    <a:alpha val="100000"/>
-                  </a:srgbClr>
-                </a:gs>
-                <a:gs pos="50000">
-                  <a:srgbClr val="3A6A9E">
-                    <a:alpha val="100000"/>
-                  </a:srgbClr>
-                </a:gs>
-                <a:gs pos="100000">
-                  <a:srgbClr val="103863">
-                    <a:alpha val="100000"/>
-                  </a:srgbClr>
-                </a:gs>
-              </a:gsLst>
-              <a:lin ang="0"/>
-            </a:gradFill>
-            <a:ln w="19050" cap="rnd">
-              <a:solidFill>
-                <a:srgbClr val="000000"/>
-              </a:solidFill>
-              <a:prstDash val="solid"/>
-              <a:round/>
-            </a:ln>
-          </p:spPr>
-        </p:sp>
-        <p:sp>
-          <p:nvSpPr>
-            <p:cNvPr name="TextBox 8" id="8"/>
-            <p:cNvSpPr txBox="true"/>
-            <p:nvPr/>
-          </p:nvSpPr>
-          <p:spPr>
-            <a:xfrm>
-              <a:off x="0" y="28575"/>
-              <a:ext cx="812800" cy="784225"/>
-            </a:xfrm>
-            <a:prstGeom prst="rect">
-              <a:avLst/>
-            </a:prstGeom>
-          </p:spPr>
-          <p:txBody>
-            <a:bodyPr anchor="ctr" rtlCol="false" tIns="50800" lIns="50800" bIns="50800" rIns="50800"/>
-            <a:lstStyle/>
-            <a:p>
-              <a:pPr algn="ctr">
-                <a:lnSpc>
-                  <a:spcPts val="1826"/>
-                </a:lnSpc>
-              </a:pPr>
-            </a:p>
-          </p:txBody>
-        </p:sp>
-      </p:grpSp>
-      <p:sp>
-        <p:nvSpPr>
-          <p:cNvPr name="Freeform 9" id="9"/>
-          <p:cNvSpPr/>
-          <p:nvPr/>
-        </p:nvSpPr>
-        <p:spPr>
-          <a:xfrm flipH="false" flipV="true" rot="0">
-            <a:off x="14540508" y="5987408"/>
-            <a:ext cx="5081025" cy="5978571"/>
-          </a:xfrm>
-          <a:custGeom>
-            <a:avLst/>
-            <a:gdLst/>
-            <a:ahLst/>
-            <a:cxnLst/>
-            <a:rect r="r" b="b" t="t" l="l"/>
-            <a:pathLst>
-              <a:path h="5978571" w="5081025">
-                <a:moveTo>
-                  <a:pt x="0" y="5978571"/>
-                </a:moveTo>
-                <a:lnTo>
-                  <a:pt x="5081025" y="5978571"/>
-                </a:lnTo>
-                <a:lnTo>
-                  <a:pt x="5081025" y="0"/>
-                </a:lnTo>
-                <a:lnTo>
-                  <a:pt x="0" y="0"/>
-                </a:lnTo>
-                <a:lnTo>
-                  <a:pt x="0" y="5978571"/>
-                </a:lnTo>
-                <a:close/>
-              </a:path>
-            </a:pathLst>
-          </a:custGeom>
-          <a:blipFill>
-            <a:blip r:embed="rId4"/>
-            <a:stretch>
-              <a:fillRect l="0" t="0" r="0" b="0"/>
-            </a:stretch>
-          </a:blipFill>
-        </p:spPr>
-      </p:sp>
-      <p:sp>
-        <p:nvSpPr>
-          <p:cNvPr name="Freeform 10" id="10"/>
-          <p:cNvSpPr/>
-          <p:nvPr/>
-        </p:nvSpPr>
-        <p:spPr>
-          <a:xfrm flipH="false" flipV="false" rot="0">
-            <a:off x="16128881" y="1028700"/>
-            <a:ext cx="549282" cy="549282"/>
-          </a:xfrm>
-          <a:custGeom>
-            <a:avLst/>
-            <a:gdLst/>
-            <a:ahLst/>
-            <a:cxnLst/>
-            <a:rect r="r" b="b" t="t" l="l"/>
-            <a:pathLst>
-              <a:path h="549282" w="549282">
-                <a:moveTo>
-                  <a:pt x="0" y="0"/>
-                </a:moveTo>
-                <a:lnTo>
-                  <a:pt x="549282" y="0"/>
-                </a:lnTo>
-                <a:lnTo>
-                  <a:pt x="549282" y="549282"/>
-                </a:lnTo>
-                <a:lnTo>
-                  <a:pt x="0" y="549282"/>
-                </a:lnTo>
-                <a:lnTo>
-                  <a:pt x="0" y="0"/>
-                </a:lnTo>
-                <a:close/>
-              </a:path>
-            </a:pathLst>
-          </a:custGeom>
-          <a:blipFill>
-            <a:blip r:embed="rId5">
-              <a:extLst>
-                <a:ext uri="{96DAC541-7B7A-43D3-8B79-37D633B846F1}">
-                  <asvg:svgBlip xmlns:asvg="http://schemas.microsoft.com/office/drawing/2016/SVG/main" r:embed="rId6"/>
-                </a:ext>
-              </a:extLst>
-            </a:blip>
-            <a:stretch>
-              <a:fillRect l="0" t="0" r="0" b="0"/>
-            </a:stretch>
-          </a:blipFill>
-        </p:spPr>
-      </p:sp>
-      <p:sp>
-        <p:nvSpPr>
           <p:cNvPr name="Freeform 11" id="11"/>
           <p:cNvSpPr/>
           <p:nvPr/>
@@ -5529,7 +4723,7 @@
                 <a:cs typeface="TT Lakes Neue Expanded Bold"/>
                 <a:sym typeface="TT Lakes Neue Expanded Bold"/>
               </a:rPr>
-              <a:t>PAGE 11</a:t>
+              <a:t>PAGE 10</a:t>
             </a:r>
           </a:p>
         </p:txBody>
@@ -5908,7 +5102,7 @@
                 <a:cs typeface="Poppins"/>
                 <a:sym typeface="Poppins"/>
               </a:rPr>
-              <a:t>Precision:  |CIS ∩ AIS| / |AIS| ≈ 1.00</a:t>
+              <a:t>Precision:  |CIS ∩ AIS| / |AIS| = 1.00</a:t>
             </a:r>
           </a:p>
           <a:p>
@@ -5960,7 +5154,7 @@
                 <a:cs typeface="Poppins"/>
                 <a:sym typeface="Poppins"/>
               </a:rPr>
-              <a:t>ll:       |CIS ∩ AIS| / |CIS| ≈ 0.5</a:t>
+              <a:t>ll:       |CIS ∩ AIS| / |CIS| = 0.5</a:t>
             </a:r>
           </a:p>
           <a:p>
@@ -5990,7 +5184,7 @@
 </p:sld>
 </file>
 
-<file path=ppt/slides/slide12.xml><?xml version="1.0" encoding="utf-8"?>
+<file path=ppt/slides/slide11.xml><?xml version="1.0" encoding="utf-8"?>
 <p:sld xmlns:p="http://schemas.openxmlformats.org/presentationml/2006/main" xmlns:a="http://schemas.openxmlformats.org/drawingml/2006/main" xmlns:r="http://schemas.openxmlformats.org/officeDocument/2006/relationships">
   <p:cSld>
     <p:bg>
@@ -7165,7 +6359,7 @@
                 <a:cs typeface="TT Lakes Neue Expanded Bold"/>
                 <a:sym typeface="TT Lakes Neue Expanded Bold"/>
               </a:rPr>
-              <a:t>PAGE 12</a:t>
+              <a:t>PAGE 11</a:t>
             </a:r>
           </a:p>
         </p:txBody>
@@ -7395,7 +6589,7 @@
 </p:sld>
 </file>
 
-<file path=ppt/slides/slide13.xml><?xml version="1.0" encoding="utf-8"?>
+<file path=ppt/slides/slide12.xml><?xml version="1.0" encoding="utf-8"?>
 <p:sld xmlns:p="http://schemas.openxmlformats.org/presentationml/2006/main" xmlns:a="http://schemas.openxmlformats.org/drawingml/2006/main" xmlns:r="http://schemas.openxmlformats.org/officeDocument/2006/relationships">
   <p:cSld>
     <p:bg>
@@ -7920,7 +7114,7 @@
                 <a:cs typeface="TT Lakes Neue Expanded Bold"/>
                 <a:sym typeface="TT Lakes Neue Expanded Bold"/>
               </a:rPr>
-              <a:t>PAGE 13</a:t>
+              <a:t>PAGE 12</a:t>
             </a:r>
           </a:p>
         </p:txBody>
@@ -8219,7 +7413,7 @@
 </p:sld>
 </file>
 
-<file path=ppt/slides/slide14.xml><?xml version="1.0" encoding="utf-8"?>
+<file path=ppt/slides/slide13.xml><?xml version="1.0" encoding="utf-8"?>
 <p:sld xmlns:p="http://schemas.openxmlformats.org/presentationml/2006/main" xmlns:a="http://schemas.openxmlformats.org/drawingml/2006/main" xmlns:r="http://schemas.openxmlformats.org/officeDocument/2006/relationships">
   <p:cSld>
     <p:bg>
@@ -9010,7 +8204,7 @@
                 <a:cs typeface="TT Lakes Neue Expanded Bold"/>
                 <a:sym typeface="TT Lakes Neue Expanded Bold"/>
               </a:rPr>
-              <a:t>PAGE 14</a:t>
+              <a:t>PAGE 13</a:t>
             </a:r>
           </a:p>
         </p:txBody>
@@ -9396,7 +8590,7 @@
                 <a:cs typeface="Poppins"/>
                 <a:sym typeface="Poppins"/>
               </a:rPr>
-              <a:t>Precision:  |CIS ∩ AIS| / |AIS| ≈ 1.00</a:t>
+              <a:t>Precision:  |CIS ∩ AIS| / |AIS| = 1.00</a:t>
             </a:r>
           </a:p>
           <a:p>
@@ -9478,7 +8672,7 @@
 </p:sld>
 </file>
 
-<file path=ppt/slides/slide15.xml><?xml version="1.0" encoding="utf-8"?>
+<file path=ppt/slides/slide14.xml><?xml version="1.0" encoding="utf-8"?>
 <p:sld xmlns:p="http://schemas.openxmlformats.org/presentationml/2006/main" xmlns:a="http://schemas.openxmlformats.org/drawingml/2006/main" xmlns:r="http://schemas.openxmlformats.org/officeDocument/2006/relationships">
   <p:cSld>
     <p:bg>
@@ -10699,7 +9893,7 @@
                 <a:cs typeface="TT Lakes Neue Expanded Bold"/>
                 <a:sym typeface="TT Lakes Neue Expanded Bold"/>
               </a:rPr>
-              <a:t>PAGE 15</a:t>
+              <a:t>PAGE 14</a:t>
             </a:r>
           </a:p>
         </p:txBody>
@@ -10973,7 +10167,7 @@
 </p:sld>
 </file>
 
-<file path=ppt/slides/slide16.xml><?xml version="1.0" encoding="utf-8"?>
+<file path=ppt/slides/slide15.xml><?xml version="1.0" encoding="utf-8"?>
 <p:sld xmlns:p="http://schemas.openxmlformats.org/presentationml/2006/main" xmlns:a="http://schemas.openxmlformats.org/drawingml/2006/main" xmlns:r="http://schemas.openxmlformats.org/officeDocument/2006/relationships">
   <p:cSld>
     <p:bg>
@@ -11668,7 +10862,7 @@
                 <a:cs typeface="TT Lakes Neue Expanded Bold"/>
                 <a:sym typeface="TT Lakes Neue Expanded Bold"/>
               </a:rPr>
-              <a:t>PAGE 16</a:t>
+              <a:t>PAGE 15</a:t>
             </a:r>
           </a:p>
         </p:txBody>
@@ -12418,7 +11612,7 @@
 </p:sld>
 </file>
 
-<file path=ppt/slides/slide17.xml><?xml version="1.0" encoding="utf-8"?>
+<file path=ppt/slides/slide16.xml><?xml version="1.0" encoding="utf-8"?>
 <p:sld xmlns:p="http://schemas.openxmlformats.org/presentationml/2006/main" xmlns:a="http://schemas.openxmlformats.org/drawingml/2006/main" xmlns:r="http://schemas.openxmlformats.org/officeDocument/2006/relationships">
   <p:cSld>
     <p:bg>
@@ -13030,7 +12224,7 @@
                 <a:cs typeface="TT Lakes Neue Expanded Bold"/>
                 <a:sym typeface="TT Lakes Neue Expanded Bold"/>
               </a:rPr>
-              <a:t>PAGE 17</a:t>
+              <a:t>PAGE 16</a:t>
             </a:r>
           </a:p>
         </p:txBody>
@@ -13697,7 +12891,7 @@
 </p:sld>
 </file>
 
-<file path=ppt/slides/slide18.xml><?xml version="1.0" encoding="utf-8"?>
+<file path=ppt/slides/slide17.xml><?xml version="1.0" encoding="utf-8"?>
 <p:sld xmlns:p="http://schemas.openxmlformats.org/presentationml/2006/main" xmlns:a="http://schemas.openxmlformats.org/drawingml/2006/main" xmlns:r="http://schemas.openxmlformats.org/officeDocument/2006/relationships">
   <p:cSld>
     <p:bg>
@@ -14332,7 +13526,7 @@
                 <a:cs typeface="TT Lakes Neue Expanded Bold"/>
                 <a:sym typeface="TT Lakes Neue Expanded Bold"/>
               </a:rPr>
-              <a:t>PAGE 18</a:t>
+              <a:t>PAGE 17</a:t>
             </a:r>
           </a:p>
         </p:txBody>
@@ -14874,7 +14068,7 @@
 </p:sld>
 </file>
 
-<file path=ppt/slides/slide19.xml><?xml version="1.0" encoding="utf-8"?>
+<file path=ppt/slides/slide18.xml><?xml version="1.0" encoding="utf-8"?>
 <p:sld xmlns:p="http://schemas.openxmlformats.org/presentationml/2006/main" xmlns:a="http://schemas.openxmlformats.org/drawingml/2006/main" xmlns:r="http://schemas.openxmlformats.org/officeDocument/2006/relationships">
   <p:cSld>
     <p:bg>
@@ -15509,7 +14703,7 @@
                 <a:cs typeface="TT Lakes Neue Expanded Bold"/>
                 <a:sym typeface="TT Lakes Neue Expanded Bold"/>
               </a:rPr>
-              <a:t>PAGE 19</a:t>
+              <a:t>PAGE 18</a:t>
             </a:r>
           </a:p>
         </p:txBody>
@@ -15991,6 +15185,690 @@
             </a:r>
           </a:p>
         </p:txBody>
+      </p:sp>
+    </p:spTree>
+  </p:cSld>
+  <p:clrMapOvr>
+    <a:masterClrMapping/>
+  </p:clrMapOvr>
+</p:sld>
+</file>
+
+<file path=ppt/slides/slide19.xml><?xml version="1.0" encoding="utf-8"?>
+<p:sld xmlns:p="http://schemas.openxmlformats.org/presentationml/2006/main" xmlns:a="http://schemas.openxmlformats.org/drawingml/2006/main" xmlns:r="http://schemas.openxmlformats.org/officeDocument/2006/relationships">
+  <p:cSld>
+    <p:bg>
+      <p:bgPr>
+        <a:gradFill rotWithShape="true">
+          <a:gsLst>
+            <a:gs pos="0">
+              <a:srgbClr val="0097B2">
+                <a:alpha val="100000"/>
+              </a:srgbClr>
+            </a:gs>
+            <a:gs pos="50000">
+              <a:srgbClr val="3A6A9E">
+                <a:alpha val="100000"/>
+              </a:srgbClr>
+            </a:gs>
+            <a:gs pos="100000">
+              <a:srgbClr val="103863">
+                <a:alpha val="100000"/>
+              </a:srgbClr>
+            </a:gs>
+          </a:gsLst>
+          <a:lin ang="5400000"/>
+        </a:gradFill>
+      </p:bgPr>
+    </p:bg>
+    <p:spTree>
+      <p:nvGrpSpPr>
+        <p:cNvPr id="1" name=""/>
+        <p:cNvGrpSpPr/>
+        <p:nvPr/>
+      </p:nvGrpSpPr>
+      <p:grpSpPr>
+        <a:xfrm>
+          <a:off x="0" y="0"/>
+          <a:ext cx="0" cy="0"/>
+          <a:chOff x="0" y="0"/>
+          <a:chExt cx="0" cy="0"/>
+        </a:xfrm>
+      </p:grpSpPr>
+      <p:sp>
+        <p:nvSpPr>
+          <p:cNvPr name="Freeform 2" id="2"/>
+          <p:cNvSpPr/>
+          <p:nvPr/>
+        </p:nvSpPr>
+        <p:spPr>
+          <a:xfrm flipH="false" flipV="false" rot="0">
+            <a:off x="-4416186" y="1135773"/>
+            <a:ext cx="6994113" cy="8229600"/>
+          </a:xfrm>
+          <a:custGeom>
+            <a:avLst/>
+            <a:gdLst/>
+            <a:ahLst/>
+            <a:cxnLst/>
+            <a:rect r="r" b="b" t="t" l="l"/>
+            <a:pathLst>
+              <a:path h="8229600" w="6994113">
+                <a:moveTo>
+                  <a:pt x="0" y="0"/>
+                </a:moveTo>
+                <a:lnTo>
+                  <a:pt x="6994113" y="0"/>
+                </a:lnTo>
+                <a:lnTo>
+                  <a:pt x="6994113" y="8229600"/>
+                </a:lnTo>
+                <a:lnTo>
+                  <a:pt x="0" y="8229600"/>
+                </a:lnTo>
+                <a:lnTo>
+                  <a:pt x="0" y="0"/>
+                </a:lnTo>
+                <a:close/>
+              </a:path>
+            </a:pathLst>
+          </a:custGeom>
+          <a:blipFill>
+            <a:blip r:embed="rId2"/>
+            <a:stretch>
+              <a:fillRect l="0" t="0" r="0" b="0"/>
+            </a:stretch>
+          </a:blipFill>
+        </p:spPr>
+      </p:sp>
+      <p:grpSp>
+        <p:nvGrpSpPr>
+          <p:cNvPr name="Group 3" id="3"/>
+          <p:cNvGrpSpPr/>
+          <p:nvPr/>
+        </p:nvGrpSpPr>
+        <p:grpSpPr>
+          <a:xfrm rot="0">
+            <a:off x="-365251" y="-1543050"/>
+            <a:ext cx="4199655" cy="3086100"/>
+            <a:chOff x="0" y="0"/>
+            <a:chExt cx="1106082" cy="812800"/>
+          </a:xfrm>
+        </p:grpSpPr>
+        <p:sp>
+          <p:nvSpPr>
+            <p:cNvPr name="Freeform 4" id="4"/>
+            <p:cNvSpPr/>
+            <p:nvPr/>
+          </p:nvSpPr>
+          <p:spPr>
+            <a:xfrm flipH="false" flipV="false" rot="0">
+              <a:off x="0" y="0"/>
+              <a:ext cx="1106082" cy="812800"/>
+            </a:xfrm>
+            <a:custGeom>
+              <a:avLst/>
+              <a:gdLst/>
+              <a:ahLst/>
+              <a:cxnLst/>
+              <a:rect r="r" b="b" t="t" l="l"/>
+              <a:pathLst>
+                <a:path h="812800" w="1106082">
+                  <a:moveTo>
+                    <a:pt x="46087" y="0"/>
+                  </a:moveTo>
+                  <a:lnTo>
+                    <a:pt x="1059995" y="0"/>
+                  </a:lnTo>
+                  <a:cubicBezTo>
+                    <a:pt x="1072218" y="0"/>
+                    <a:pt x="1083941" y="4856"/>
+                    <a:pt x="1092584" y="13498"/>
+                  </a:cubicBezTo>
+                  <a:cubicBezTo>
+                    <a:pt x="1101226" y="22141"/>
+                    <a:pt x="1106082" y="33864"/>
+                    <a:pt x="1106082" y="46087"/>
+                  </a:cubicBezTo>
+                  <a:lnTo>
+                    <a:pt x="1106082" y="766713"/>
+                  </a:lnTo>
+                  <a:cubicBezTo>
+                    <a:pt x="1106082" y="778936"/>
+                    <a:pt x="1101226" y="790659"/>
+                    <a:pt x="1092584" y="799302"/>
+                  </a:cubicBezTo>
+                  <a:cubicBezTo>
+                    <a:pt x="1083941" y="807944"/>
+                    <a:pt x="1072218" y="812800"/>
+                    <a:pt x="1059995" y="812800"/>
+                  </a:cubicBezTo>
+                  <a:lnTo>
+                    <a:pt x="46087" y="812800"/>
+                  </a:lnTo>
+                  <a:cubicBezTo>
+                    <a:pt x="33864" y="812800"/>
+                    <a:pt x="22141" y="807944"/>
+                    <a:pt x="13498" y="799302"/>
+                  </a:cubicBezTo>
+                  <a:cubicBezTo>
+                    <a:pt x="4856" y="790659"/>
+                    <a:pt x="0" y="778936"/>
+                    <a:pt x="0" y="766713"/>
+                  </a:cubicBezTo>
+                  <a:lnTo>
+                    <a:pt x="0" y="46087"/>
+                  </a:lnTo>
+                  <a:cubicBezTo>
+                    <a:pt x="0" y="33864"/>
+                    <a:pt x="4856" y="22141"/>
+                    <a:pt x="13498" y="13498"/>
+                  </a:cubicBezTo>
+                  <a:cubicBezTo>
+                    <a:pt x="22141" y="4856"/>
+                    <a:pt x="33864" y="0"/>
+                    <a:pt x="46087" y="0"/>
+                  </a:cubicBezTo>
+                  <a:close/>
+                </a:path>
+              </a:pathLst>
+            </a:custGeom>
+            <a:gradFill rotWithShape="true">
+              <a:gsLst>
+                <a:gs pos="0">
+                  <a:srgbClr val="0097B2">
+                    <a:alpha val="100000"/>
+                  </a:srgbClr>
+                </a:gs>
+                <a:gs pos="50000">
+                  <a:srgbClr val="3A6A9E">
+                    <a:alpha val="100000"/>
+                  </a:srgbClr>
+                </a:gs>
+                <a:gs pos="100000">
+                  <a:srgbClr val="103863">
+                    <a:alpha val="100000"/>
+                  </a:srgbClr>
+                </a:gs>
+              </a:gsLst>
+              <a:lin ang="0"/>
+            </a:gradFill>
+            <a:ln w="19050" cap="rnd">
+              <a:solidFill>
+                <a:srgbClr val="000000"/>
+              </a:solidFill>
+              <a:prstDash val="solid"/>
+              <a:round/>
+            </a:ln>
+          </p:spPr>
+        </p:sp>
+        <p:sp>
+          <p:nvSpPr>
+            <p:cNvPr name="TextBox 5" id="5"/>
+            <p:cNvSpPr txBox="true"/>
+            <p:nvPr/>
+          </p:nvSpPr>
+          <p:spPr>
+            <a:xfrm>
+              <a:off x="0" y="28575"/>
+              <a:ext cx="1106082" cy="784225"/>
+            </a:xfrm>
+            <a:prstGeom prst="rect">
+              <a:avLst/>
+            </a:prstGeom>
+          </p:spPr>
+          <p:txBody>
+            <a:bodyPr anchor="ctr" rtlCol="false" tIns="50800" lIns="50800" bIns="50800" rIns="50800"/>
+            <a:lstStyle/>
+            <a:p>
+              <a:pPr algn="ctr">
+                <a:lnSpc>
+                  <a:spcPts val="1826"/>
+                </a:lnSpc>
+              </a:pPr>
+            </a:p>
+          </p:txBody>
+        </p:sp>
+      </p:grpSp>
+      <p:grpSp>
+        <p:nvGrpSpPr>
+          <p:cNvPr name="Group 6" id="6"/>
+          <p:cNvGrpSpPr/>
+          <p:nvPr/>
+        </p:nvGrpSpPr>
+        <p:grpSpPr>
+          <a:xfrm rot="0">
+            <a:off x="7600950" y="9365373"/>
+            <a:ext cx="3086100" cy="3086100"/>
+            <a:chOff x="0" y="0"/>
+            <a:chExt cx="812800" cy="812800"/>
+          </a:xfrm>
+        </p:grpSpPr>
+        <p:sp>
+          <p:nvSpPr>
+            <p:cNvPr name="Freeform 7" id="7"/>
+            <p:cNvSpPr/>
+            <p:nvPr/>
+          </p:nvSpPr>
+          <p:spPr>
+            <a:xfrm flipH="false" flipV="false" rot="0">
+              <a:off x="0" y="0"/>
+              <a:ext cx="812800" cy="812800"/>
+            </a:xfrm>
+            <a:custGeom>
+              <a:avLst/>
+              <a:gdLst/>
+              <a:ahLst/>
+              <a:cxnLst/>
+              <a:rect r="r" b="b" t="t" l="l"/>
+              <a:pathLst>
+                <a:path h="812800" w="812800">
+                  <a:moveTo>
+                    <a:pt x="62716" y="0"/>
+                  </a:moveTo>
+                  <a:lnTo>
+                    <a:pt x="750084" y="0"/>
+                  </a:lnTo>
+                  <a:cubicBezTo>
+                    <a:pt x="766717" y="0"/>
+                    <a:pt x="782669" y="6608"/>
+                    <a:pt x="794431" y="18369"/>
+                  </a:cubicBezTo>
+                  <a:cubicBezTo>
+                    <a:pt x="806192" y="30131"/>
+                    <a:pt x="812800" y="46083"/>
+                    <a:pt x="812800" y="62716"/>
+                  </a:cubicBezTo>
+                  <a:lnTo>
+                    <a:pt x="812800" y="750084"/>
+                  </a:lnTo>
+                  <a:cubicBezTo>
+                    <a:pt x="812800" y="766717"/>
+                    <a:pt x="806192" y="782669"/>
+                    <a:pt x="794431" y="794431"/>
+                  </a:cubicBezTo>
+                  <a:cubicBezTo>
+                    <a:pt x="782669" y="806192"/>
+                    <a:pt x="766717" y="812800"/>
+                    <a:pt x="750084" y="812800"/>
+                  </a:cubicBezTo>
+                  <a:lnTo>
+                    <a:pt x="62716" y="812800"/>
+                  </a:lnTo>
+                  <a:cubicBezTo>
+                    <a:pt x="46083" y="812800"/>
+                    <a:pt x="30131" y="806192"/>
+                    <a:pt x="18369" y="794431"/>
+                  </a:cubicBezTo>
+                  <a:cubicBezTo>
+                    <a:pt x="6608" y="782669"/>
+                    <a:pt x="0" y="766717"/>
+                    <a:pt x="0" y="750084"/>
+                  </a:cubicBezTo>
+                  <a:lnTo>
+                    <a:pt x="0" y="62716"/>
+                  </a:lnTo>
+                  <a:cubicBezTo>
+                    <a:pt x="0" y="46083"/>
+                    <a:pt x="6608" y="30131"/>
+                    <a:pt x="18369" y="18369"/>
+                  </a:cubicBezTo>
+                  <a:cubicBezTo>
+                    <a:pt x="30131" y="6608"/>
+                    <a:pt x="46083" y="0"/>
+                    <a:pt x="62716" y="0"/>
+                  </a:cubicBezTo>
+                  <a:close/>
+                </a:path>
+              </a:pathLst>
+            </a:custGeom>
+            <a:gradFill rotWithShape="true">
+              <a:gsLst>
+                <a:gs pos="0">
+                  <a:srgbClr val="0097B2">
+                    <a:alpha val="100000"/>
+                  </a:srgbClr>
+                </a:gs>
+                <a:gs pos="50000">
+                  <a:srgbClr val="3A6A9E">
+                    <a:alpha val="100000"/>
+                  </a:srgbClr>
+                </a:gs>
+                <a:gs pos="100000">
+                  <a:srgbClr val="103863">
+                    <a:alpha val="100000"/>
+                  </a:srgbClr>
+                </a:gs>
+              </a:gsLst>
+              <a:lin ang="0"/>
+            </a:gradFill>
+            <a:ln w="19050" cap="rnd">
+              <a:solidFill>
+                <a:srgbClr val="000000"/>
+              </a:solidFill>
+              <a:prstDash val="solid"/>
+              <a:round/>
+            </a:ln>
+          </p:spPr>
+        </p:sp>
+        <p:sp>
+          <p:nvSpPr>
+            <p:cNvPr name="TextBox 8" id="8"/>
+            <p:cNvSpPr txBox="true"/>
+            <p:nvPr/>
+          </p:nvSpPr>
+          <p:spPr>
+            <a:xfrm>
+              <a:off x="0" y="28575"/>
+              <a:ext cx="812800" cy="784225"/>
+            </a:xfrm>
+            <a:prstGeom prst="rect">
+              <a:avLst/>
+            </a:prstGeom>
+          </p:spPr>
+          <p:txBody>
+            <a:bodyPr anchor="ctr" rtlCol="false" tIns="50800" lIns="50800" bIns="50800" rIns="50800"/>
+            <a:lstStyle/>
+            <a:p>
+              <a:pPr algn="ctr">
+                <a:lnSpc>
+                  <a:spcPts val="1826"/>
+                </a:lnSpc>
+              </a:pPr>
+            </a:p>
+          </p:txBody>
+        </p:sp>
+      </p:grpSp>
+      <p:sp>
+        <p:nvSpPr>
+          <p:cNvPr name="Freeform 9" id="9"/>
+          <p:cNvSpPr/>
+          <p:nvPr/>
+        </p:nvSpPr>
+        <p:spPr>
+          <a:xfrm flipH="false" flipV="false" rot="0">
+            <a:off x="13762244" y="2186245"/>
+            <a:ext cx="6994113" cy="8229600"/>
+          </a:xfrm>
+          <a:custGeom>
+            <a:avLst/>
+            <a:gdLst/>
+            <a:ahLst/>
+            <a:cxnLst/>
+            <a:rect r="r" b="b" t="t" l="l"/>
+            <a:pathLst>
+              <a:path h="8229600" w="6994113">
+                <a:moveTo>
+                  <a:pt x="0" y="0"/>
+                </a:moveTo>
+                <a:lnTo>
+                  <a:pt x="6994112" y="0"/>
+                </a:lnTo>
+                <a:lnTo>
+                  <a:pt x="6994112" y="8229600"/>
+                </a:lnTo>
+                <a:lnTo>
+                  <a:pt x="0" y="8229600"/>
+                </a:lnTo>
+                <a:lnTo>
+                  <a:pt x="0" y="0"/>
+                </a:lnTo>
+                <a:close/>
+              </a:path>
+            </a:pathLst>
+          </a:custGeom>
+          <a:blipFill>
+            <a:blip r:embed="rId2"/>
+            <a:stretch>
+              <a:fillRect l="0" t="0" r="0" b="0"/>
+            </a:stretch>
+          </a:blipFill>
+        </p:spPr>
+      </p:sp>
+      <p:sp>
+        <p:nvSpPr>
+          <p:cNvPr name="Freeform 10" id="10"/>
+          <p:cNvSpPr/>
+          <p:nvPr/>
+        </p:nvSpPr>
+        <p:spPr>
+          <a:xfrm flipH="false" flipV="false" rot="0">
+            <a:off x="1028700" y="1653955"/>
+            <a:ext cx="16514364" cy="7086163"/>
+          </a:xfrm>
+          <a:custGeom>
+            <a:avLst/>
+            <a:gdLst/>
+            <a:ahLst/>
+            <a:cxnLst/>
+            <a:rect r="r" b="b" t="t" l="l"/>
+            <a:pathLst>
+              <a:path h="7086163" w="16514364">
+                <a:moveTo>
+                  <a:pt x="0" y="0"/>
+                </a:moveTo>
+                <a:lnTo>
+                  <a:pt x="16514364" y="0"/>
+                </a:lnTo>
+                <a:lnTo>
+                  <a:pt x="16514364" y="7086163"/>
+                </a:lnTo>
+                <a:lnTo>
+                  <a:pt x="0" y="7086163"/>
+                </a:lnTo>
+                <a:lnTo>
+                  <a:pt x="0" y="0"/>
+                </a:lnTo>
+                <a:close/>
+              </a:path>
+            </a:pathLst>
+          </a:custGeom>
+          <a:blipFill>
+            <a:blip r:embed="rId3">
+              <a:extLst>
+                <a:ext uri="{96DAC541-7B7A-43D3-8B79-37D633B846F1}">
+                  <asvg:svgBlip xmlns:asvg="http://schemas.microsoft.com/office/drawing/2016/SVG/main" r:embed="rId4"/>
+                </a:ext>
+              </a:extLst>
+            </a:blip>
+            <a:stretch>
+              <a:fillRect l="0" t="0" r="0" b="0"/>
+            </a:stretch>
+          </a:blipFill>
+        </p:spPr>
+      </p:sp>
+      <p:sp>
+        <p:nvSpPr>
+          <p:cNvPr name="TextBox 11" id="11"/>
+          <p:cNvSpPr txBox="true"/>
+          <p:nvPr/>
+        </p:nvSpPr>
+        <p:spPr>
+          <a:xfrm rot="0">
+            <a:off x="8245241" y="9751450"/>
+            <a:ext cx="1684932" cy="461769"/>
+          </a:xfrm>
+          <a:prstGeom prst="rect">
+            <a:avLst/>
+          </a:prstGeom>
+        </p:spPr>
+        <p:txBody>
+          <a:bodyPr anchor="t" rtlCol="false" tIns="0" lIns="0" bIns="0" rIns="0">
+            <a:spAutoFit/>
+          </a:bodyPr>
+          <a:lstStyle/>
+          <a:p>
+            <a:pPr algn="ctr">
+              <a:lnSpc>
+                <a:spcPts val="1826"/>
+              </a:lnSpc>
+            </a:pPr>
+            <a:r>
+              <a:rPr lang="en-US" b="true" sz="1739">
+                <a:solidFill>
+                  <a:srgbClr val="FFFFFF"/>
+                </a:solidFill>
+                <a:latin typeface="TT Lakes Neue Expanded Bold"/>
+                <a:ea typeface="TT Lakes Neue Expanded Bold"/>
+                <a:cs typeface="TT Lakes Neue Expanded Bold"/>
+                <a:sym typeface="TT Lakes Neue Expanded Bold"/>
+              </a:rPr>
+              <a:t>AMBER BENE</a:t>
+            </a:r>
+          </a:p>
+        </p:txBody>
+      </p:sp>
+      <p:sp>
+        <p:nvSpPr>
+          <p:cNvPr name="TextBox 12" id="12"/>
+          <p:cNvSpPr txBox="true"/>
+          <p:nvPr/>
+        </p:nvSpPr>
+        <p:spPr>
+          <a:xfrm rot="0">
+            <a:off x="3108024" y="4163770"/>
+            <a:ext cx="11959365" cy="1725848"/>
+          </a:xfrm>
+          <a:prstGeom prst="rect">
+            <a:avLst/>
+          </a:prstGeom>
+        </p:spPr>
+        <p:txBody>
+          <a:bodyPr anchor="t" rtlCol="false" tIns="0" lIns="0" bIns="0" rIns="0">
+            <a:spAutoFit/>
+          </a:bodyPr>
+          <a:lstStyle/>
+          <a:p>
+            <a:pPr algn="ctr">
+              <a:lnSpc>
+                <a:spcPts val="10705"/>
+              </a:lnSpc>
+            </a:pPr>
+            <a:r>
+              <a:rPr lang="en-US" b="true" sz="10195">
+                <a:solidFill>
+                  <a:srgbClr val="FFFFFF"/>
+                </a:solidFill>
+                <a:latin typeface="TT Lakes Neue Expanded Bold"/>
+                <a:ea typeface="TT Lakes Neue Expanded Bold"/>
+                <a:cs typeface="TT Lakes Neue Expanded Bold"/>
+                <a:sym typeface="TT Lakes Neue Expanded Bold"/>
+              </a:rPr>
+              <a:t>GRAZIE!</a:t>
+            </a:r>
+          </a:p>
+          <a:p>
+            <a:pPr algn="ctr">
+              <a:lnSpc>
+                <a:spcPts val="3145"/>
+              </a:lnSpc>
+            </a:pPr>
+            <a:r>
+              <a:rPr lang="en-US" b="true" sz="2996">
+                <a:solidFill>
+                  <a:srgbClr val="FFFFFF"/>
+                </a:solidFill>
+                <a:latin typeface="TT Lakes Neue Expanded Bold"/>
+                <a:ea typeface="TT Lakes Neue Expanded Bold"/>
+                <a:cs typeface="TT Lakes Neue Expanded Bold"/>
+                <a:sym typeface="TT Lakes Neue Expanded Bold"/>
+              </a:rPr>
+              <a:t>PULL REQUEST</a:t>
+            </a:r>
+          </a:p>
+        </p:txBody>
+      </p:sp>
+      <p:sp>
+        <p:nvSpPr>
+          <p:cNvPr name="Freeform 13" id="13"/>
+          <p:cNvSpPr/>
+          <p:nvPr/>
+        </p:nvSpPr>
+        <p:spPr>
+          <a:xfrm flipH="false" flipV="false" rot="0">
+            <a:off x="370932" y="232051"/>
+            <a:ext cx="1052888" cy="1052888"/>
+          </a:xfrm>
+          <a:custGeom>
+            <a:avLst/>
+            <a:gdLst/>
+            <a:ahLst/>
+            <a:cxnLst/>
+            <a:rect r="r" b="b" t="t" l="l"/>
+            <a:pathLst>
+              <a:path h="1052888" w="1052888">
+                <a:moveTo>
+                  <a:pt x="0" y="0"/>
+                </a:moveTo>
+                <a:lnTo>
+                  <a:pt x="1052888" y="0"/>
+                </a:lnTo>
+                <a:lnTo>
+                  <a:pt x="1052888" y="1052888"/>
+                </a:lnTo>
+                <a:lnTo>
+                  <a:pt x="0" y="1052888"/>
+                </a:lnTo>
+                <a:lnTo>
+                  <a:pt x="0" y="0"/>
+                </a:lnTo>
+                <a:close/>
+              </a:path>
+            </a:pathLst>
+          </a:custGeom>
+          <a:blipFill>
+            <a:blip r:embed="rId5"/>
+            <a:stretch>
+              <a:fillRect l="0" t="0" r="0" b="0"/>
+            </a:stretch>
+          </a:blipFill>
+        </p:spPr>
+      </p:sp>
+      <p:sp>
+        <p:nvSpPr>
+          <p:cNvPr name="Freeform 14" id="14"/>
+          <p:cNvSpPr/>
+          <p:nvPr/>
+        </p:nvSpPr>
+        <p:spPr>
+          <a:xfrm flipH="false" flipV="false" rot="0">
+            <a:off x="2208844" y="140643"/>
+            <a:ext cx="1235703" cy="1235703"/>
+          </a:xfrm>
+          <a:custGeom>
+            <a:avLst/>
+            <a:gdLst/>
+            <a:ahLst/>
+            <a:cxnLst/>
+            <a:rect r="r" b="b" t="t" l="l"/>
+            <a:pathLst>
+              <a:path h="1235703" w="1235703">
+                <a:moveTo>
+                  <a:pt x="0" y="0"/>
+                </a:moveTo>
+                <a:lnTo>
+                  <a:pt x="1235703" y="0"/>
+                </a:lnTo>
+                <a:lnTo>
+                  <a:pt x="1235703" y="1235704"/>
+                </a:lnTo>
+                <a:lnTo>
+                  <a:pt x="0" y="1235704"/>
+                </a:lnTo>
+                <a:lnTo>
+                  <a:pt x="0" y="0"/>
+                </a:lnTo>
+                <a:close/>
+              </a:path>
+            </a:pathLst>
+          </a:custGeom>
+          <a:blipFill>
+            <a:blip r:embed="rId6"/>
+            <a:stretch>
+              <a:fillRect l="0" t="0" r="0" b="0"/>
+            </a:stretch>
+          </a:blipFill>
+        </p:spPr>
       </p:sp>
     </p:spTree>
   </p:cSld>
@@ -16968,7 +16846,7 @@
 </p:sld>
 </file>
 
-<file path=ppt/slides/slide20.xml><?xml version="1.0" encoding="utf-8"?>
+<file path=ppt/slides/slide3.xml><?xml version="1.0" encoding="utf-8"?>
 <p:sld xmlns:p="http://schemas.openxmlformats.org/presentationml/2006/main" xmlns:a="http://schemas.openxmlformats.org/drawingml/2006/main" xmlns:r="http://schemas.openxmlformats.org/officeDocument/2006/relationships">
   <p:cSld>
     <p:bg>
@@ -17009,55 +16887,9 @@
           <a:chExt cx="0" cy="0"/>
         </a:xfrm>
       </p:grpSpPr>
-      <p:sp>
-        <p:nvSpPr>
-          <p:cNvPr name="Freeform 2" id="2"/>
-          <p:cNvSpPr/>
-          <p:nvPr/>
-        </p:nvSpPr>
-        <p:spPr>
-          <a:xfrm flipH="false" flipV="false" rot="0">
-            <a:off x="-4416186" y="1135773"/>
-            <a:ext cx="6994113" cy="8229600"/>
-          </a:xfrm>
-          <a:custGeom>
-            <a:avLst/>
-            <a:gdLst/>
-            <a:ahLst/>
-            <a:cxnLst/>
-            <a:rect r="r" b="b" t="t" l="l"/>
-            <a:pathLst>
-              <a:path h="8229600" w="6994113">
-                <a:moveTo>
-                  <a:pt x="0" y="0"/>
-                </a:moveTo>
-                <a:lnTo>
-                  <a:pt x="6994113" y="0"/>
-                </a:lnTo>
-                <a:lnTo>
-                  <a:pt x="6994113" y="8229600"/>
-                </a:lnTo>
-                <a:lnTo>
-                  <a:pt x="0" y="8229600"/>
-                </a:lnTo>
-                <a:lnTo>
-                  <a:pt x="0" y="0"/>
-                </a:lnTo>
-                <a:close/>
-              </a:path>
-            </a:pathLst>
-          </a:custGeom>
-          <a:blipFill>
-            <a:blip r:embed="rId2"/>
-            <a:stretch>
-              <a:fillRect l="0" t="0" r="0" b="0"/>
-            </a:stretch>
-          </a:blipFill>
-        </p:spPr>
-      </p:sp>
       <p:grpSp>
         <p:nvGrpSpPr>
-          <p:cNvPr name="Group 3" id="3"/>
+          <p:cNvPr name="Group 2" id="2"/>
           <p:cNvGrpSpPr/>
           <p:nvPr/>
         </p:nvGrpSpPr>
@@ -17071,7 +16903,7 @@
         </p:grpSpPr>
         <p:sp>
           <p:nvSpPr>
-            <p:cNvPr name="Freeform 4" id="4"/>
+            <p:cNvPr name="Freeform 3" id="3"/>
             <p:cNvSpPr/>
             <p:nvPr/>
           </p:nvSpPr>
@@ -17178,7 +17010,7 @@
         </p:sp>
         <p:sp>
           <p:nvSpPr>
-            <p:cNvPr name="TextBox 5" id="5"/>
+            <p:cNvPr name="TextBox 4" id="4"/>
             <p:cNvSpPr txBox="true"/>
             <p:nvPr/>
           </p:nvSpPr>
@@ -17204,9 +17036,113 @@
           </p:txBody>
         </p:sp>
       </p:grpSp>
+      <p:sp>
+        <p:nvSpPr>
+          <p:cNvPr name="Freeform 5" id="5"/>
+          <p:cNvSpPr/>
+          <p:nvPr/>
+        </p:nvSpPr>
+        <p:spPr>
+          <a:xfrm flipH="false" flipV="false" rot="0">
+            <a:off x="13333483" y="-5083807"/>
+            <a:ext cx="11706247" cy="11706247"/>
+          </a:xfrm>
+          <a:custGeom>
+            <a:avLst/>
+            <a:gdLst/>
+            <a:ahLst/>
+            <a:cxnLst/>
+            <a:rect r="r" b="b" t="t" l="l"/>
+            <a:pathLst>
+              <a:path h="11706247" w="11706247">
+                <a:moveTo>
+                  <a:pt x="0" y="0"/>
+                </a:moveTo>
+                <a:lnTo>
+                  <a:pt x="11706247" y="0"/>
+                </a:lnTo>
+                <a:lnTo>
+                  <a:pt x="11706247" y="11706247"/>
+                </a:lnTo>
+                <a:lnTo>
+                  <a:pt x="0" y="11706247"/>
+                </a:lnTo>
+                <a:lnTo>
+                  <a:pt x="0" y="0"/>
+                </a:lnTo>
+                <a:close/>
+              </a:path>
+            </a:pathLst>
+          </a:custGeom>
+          <a:blipFill>
+            <a:blip r:embed="rId2">
+              <a:extLst>
+                <a:ext uri="{96DAC541-7B7A-43D3-8B79-37D633B846F1}">
+                  <asvg:svgBlip xmlns:asvg="http://schemas.microsoft.com/office/drawing/2016/SVG/main" r:embed="rId3"/>
+                </a:ext>
+              </a:extLst>
+            </a:blip>
+            <a:stretch>
+              <a:fillRect l="0" t="0" r="0" b="0"/>
+            </a:stretch>
+          </a:blipFill>
+        </p:spPr>
+      </p:sp>
+      <p:sp>
+        <p:nvSpPr>
+          <p:cNvPr name="Freeform 6" id="6"/>
+          <p:cNvSpPr/>
+          <p:nvPr/>
+        </p:nvSpPr>
+        <p:spPr>
+          <a:xfrm flipH="false" flipV="false" rot="0">
+            <a:off x="6783619" y="1543050"/>
+            <a:ext cx="10611757" cy="9782111"/>
+          </a:xfrm>
+          <a:custGeom>
+            <a:avLst/>
+            <a:gdLst/>
+            <a:ahLst/>
+            <a:cxnLst/>
+            <a:rect r="r" b="b" t="t" l="l"/>
+            <a:pathLst>
+              <a:path h="9782111" w="10611757">
+                <a:moveTo>
+                  <a:pt x="0" y="0"/>
+                </a:moveTo>
+                <a:lnTo>
+                  <a:pt x="10611758" y="0"/>
+                </a:lnTo>
+                <a:lnTo>
+                  <a:pt x="10611758" y="9782111"/>
+                </a:lnTo>
+                <a:lnTo>
+                  <a:pt x="0" y="9782111"/>
+                </a:lnTo>
+                <a:lnTo>
+                  <a:pt x="0" y="0"/>
+                </a:lnTo>
+                <a:close/>
+              </a:path>
+            </a:pathLst>
+          </a:custGeom>
+          <a:blipFill>
+            <a:blip r:embed="rId4">
+              <a:extLst>
+                <a:ext uri="{96DAC541-7B7A-43D3-8B79-37D633B846F1}">
+                  <asvg:svgBlip xmlns:asvg="http://schemas.microsoft.com/office/drawing/2016/SVG/main" r:embed="rId5"/>
+                </a:ext>
+              </a:extLst>
+            </a:blip>
+            <a:stretch>
+              <a:fillRect l="0" t="0" r="0" b="0"/>
+            </a:stretch>
+          </a:blipFill>
+        </p:spPr>
+      </p:sp>
       <p:grpSp>
         <p:nvGrpSpPr>
-          <p:cNvPr name="Group 6" id="6"/>
+          <p:cNvPr name="Group 7" id="7"/>
           <p:cNvGrpSpPr/>
           <p:nvPr/>
         </p:nvGrpSpPr>
@@ -17220,7 +17156,7 @@
         </p:grpSpPr>
         <p:sp>
           <p:nvSpPr>
-            <p:cNvPr name="Freeform 7" id="7"/>
+            <p:cNvPr name="Freeform 8" id="8"/>
             <p:cNvSpPr/>
             <p:nvPr/>
           </p:nvSpPr>
@@ -17327,7 +17263,7 @@
         </p:sp>
         <p:sp>
           <p:nvSpPr>
-            <p:cNvPr name="TextBox 8" id="8"/>
+            <p:cNvPr name="TextBox 9" id="9"/>
             <p:cNvSpPr txBox="true"/>
             <p:nvPr/>
           </p:nvSpPr>
@@ -17355,13 +17291,13 @@
       </p:grpSp>
       <p:sp>
         <p:nvSpPr>
-          <p:cNvPr name="Freeform 9" id="9"/>
+          <p:cNvPr name="Freeform 10" id="10"/>
           <p:cNvSpPr/>
           <p:nvPr/>
         </p:nvSpPr>
         <p:spPr>
           <a:xfrm flipH="false" flipV="false" rot="0">
-            <a:off x="13762244" y="2186245"/>
+            <a:off x="-4062196" y="1351079"/>
             <a:ext cx="6994113" cy="8229600"/>
           </a:xfrm>
           <a:custGeom>
@@ -17376,10 +17312,10 @@
                   <a:pt x="0" y="0"/>
                 </a:moveTo>
                 <a:lnTo>
-                  <a:pt x="6994112" y="0"/>
-                </a:lnTo>
-                <a:lnTo>
-                  <a:pt x="6994112" y="8229600"/>
+                  <a:pt x="6994113" y="0"/>
+                </a:lnTo>
+                <a:lnTo>
+                  <a:pt x="6994113" y="8229600"/>
                 </a:lnTo>
                 <a:lnTo>
                   <a:pt x="0" y="8229600"/>
@@ -17392,7 +17328,7 @@
             </a:pathLst>
           </a:custGeom>
           <a:blipFill>
-            <a:blip r:embed="rId2"/>
+            <a:blip r:embed="rId6"/>
             <a:stretch>
               <a:fillRect l="0" t="0" r="0" b="0"/>
             </a:stretch>
@@ -17401,14 +17337,14 @@
       </p:sp>
       <p:sp>
         <p:nvSpPr>
-          <p:cNvPr name="Freeform 10" id="10"/>
+          <p:cNvPr name="Freeform 11" id="11"/>
           <p:cNvSpPr/>
           <p:nvPr/>
         </p:nvSpPr>
         <p:spPr>
           <a:xfrm flipH="false" flipV="false" rot="0">
-            <a:off x="1028700" y="1653955"/>
-            <a:ext cx="16514364" cy="7086163"/>
+            <a:off x="1714696" y="2463304"/>
+            <a:ext cx="4950393" cy="7521315"/>
           </a:xfrm>
           <a:custGeom>
             <a:avLst/>
@@ -17417,18 +17353,18 @@
             <a:cxnLst/>
             <a:rect r="r" b="b" t="t" l="l"/>
             <a:pathLst>
-              <a:path h="7086163" w="16514364">
+              <a:path h="7521315" w="4950393">
                 <a:moveTo>
                   <a:pt x="0" y="0"/>
                 </a:moveTo>
                 <a:lnTo>
-                  <a:pt x="16514364" y="0"/>
-                </a:lnTo>
-                <a:lnTo>
-                  <a:pt x="16514364" y="7086163"/>
-                </a:lnTo>
-                <a:lnTo>
-                  <a:pt x="0" y="7086163"/>
+                  <a:pt x="4950393" y="0"/>
+                </a:lnTo>
+                <a:lnTo>
+                  <a:pt x="4950393" y="7521315"/>
+                </a:lnTo>
+                <a:lnTo>
+                  <a:pt x="0" y="7521315"/>
                 </a:lnTo>
                 <a:lnTo>
                   <a:pt x="0" y="0"/>
@@ -17438,10 +17374,10 @@
             </a:pathLst>
           </a:custGeom>
           <a:blipFill>
-            <a:blip r:embed="rId3">
+            <a:blip r:embed="rId7">
               <a:extLst>
                 <a:ext uri="{96DAC541-7B7A-43D3-8B79-37D633B846F1}">
-                  <asvg:svgBlip xmlns:asvg="http://schemas.microsoft.com/office/drawing/2016/SVG/main" r:embed="rId4"/>
+                  <asvg:svgBlip xmlns:asvg="http://schemas.microsoft.com/office/drawing/2016/SVG/main" r:embed="rId8"/>
                 </a:ext>
               </a:extLst>
             </a:blip>
@@ -17453,14 +17389,66 @@
       </p:sp>
       <p:sp>
         <p:nvSpPr>
-          <p:cNvPr name="TextBox 11" id="11"/>
+          <p:cNvPr name="Freeform 12" id="12"/>
+          <p:cNvSpPr/>
+          <p:nvPr/>
+        </p:nvSpPr>
+        <p:spPr>
+          <a:xfrm flipH="false" flipV="false" rot="0">
+            <a:off x="523980" y="2655858"/>
+            <a:ext cx="3665913" cy="4114800"/>
+          </a:xfrm>
+          <a:custGeom>
+            <a:avLst/>
+            <a:gdLst/>
+            <a:ahLst/>
+            <a:cxnLst/>
+            <a:rect r="r" b="b" t="t" l="l"/>
+            <a:pathLst>
+              <a:path h="4114800" w="3665913">
+                <a:moveTo>
+                  <a:pt x="0" y="0"/>
+                </a:moveTo>
+                <a:lnTo>
+                  <a:pt x="3665912" y="0"/>
+                </a:lnTo>
+                <a:lnTo>
+                  <a:pt x="3665912" y="4114800"/>
+                </a:lnTo>
+                <a:lnTo>
+                  <a:pt x="0" y="4114800"/>
+                </a:lnTo>
+                <a:lnTo>
+                  <a:pt x="0" y="0"/>
+                </a:lnTo>
+                <a:close/>
+              </a:path>
+            </a:pathLst>
+          </a:custGeom>
+          <a:blipFill>
+            <a:blip r:embed="rId9">
+              <a:extLst>
+                <a:ext uri="{96DAC541-7B7A-43D3-8B79-37D633B846F1}">
+                  <asvg:svgBlip xmlns:asvg="http://schemas.microsoft.com/office/drawing/2016/SVG/main" r:embed="rId10"/>
+                </a:ext>
+              </a:extLst>
+            </a:blip>
+            <a:stretch>
+              <a:fillRect l="0" t="0" r="0" b="0"/>
+            </a:stretch>
+          </a:blipFill>
+        </p:spPr>
+      </p:sp>
+      <p:sp>
+        <p:nvSpPr>
+          <p:cNvPr name="TextBox 13" id="13"/>
           <p:cNvSpPr txBox="true"/>
           <p:nvPr/>
         </p:nvSpPr>
         <p:spPr>
           <a:xfrm rot="0">
             <a:off x="8245241" y="9751450"/>
-            <a:ext cx="1684932" cy="461769"/>
+            <a:ext cx="1684932" cy="233169"/>
           </a:xfrm>
           <a:prstGeom prst="rect">
             <a:avLst/>
@@ -17487,21 +17475,21 @@
                 <a:cs typeface="TT Lakes Neue Expanded Bold"/>
                 <a:sym typeface="TT Lakes Neue Expanded Bold"/>
               </a:rPr>
-              <a:t>AMBER BENE</a:t>
+              <a:t>PAGE 3</a:t>
             </a:r>
           </a:p>
         </p:txBody>
       </p:sp>
       <p:sp>
         <p:nvSpPr>
-          <p:cNvPr name="TextBox 12" id="12"/>
+          <p:cNvPr name="TextBox 14" id="14"/>
           <p:cNvSpPr txBox="true"/>
           <p:nvPr/>
         </p:nvSpPr>
         <p:spPr>
           <a:xfrm rot="0">
-            <a:off x="3108024" y="4163770"/>
-            <a:ext cx="11959365" cy="1725848"/>
+            <a:off x="7582912" y="2362109"/>
+            <a:ext cx="9401747" cy="654173"/>
           </a:xfrm>
           <a:prstGeom prst="rect">
             <a:avLst/>
@@ -17513,13 +17501,13 @@
           </a:bodyPr>
           <a:lstStyle/>
           <a:p>
-            <a:pPr algn="ctr">
+            <a:pPr algn="l">
               <a:lnSpc>
-                <a:spcPts val="10705"/>
+                <a:spcPts val="4978"/>
               </a:lnSpc>
             </a:pPr>
             <a:r>
-              <a:rPr lang="en-US" b="true" sz="10195">
+              <a:rPr lang="en-US" sz="4741" b="true">
                 <a:solidFill>
                   <a:srgbClr val="FFFFFF"/>
                 </a:solidFill>
@@ -17528,39 +17516,257 @@
                 <a:cs typeface="TT Lakes Neue Expanded Bold"/>
                 <a:sym typeface="TT Lakes Neue Expanded Bold"/>
               </a:rPr>
-              <a:t>GRAZIE!</a:t>
+              <a:t>LE CHANGE REQUEST</a:t>
             </a:r>
           </a:p>
-          <a:p>
-            <a:pPr algn="ctr">
+        </p:txBody>
+      </p:sp>
+      <p:sp>
+        <p:nvSpPr>
+          <p:cNvPr name="TextBox 15" id="15"/>
+          <p:cNvSpPr txBox="true"/>
+          <p:nvPr/>
+        </p:nvSpPr>
+        <p:spPr>
+          <a:xfrm rot="0">
+            <a:off x="7600950" y="3277082"/>
+            <a:ext cx="8114095" cy="4648006"/>
+          </a:xfrm>
+          <a:prstGeom prst="rect">
+            <a:avLst/>
+          </a:prstGeom>
+        </p:spPr>
+        <p:txBody>
+          <a:bodyPr anchor="t" rtlCol="false" tIns="0" lIns="0" bIns="0" rIns="0">
+            <a:spAutoFit/>
+          </a:bodyPr>
+          <a:lstStyle/>
+          <a:p>
+            <a:pPr algn="just">
               <a:lnSpc>
-                <a:spcPts val="3145"/>
+                <a:spcPts val="2456"/>
               </a:lnSpc>
             </a:pPr>
             <a:r>
-              <a:rPr lang="en-US" b="true" sz="2996">
+              <a:rPr lang="en-US" sz="2339" spc="79">
                 <a:solidFill>
                   <a:srgbClr val="FFFFFF"/>
                 </a:solidFill>
-                <a:latin typeface="TT Lakes Neue Expanded Bold"/>
-                <a:ea typeface="TT Lakes Neue Expanded Bold"/>
-                <a:cs typeface="TT Lakes Neue Expanded Bold"/>
-                <a:sym typeface="TT Lakes Neue Expanded Bold"/>
+                <a:latin typeface="Poppins"/>
+                <a:ea typeface="Poppins"/>
+                <a:cs typeface="Poppins"/>
+                <a:sym typeface="Poppins"/>
               </a:rPr>
-              <a:t>PULL REQUEST</a:t>
+              <a:t>Abbiamo pianificato tre interventi mirati:</a:t>
             </a:r>
           </a:p>
+          <a:p>
+            <a:pPr algn="just">
+              <a:lnSpc>
+                <a:spcPts val="2456"/>
+              </a:lnSpc>
+            </a:pPr>
+          </a:p>
+          <a:p>
+            <a:pPr algn="just" marL="505164" indent="-252582" lvl="1">
+              <a:lnSpc>
+                <a:spcPts val="2456"/>
+              </a:lnSpc>
+              <a:buFont typeface="Arial"/>
+              <a:buChar char="•"/>
+            </a:pPr>
+            <a:r>
+              <a:rPr lang="en-US" sz="2339" spc="79">
+                <a:solidFill>
+                  <a:srgbClr val="FFDE59"/>
+                </a:solidFill>
+                <a:latin typeface="Poppins"/>
+                <a:ea typeface="Poppins"/>
+                <a:cs typeface="Poppins"/>
+                <a:sym typeface="Poppins"/>
+              </a:rPr>
+              <a:t>CR01 (Manutenzione Evolutiva):</a:t>
+            </a:r>
+            <a:r>
+              <a:rPr lang="en-US" sz="2339" spc="79">
+                <a:solidFill>
+                  <a:srgbClr val="FFFFFF"/>
+                </a:solidFill>
+                <a:latin typeface="Poppins"/>
+                <a:ea typeface="Poppins"/>
+                <a:cs typeface="Poppins"/>
+                <a:sym typeface="Poppins"/>
+              </a:rPr>
+              <a:t> Supporto a JUnit 5 (riconoscimento e conversione delle nuove annotazioni).</a:t>
+            </a:r>
+          </a:p>
+          <a:p>
+            <a:pPr algn="just">
+              <a:lnSpc>
+                <a:spcPts val="2456"/>
+              </a:lnSpc>
+            </a:pPr>
+          </a:p>
+          <a:p>
+            <a:pPr algn="just">
+              <a:lnSpc>
+                <a:spcPts val="2456"/>
+              </a:lnSpc>
+            </a:pPr>
+          </a:p>
+          <a:p>
+            <a:pPr algn="just" marL="505164" indent="-252582" lvl="1">
+              <a:lnSpc>
+                <a:spcPts val="2456"/>
+              </a:lnSpc>
+              <a:buFont typeface="Arial"/>
+              <a:buChar char="•"/>
+            </a:pPr>
+            <a:r>
+              <a:rPr lang="en-US" sz="2339" spc="79">
+                <a:solidFill>
+                  <a:srgbClr val="FFDE59"/>
+                </a:solidFill>
+                <a:latin typeface="Poppins"/>
+                <a:ea typeface="Poppins"/>
+                <a:cs typeface="Poppins"/>
+                <a:sym typeface="Poppins"/>
+              </a:rPr>
+              <a:t>CR02 (Manutenzione Adattiva):</a:t>
+            </a:r>
+            <a:r>
+              <a:rPr lang="en-US" sz="2339" spc="79">
+                <a:solidFill>
+                  <a:srgbClr val="FFFFFF"/>
+                </a:solidFill>
+                <a:latin typeface="Poppins"/>
+                <a:ea typeface="Poppins"/>
+                <a:cs typeface="Poppins"/>
+                <a:sym typeface="Poppins"/>
+              </a:rPr>
+              <a:t> Integrazione Project AMBER. Aggiornamento del parser per supportare il livello linguistico Java 17.</a:t>
+            </a:r>
+          </a:p>
+          <a:p>
+            <a:pPr algn="just">
+              <a:lnSpc>
+                <a:spcPts val="2456"/>
+              </a:lnSpc>
+            </a:pPr>
+          </a:p>
+          <a:p>
+            <a:pPr algn="just">
+              <a:lnSpc>
+                <a:spcPts val="2456"/>
+              </a:lnSpc>
+            </a:pPr>
+          </a:p>
+          <a:p>
+            <a:pPr algn="just" marL="505164" indent="-252582" lvl="1">
+              <a:lnSpc>
+                <a:spcPts val="2456"/>
+              </a:lnSpc>
+              <a:buFont typeface="Arial"/>
+              <a:buChar char="•"/>
+            </a:pPr>
+            <a:r>
+              <a:rPr lang="en-US" sz="2339" spc="79">
+                <a:solidFill>
+                  <a:srgbClr val="FFDE59"/>
+                </a:solidFill>
+                <a:latin typeface="Poppins"/>
+                <a:ea typeface="Poppins"/>
+                <a:cs typeface="Poppins"/>
+                <a:sym typeface="Poppins"/>
+              </a:rPr>
+              <a:t>CR03 (Manutenzione Perfettiva)</a:t>
+            </a:r>
+            <a:r>
+              <a:rPr lang="en-US" sz="2339" spc="79">
+                <a:solidFill>
+                  <a:srgbClr val="FFFFFF"/>
+                </a:solidFill>
+                <a:latin typeface="Poppins"/>
+                <a:ea typeface="Poppins"/>
+                <a:cs typeface="Poppins"/>
+                <a:sym typeface="Poppins"/>
+              </a:rPr>
+              <a:t>: Controllo di granularità sui metodi scelti dall'utente.</a:t>
+            </a:r>
+          </a:p>
+          <a:p>
+            <a:pPr algn="just">
+              <a:lnSpc>
+                <a:spcPts val="2771"/>
+              </a:lnSpc>
+              <a:spcBef>
+                <a:spcPct val="0"/>
+              </a:spcBef>
+            </a:pPr>
+          </a:p>
         </p:txBody>
       </p:sp>
       <p:sp>
         <p:nvSpPr>
-          <p:cNvPr name="Freeform 13" id="13"/>
+          <p:cNvPr name="Freeform 16" id="16"/>
           <p:cNvSpPr/>
           <p:nvPr/>
         </p:nvSpPr>
         <p:spPr>
           <a:xfrm flipH="false" flipV="false" rot="0">
-            <a:off x="370932" y="232051"/>
+            <a:off x="16984659" y="653111"/>
+            <a:ext cx="549282" cy="549282"/>
+          </a:xfrm>
+          <a:custGeom>
+            <a:avLst/>
+            <a:gdLst/>
+            <a:ahLst/>
+            <a:cxnLst/>
+            <a:rect r="r" b="b" t="t" l="l"/>
+            <a:pathLst>
+              <a:path h="549282" w="549282">
+                <a:moveTo>
+                  <a:pt x="0" y="0"/>
+                </a:moveTo>
+                <a:lnTo>
+                  <a:pt x="549282" y="0"/>
+                </a:lnTo>
+                <a:lnTo>
+                  <a:pt x="549282" y="549283"/>
+                </a:lnTo>
+                <a:lnTo>
+                  <a:pt x="0" y="549283"/>
+                </a:lnTo>
+                <a:lnTo>
+                  <a:pt x="0" y="0"/>
+                </a:lnTo>
+                <a:close/>
+              </a:path>
+            </a:pathLst>
+          </a:custGeom>
+          <a:blipFill>
+            <a:blip r:embed="rId11">
+              <a:extLst>
+                <a:ext uri="{96DAC541-7B7A-43D3-8B79-37D633B846F1}">
+                  <asvg:svgBlip xmlns:asvg="http://schemas.microsoft.com/office/drawing/2016/SVG/main" r:embed="rId12"/>
+                </a:ext>
+              </a:extLst>
+            </a:blip>
+            <a:stretch>
+              <a:fillRect l="0" t="0" r="0" b="0"/>
+            </a:stretch>
+          </a:blipFill>
+        </p:spPr>
+      </p:sp>
+      <p:sp>
+        <p:nvSpPr>
+          <p:cNvPr name="Freeform 17" id="17"/>
+          <p:cNvSpPr/>
+          <p:nvPr/>
+        </p:nvSpPr>
+        <p:spPr>
+          <a:xfrm flipH="false" flipV="false" rot="0">
+            <a:off x="325534" y="242872"/>
             <a:ext cx="1052888" cy="1052888"/>
           </a:xfrm>
           <a:custGeom>
@@ -17591,7 +17797,7 @@
             </a:pathLst>
           </a:custGeom>
           <a:blipFill>
-            <a:blip r:embed="rId5"/>
+            <a:blip r:embed="rId13"/>
             <a:stretch>
               <a:fillRect l="0" t="0" r="0" b="0"/>
             </a:stretch>
@@ -17600,13 +17806,13 @@
       </p:sp>
       <p:sp>
         <p:nvSpPr>
-          <p:cNvPr name="Freeform 14" id="14"/>
+          <p:cNvPr name="Freeform 18" id="18"/>
           <p:cNvSpPr/>
           <p:nvPr/>
         </p:nvSpPr>
         <p:spPr>
           <a:xfrm flipH="false" flipV="false" rot="0">
-            <a:off x="2208844" y="140643"/>
+            <a:off x="1987817" y="151465"/>
             <a:ext cx="1235703" cy="1235703"/>
           </a:xfrm>
           <a:custGeom>
@@ -17624,10 +17830,10 @@
                   <a:pt x="1235703" y="0"/>
                 </a:lnTo>
                 <a:lnTo>
-                  <a:pt x="1235703" y="1235704"/>
-                </a:lnTo>
-                <a:lnTo>
-                  <a:pt x="0" y="1235704"/>
+                  <a:pt x="1235703" y="1235703"/>
+                </a:lnTo>
+                <a:lnTo>
+                  <a:pt x="0" y="1235703"/>
                 </a:lnTo>
                 <a:lnTo>
                   <a:pt x="0" y="0"/>
@@ -17637,7 +17843,7 @@
             </a:pathLst>
           </a:custGeom>
           <a:blipFill>
-            <a:blip r:embed="rId6"/>
+            <a:blip r:embed="rId14"/>
             <a:stretch>
               <a:fillRect l="0" t="0" r="0" b="0"/>
             </a:stretch>
@@ -17652,7 +17858,7 @@
 </p:sld>
 </file>
 
-<file path=ppt/slides/slide3.xml><?xml version="1.0" encoding="utf-8"?>
+<file path=ppt/slides/slide4.xml><?xml version="1.0" encoding="utf-8"?>
 <p:sld xmlns:p="http://schemas.openxmlformats.org/presentationml/2006/main" xmlns:a="http://schemas.openxmlformats.org/drawingml/2006/main" xmlns:r="http://schemas.openxmlformats.org/officeDocument/2006/relationships">
   <p:cSld>
     <p:bg>
@@ -17999,8 +18205,8 @@
         </p:nvSpPr>
         <p:spPr>
           <a:xfrm flipH="false" flipV="false" rot="0">
-            <a:off x="10402884" y="1543050"/>
-            <a:ext cx="8776139" cy="9617687"/>
+            <a:off x="11522127" y="2012941"/>
+            <a:ext cx="7778462" cy="8524342"/>
           </a:xfrm>
           <a:custGeom>
             <a:avLst/>
@@ -18009,18 +18215,18 @@
             <a:cxnLst/>
             <a:rect r="r" b="b" t="t" l="l"/>
             <a:pathLst>
-              <a:path h="9617687" w="8776139">
+              <a:path h="8524342" w="7778462">
                 <a:moveTo>
                   <a:pt x="0" y="0"/>
                 </a:moveTo>
                 <a:lnTo>
-                  <a:pt x="8776140" y="0"/>
-                </a:lnTo>
-                <a:lnTo>
-                  <a:pt x="8776140" y="9617687"/>
-                </a:lnTo>
-                <a:lnTo>
-                  <a:pt x="0" y="9617687"/>
+                  <a:pt x="7778462" y="0"/>
+                </a:lnTo>
+                <a:lnTo>
+                  <a:pt x="7778462" y="8524342"/>
+                </a:lnTo>
+                <a:lnTo>
+                  <a:pt x="0" y="8524342"/>
                 </a:lnTo>
                 <a:lnTo>
                   <a:pt x="0" y="0"/>
@@ -18051,7 +18257,7 @@
         </p:nvSpPr>
         <p:spPr>
           <a:xfrm flipH="false" flipV="false" rot="0">
-            <a:off x="11955865" y="837130"/>
+            <a:off x="11914301" y="562489"/>
             <a:ext cx="6994113" cy="8229600"/>
           </a:xfrm>
           <a:custGeom>
@@ -18097,8 +18303,8 @@
         </p:nvSpPr>
         <p:spPr>
           <a:xfrm flipH="false" flipV="false" rot="0">
-            <a:off x="8368259" y="2636395"/>
-            <a:ext cx="4637582" cy="4114800"/>
+            <a:off x="10419155" y="3485928"/>
+            <a:ext cx="3320977" cy="2946612"/>
           </a:xfrm>
           <a:custGeom>
             <a:avLst/>
@@ -18107,18 +18313,18 @@
             <a:cxnLst/>
             <a:rect r="r" b="b" t="t" l="l"/>
             <a:pathLst>
-              <a:path h="4114800" w="4637582">
+              <a:path h="2946612" w="3320977">
                 <a:moveTo>
                   <a:pt x="0" y="0"/>
                 </a:moveTo>
                 <a:lnTo>
-                  <a:pt x="4637582" y="0"/>
-                </a:lnTo>
-                <a:lnTo>
-                  <a:pt x="4637582" y="4114800"/>
-                </a:lnTo>
-                <a:lnTo>
-                  <a:pt x="0" y="4114800"/>
+                  <a:pt x="3320977" y="0"/>
+                </a:lnTo>
+                <a:lnTo>
+                  <a:pt x="3320977" y="2946613"/>
+                </a:lnTo>
+                <a:lnTo>
+                  <a:pt x="0" y="2946613"/>
                 </a:lnTo>
                 <a:lnTo>
                   <a:pt x="0" y="0"/>
@@ -18177,7 +18383,7 @@
                 <a:cs typeface="TT Lakes Neue Expanded Bold"/>
                 <a:sym typeface="TT Lakes Neue Expanded Bold"/>
               </a:rPr>
-              <a:t>PAGE 3</a:t>
+              <a:t>PAGE 4</a:t>
             </a:r>
           </a:p>
         </p:txBody>
@@ -18283,8 +18489,8 @@
         </p:nvSpPr>
         <p:spPr>
           <a:xfrm rot="0">
-            <a:off x="1028700" y="4416432"/>
-            <a:ext cx="6572250" cy="937066"/>
+            <a:off x="260683" y="4305748"/>
+            <a:ext cx="9370689" cy="4727062"/>
           </a:xfrm>
           <a:prstGeom prst="rect">
             <a:avLst/>
@@ -18296,13 +18502,27 @@
           </a:bodyPr>
           <a:lstStyle/>
           <a:p>
-            <a:pPr algn="just">
+            <a:pPr algn="l" marL="461969" indent="-230984" lvl="1">
               <a:lnSpc>
-                <a:spcPts val="2561"/>
+                <a:spcPts val="2246"/>
               </a:lnSpc>
+              <a:buFont typeface="Arial"/>
+              <a:buChar char="•"/>
             </a:pPr>
             <a:r>
-              <a:rPr lang="en-US" sz="2439" spc="82">
+              <a:rPr lang="en-US" sz="2139" spc="72">
+                <a:solidFill>
+                  <a:srgbClr val="FFDE59"/>
+                </a:solidFill>
+                <a:latin typeface="Poppins"/>
+                <a:ea typeface="Poppins"/>
+                <a:cs typeface="Poppins"/>
+                <a:sym typeface="Poppins"/>
+              </a:rPr>
+              <a:t>Forte Accoppiamento Architetturale: </a:t>
+            </a:r>
+            <a:r>
+              <a:rPr lang="en-US" sz="2139" spc="72">
                 <a:solidFill>
                   <a:srgbClr val="FFFFFF"/>
                 </a:solidFill>
@@ -18311,50 +18531,10 @@
                 <a:cs typeface="Poppins"/>
                 <a:sym typeface="Poppins"/>
               </a:rPr>
-              <a:t>Il sistema presentava tre limitazioni tecniche critiche:</a:t>
+              <a:t>Supporto esclusivo al framework legacy JUnit 4. Nessu</a:t>
             </a:r>
-          </a:p>
-          <a:p>
-            <a:pPr algn="just">
-              <a:lnSpc>
-                <a:spcPts val="2036"/>
-              </a:lnSpc>
-              <a:spcBef>
-                <a:spcPct val="0"/>
-              </a:spcBef>
-            </a:pPr>
-          </a:p>
-        </p:txBody>
-      </p:sp>
-      <p:sp>
-        <p:nvSpPr>
-          <p:cNvPr name="TextBox 15" id="15"/>
-          <p:cNvSpPr txBox="true"/>
-          <p:nvPr/>
-        </p:nvSpPr>
-        <p:spPr>
-          <a:xfrm rot="0">
-            <a:off x="930041" y="5363023"/>
-            <a:ext cx="6572250" cy="4875653"/>
-          </a:xfrm>
-          <a:prstGeom prst="rect">
-            <a:avLst/>
-          </a:prstGeom>
-        </p:spPr>
-        <p:txBody>
-          <a:bodyPr anchor="t" rtlCol="false" tIns="0" lIns="0" bIns="0" rIns="0">
-            <a:spAutoFit/>
-          </a:bodyPr>
-          <a:lstStyle/>
-          <a:p>
-            <a:pPr algn="l" marL="526753" indent="-263377" lvl="1">
-              <a:lnSpc>
-                <a:spcPts val="2561"/>
-              </a:lnSpc>
-              <a:buAutoNum type="arabicPeriod" startAt="1"/>
-            </a:pPr>
             <a:r>
-              <a:rPr lang="en-US" sz="2439" spc="82">
+              <a:rPr lang="en-US" sz="2139" spc="72">
                 <a:solidFill>
                   <a:srgbClr val="FFFFFF"/>
                 </a:solidFill>
@@ -18363,32 +18543,38 @@
                 <a:cs typeface="Poppins"/>
                 <a:sym typeface="Poppins"/>
               </a:rPr>
-              <a:t>Accoppiamento rigido e supporto esclusivo a JUnit 4. (CR01)</a:t>
+              <a:t>na compatibilità con l'architettura modulare di JUnit 5 </a:t>
             </a:r>
           </a:p>
           <a:p>
             <a:pPr algn="l">
               <a:lnSpc>
-                <a:spcPts val="2561"/>
+                <a:spcPts val="2246"/>
               </a:lnSpc>
             </a:pPr>
           </a:p>
           <a:p>
-            <a:pPr algn="l">
+            <a:pPr algn="l" marL="461969" indent="-230984" lvl="1">
               <a:lnSpc>
-                <a:spcPts val="2456"/>
+                <a:spcPts val="2246"/>
               </a:lnSpc>
-            </a:pPr>
-          </a:p>
-          <a:p>
-            <a:pPr algn="l" marL="526753" indent="-263377" lvl="1">
-              <a:lnSpc>
-                <a:spcPts val="2561"/>
-              </a:lnSpc>
-              <a:buAutoNum type="arabicPeriod" startAt="1"/>
+              <a:buFont typeface="Arial"/>
+              <a:buChar char="•"/>
             </a:pPr>
             <a:r>
-              <a:rPr lang="en-US" sz="2439" spc="82">
+              <a:rPr lang="en-US" sz="2139" spc="72">
+                <a:solidFill>
+                  <a:srgbClr val="FFDE59"/>
+                </a:solidFill>
+                <a:latin typeface="Poppins"/>
+                <a:ea typeface="Poppins"/>
+                <a:cs typeface="Poppins"/>
+                <a:sym typeface="Poppins"/>
+              </a:rPr>
+              <a:t>Obsolescenza Sintattica dell'AST: </a:t>
+            </a:r>
+            <a:r>
+              <a:rPr lang="en-US" sz="2139" spc="72">
                 <a:solidFill>
                   <a:srgbClr val="FFFFFF"/>
                 </a:solidFill>
@@ -18397,10 +18583,38 @@
                 <a:cs typeface="Poppins"/>
                 <a:sym typeface="Poppins"/>
               </a:rPr>
-              <a:t>Aggiornamento del parser per supportare il livello linguistico di Java 17/21 e permettere l’uso di AMBER. </a:t>
+              <a:t>Il parser originale generava errori imbattendosi in codice Java moderno </a:t>
+            </a:r>
+          </a:p>
+          <a:p>
+            <a:pPr algn="l">
+              <a:lnSpc>
+                <a:spcPts val="2246"/>
+              </a:lnSpc>
+            </a:pPr>
+          </a:p>
+          <a:p>
+            <a:pPr algn="l" marL="461969" indent="-230984" lvl="1">
+              <a:lnSpc>
+                <a:spcPts val="2246"/>
+              </a:lnSpc>
+              <a:buFont typeface="Arial"/>
+              <a:buChar char="•"/>
+            </a:pPr>
+            <a:r>
+              <a:rPr lang="en-US" sz="2139" spc="72">
+                <a:solidFill>
+                  <a:srgbClr val="FFDE59"/>
+                </a:solidFill>
+                <a:latin typeface="Poppins"/>
+                <a:ea typeface="Poppins"/>
+                <a:cs typeface="Poppins"/>
+                <a:sym typeface="Poppins"/>
+              </a:rPr>
+              <a:t>Granularità Grossolana</a:t>
             </a:r>
             <a:r>
-              <a:rPr lang="en-US" sz="2439" spc="82">
+              <a:rPr lang="en-US" sz="2139" spc="72">
                 <a:solidFill>
                   <a:srgbClr val="FFFFFF"/>
                 </a:solidFill>
@@ -18409,32 +18623,38 @@
                 <a:cs typeface="Poppins"/>
                 <a:sym typeface="Poppins"/>
               </a:rPr>
-              <a:t>(CR02)</a:t>
+              <a:t>: Impossibilità di selezionare singoli metodi di test.</a:t>
             </a:r>
           </a:p>
           <a:p>
             <a:pPr algn="l">
               <a:lnSpc>
-                <a:spcPts val="2561"/>
+                <a:spcPts val="2246"/>
               </a:lnSpc>
             </a:pPr>
           </a:p>
           <a:p>
-            <a:pPr algn="l">
+            <a:pPr algn="l" marL="461969" indent="-230984" lvl="1">
               <a:lnSpc>
-                <a:spcPts val="2561"/>
+                <a:spcPts val="2246"/>
               </a:lnSpc>
-            </a:pPr>
-          </a:p>
-          <a:p>
-            <a:pPr algn="l" marL="526753" indent="-263377" lvl="1">
-              <a:lnSpc>
-                <a:spcPts val="2561"/>
-              </a:lnSpc>
-              <a:buAutoNum type="arabicPeriod" startAt="1"/>
+              <a:buFont typeface="Arial"/>
+              <a:buChar char="•"/>
             </a:pPr>
             <a:r>
-              <a:rPr lang="en-US" sz="2439" spc="82">
+              <a:rPr lang="en-US" sz="2139" spc="72">
+                <a:solidFill>
+                  <a:srgbClr val="FFDE59"/>
+                </a:solidFill>
+                <a:latin typeface="Poppins"/>
+                <a:ea typeface="Poppins"/>
+                <a:cs typeface="Poppins"/>
+                <a:sym typeface="Poppins"/>
+              </a:rPr>
+              <a:t>Spreco di Risorse Computazionali:</a:t>
+            </a:r>
+            <a:r>
+              <a:rPr lang="en-US" sz="2139" spc="72">
                 <a:solidFill>
                   <a:srgbClr val="FFFFFF"/>
                 </a:solidFill>
@@ -18443,13 +18663,53 @@
                 <a:cs typeface="Poppins"/>
                 <a:sym typeface="Poppins"/>
               </a:rPr>
-              <a:t>Gestione distruttiva dell'I/O: la conversione sovrascriveva e svuotava i file JMH precedentemente generati. (CR03)</a:t>
+              <a:t> Eseguire benchmark JMH su test irrilevanti dilatava enormemente i tempi di esecuzione e l'uso di CPU/RAM.</a:t>
+            </a:r>
+          </a:p>
+          <a:p>
+            <a:pPr algn="l">
+              <a:lnSpc>
+                <a:spcPts val="2246"/>
+              </a:lnSpc>
+            </a:pPr>
+          </a:p>
+          <a:p>
+            <a:pPr algn="l" marL="461969" indent="-230984" lvl="1">
+              <a:lnSpc>
+                <a:spcPts val="2246"/>
+              </a:lnSpc>
+              <a:buFont typeface="Arial"/>
+              <a:buChar char="•"/>
+            </a:pPr>
+            <a:r>
+              <a:rPr lang="en-US" sz="2139" spc="72">
+                <a:solidFill>
+                  <a:srgbClr val="FFDE59"/>
+                </a:solidFill>
+                <a:latin typeface="Poppins"/>
+                <a:ea typeface="Poppins"/>
+                <a:cs typeface="Poppins"/>
+                <a:sym typeface="Poppins"/>
+              </a:rPr>
+              <a:t>Rischi di Data Loss</a:t>
+            </a:r>
+            <a:r>
+              <a:rPr lang="en-US" sz="2139" spc="72">
+                <a:solidFill>
+                  <a:srgbClr val="FFFFFF"/>
+                </a:solidFill>
+                <a:latin typeface="Poppins"/>
+                <a:ea typeface="Poppins"/>
+                <a:cs typeface="Poppins"/>
+                <a:sym typeface="Poppins"/>
+              </a:rPr>
+              <a:t>: Assenza di politiche di Conflict Resolution per la sovrascrittura sicura dei file generati.</a:t>
             </a:r>
           </a:p>
           <a:p>
             <a:pPr algn="just">
               <a:lnSpc>
-                <a:spcPts val="2561"/>
+                <a:spcPts val="2246"/>
               </a:lnSpc>
               <a:spcBef>
                 <a:spcPct val="0"/>
@@ -18460,7 +18720,7 @@
       </p:sp>
       <p:sp>
         <p:nvSpPr>
-          <p:cNvPr name="Freeform 16" id="16"/>
+          <p:cNvPr name="Freeform 15" id="15"/>
           <p:cNvSpPr/>
           <p:nvPr/>
         </p:nvSpPr>
@@ -18506,7 +18766,7 @@
       </p:sp>
       <p:sp>
         <p:nvSpPr>
-          <p:cNvPr name="Freeform 17" id="17"/>
+          <p:cNvPr name="Freeform 16" id="16"/>
           <p:cNvSpPr/>
           <p:nvPr/>
         </p:nvSpPr>
@@ -18552,7 +18812,7 @@
       </p:sp>
       <p:sp>
         <p:nvSpPr>
-          <p:cNvPr name="Freeform 18" id="18"/>
+          <p:cNvPr name="Freeform 17" id="17"/>
           <p:cNvSpPr/>
           <p:nvPr/>
         </p:nvSpPr>
@@ -18610,7 +18870,7 @@
 </p:sld>
 </file>
 
-<file path=ppt/slides/slide4.xml><?xml version="1.0" encoding="utf-8"?>
+<file path=ppt/slides/slide5.xml><?xml version="1.0" encoding="utf-8"?>
 <p:sld xmlns:p="http://schemas.openxmlformats.org/presentationml/2006/main" xmlns:a="http://schemas.openxmlformats.org/drawingml/2006/main" xmlns:r="http://schemas.openxmlformats.org/officeDocument/2006/relationships">
   <p:cSld>
     <p:bg>
@@ -18808,10 +19068,10 @@
         </p:nvGrpSpPr>
         <p:grpSpPr>
           <a:xfrm rot="0">
-            <a:off x="7600950" y="9365373"/>
-            <a:ext cx="3086100" cy="3086100"/>
+            <a:off x="7140719" y="6566340"/>
+            <a:ext cx="3814194" cy="748374"/>
             <a:chOff x="0" y="0"/>
-            <a:chExt cx="812800" cy="812800"/>
+            <a:chExt cx="1004561" cy="197103"/>
           </a:xfrm>
         </p:grpSpPr>
         <p:sp>
@@ -18823,7 +19083,7 @@
           <p:spPr>
             <a:xfrm flipH="false" flipV="false" rot="0">
               <a:off x="0" y="0"/>
-              <a:ext cx="812800" cy="812800"/>
+              <a:ext cx="1004561" cy="197103"/>
             </a:xfrm>
             <a:custGeom>
               <a:avLst/>
@@ -18832,61 +19092,56 @@
               <a:cxnLst/>
               <a:rect r="r" b="b" t="t" l="l"/>
               <a:pathLst>
-                <a:path h="812800" w="812800">
+                <a:path h="197103" w="1004561">
                   <a:moveTo>
-                    <a:pt x="62716" y="0"/>
+                    <a:pt x="50744" y="0"/>
                   </a:moveTo>
                   <a:lnTo>
-                    <a:pt x="750084" y="0"/>
+                    <a:pt x="953817" y="0"/>
                   </a:lnTo>
                   <a:cubicBezTo>
-                    <a:pt x="766717" y="0"/>
-                    <a:pt x="782669" y="6608"/>
-                    <a:pt x="794431" y="18369"/>
-                  </a:cubicBezTo>
-                  <a:cubicBezTo>
-                    <a:pt x="806192" y="30131"/>
-                    <a:pt x="812800" y="46083"/>
-                    <a:pt x="812800" y="62716"/>
+                    <a:pt x="967275" y="0"/>
+                    <a:pt x="980182" y="5346"/>
+                    <a:pt x="989699" y="14863"/>
+                  </a:cubicBezTo>
+                  <a:cubicBezTo>
+                    <a:pt x="999215" y="24379"/>
+                    <a:pt x="1004561" y="37286"/>
+                    <a:pt x="1004561" y="50744"/>
                   </a:cubicBezTo>
                   <a:lnTo>
-                    <a:pt x="812800" y="750084"/>
+                    <a:pt x="1004561" y="146359"/>
                   </a:lnTo>
                   <a:cubicBezTo>
-                    <a:pt x="812800" y="766717"/>
-                    <a:pt x="806192" y="782669"/>
-                    <a:pt x="794431" y="794431"/>
-                  </a:cubicBezTo>
-                  <a:cubicBezTo>
-                    <a:pt x="782669" y="806192"/>
-                    <a:pt x="766717" y="812800"/>
-                    <a:pt x="750084" y="812800"/>
+                    <a:pt x="1004561" y="159817"/>
+                    <a:pt x="999215" y="172724"/>
+                    <a:pt x="989699" y="182240"/>
+                  </a:cubicBezTo>
+                  <a:cubicBezTo>
+                    <a:pt x="980182" y="191756"/>
+                    <a:pt x="967275" y="197103"/>
+                    <a:pt x="953817" y="197103"/>
                   </a:cubicBezTo>
                   <a:lnTo>
-                    <a:pt x="62716" y="812800"/>
+                    <a:pt x="50744" y="197103"/>
                   </a:lnTo>
                   <a:cubicBezTo>
-                    <a:pt x="46083" y="812800"/>
-                    <a:pt x="30131" y="806192"/>
-                    <a:pt x="18369" y="794431"/>
-                  </a:cubicBezTo>
-                  <a:cubicBezTo>
-                    <a:pt x="6608" y="782669"/>
-                    <a:pt x="0" y="766717"/>
-                    <a:pt x="0" y="750084"/>
+                    <a:pt x="22719" y="197103"/>
+                    <a:pt x="0" y="174384"/>
+                    <a:pt x="0" y="146359"/>
                   </a:cubicBezTo>
                   <a:lnTo>
-                    <a:pt x="0" y="62716"/>
+                    <a:pt x="0" y="50744"/>
                   </a:lnTo>
                   <a:cubicBezTo>
-                    <a:pt x="0" y="46083"/>
-                    <a:pt x="6608" y="30131"/>
-                    <a:pt x="18369" y="18369"/>
-                  </a:cubicBezTo>
-                  <a:cubicBezTo>
-                    <a:pt x="30131" y="6608"/>
-                    <a:pt x="46083" y="0"/>
-                    <a:pt x="62716" y="0"/>
+                    <a:pt x="0" y="37286"/>
+                    <a:pt x="5346" y="24379"/>
+                    <a:pt x="14863" y="14863"/>
+                  </a:cubicBezTo>
+                  <a:cubicBezTo>
+                    <a:pt x="24379" y="5346"/>
+                    <a:pt x="37286" y="0"/>
+                    <a:pt x="50744" y="0"/>
                   </a:cubicBezTo>
                   <a:close/>
                 </a:path>
@@ -18930,7 +19185,7 @@
           <p:spPr>
             <a:xfrm>
               <a:off x="0" y="28575"/>
-              <a:ext cx="812800" cy="784225"/>
+              <a:ext cx="1004561" cy="168528"/>
             </a:xfrm>
             <a:prstGeom prst="rect">
               <a:avLst/>
@@ -18957,8 +19212,8 @@
         </p:nvSpPr>
         <p:spPr>
           <a:xfrm flipH="false" flipV="false" rot="0">
-            <a:off x="11522127" y="2012941"/>
-            <a:ext cx="7778462" cy="8524342"/>
+            <a:off x="-1387661" y="7108128"/>
+            <a:ext cx="19889989" cy="8313610"/>
           </a:xfrm>
           <a:custGeom>
             <a:avLst/>
@@ -18967,18 +19222,18 @@
             <a:cxnLst/>
             <a:rect r="r" b="b" t="t" l="l"/>
             <a:pathLst>
-              <a:path h="8524342" w="7778462">
+              <a:path h="8313610" w="19889989">
                 <a:moveTo>
                   <a:pt x="0" y="0"/>
                 </a:moveTo>
                 <a:lnTo>
-                  <a:pt x="7778462" y="0"/>
-                </a:lnTo>
-                <a:lnTo>
-                  <a:pt x="7778462" y="8524342"/>
-                </a:lnTo>
-                <a:lnTo>
-                  <a:pt x="0" y="8524342"/>
+                  <a:pt x="19889989" y="0"/>
+                </a:lnTo>
+                <a:lnTo>
+                  <a:pt x="19889989" y="8313610"/>
+                </a:lnTo>
+                <a:lnTo>
+                  <a:pt x="0" y="8313610"/>
                 </a:lnTo>
                 <a:lnTo>
                   <a:pt x="0" y="0"/>
@@ -18989,6 +19244,7 @@
           </a:custGeom>
           <a:blipFill>
             <a:blip r:embed="rId2">
+              <a:alphaModFix amt="43999"/>
               <a:extLst>
                 <a:ext uri="{96DAC541-7B7A-43D3-8B79-37D633B846F1}">
                   <asvg:svgBlip xmlns:asvg="http://schemas.microsoft.com/office/drawing/2016/SVG/main" r:embed="rId3"/>
@@ -19001,924 +19257,9 @@
           </a:blipFill>
         </p:spPr>
       </p:sp>
-      <p:sp>
-        <p:nvSpPr>
-          <p:cNvPr name="Freeform 9" id="9"/>
-          <p:cNvSpPr/>
-          <p:nvPr/>
-        </p:nvSpPr>
-        <p:spPr>
-          <a:xfrm flipH="false" flipV="false" rot="0">
-            <a:off x="11914301" y="562489"/>
-            <a:ext cx="6994113" cy="8229600"/>
-          </a:xfrm>
-          <a:custGeom>
-            <a:avLst/>
-            <a:gdLst/>
-            <a:ahLst/>
-            <a:cxnLst/>
-            <a:rect r="r" b="b" t="t" l="l"/>
-            <a:pathLst>
-              <a:path h="8229600" w="6994113">
-                <a:moveTo>
-                  <a:pt x="0" y="0"/>
-                </a:moveTo>
-                <a:lnTo>
-                  <a:pt x="6994113" y="0"/>
-                </a:lnTo>
-                <a:lnTo>
-                  <a:pt x="6994113" y="8229600"/>
-                </a:lnTo>
-                <a:lnTo>
-                  <a:pt x="0" y="8229600"/>
-                </a:lnTo>
-                <a:lnTo>
-                  <a:pt x="0" y="0"/>
-                </a:lnTo>
-                <a:close/>
-              </a:path>
-            </a:pathLst>
-          </a:custGeom>
-          <a:blipFill>
-            <a:blip r:embed="rId4"/>
-            <a:stretch>
-              <a:fillRect l="0" t="0" r="0" b="0"/>
-            </a:stretch>
-          </a:blipFill>
-        </p:spPr>
-      </p:sp>
-      <p:sp>
-        <p:nvSpPr>
-          <p:cNvPr name="Freeform 10" id="10"/>
-          <p:cNvSpPr/>
-          <p:nvPr/>
-        </p:nvSpPr>
-        <p:spPr>
-          <a:xfrm flipH="false" flipV="false" rot="0">
-            <a:off x="10419155" y="3485928"/>
-            <a:ext cx="3320977" cy="2946612"/>
-          </a:xfrm>
-          <a:custGeom>
-            <a:avLst/>
-            <a:gdLst/>
-            <a:ahLst/>
-            <a:cxnLst/>
-            <a:rect r="r" b="b" t="t" l="l"/>
-            <a:pathLst>
-              <a:path h="2946612" w="3320977">
-                <a:moveTo>
-                  <a:pt x="0" y="0"/>
-                </a:moveTo>
-                <a:lnTo>
-                  <a:pt x="3320977" y="0"/>
-                </a:lnTo>
-                <a:lnTo>
-                  <a:pt x="3320977" y="2946613"/>
-                </a:lnTo>
-                <a:lnTo>
-                  <a:pt x="0" y="2946613"/>
-                </a:lnTo>
-                <a:lnTo>
-                  <a:pt x="0" y="0"/>
-                </a:lnTo>
-                <a:close/>
-              </a:path>
-            </a:pathLst>
-          </a:custGeom>
-          <a:blipFill>
-            <a:blip r:embed="rId5">
-              <a:extLst>
-                <a:ext uri="{96DAC541-7B7A-43D3-8B79-37D633B846F1}">
-                  <asvg:svgBlip xmlns:asvg="http://schemas.microsoft.com/office/drawing/2016/SVG/main" r:embed="rId6"/>
-                </a:ext>
-              </a:extLst>
-            </a:blip>
-            <a:stretch>
-              <a:fillRect l="0" t="0" r="0" b="0"/>
-            </a:stretch>
-          </a:blipFill>
-        </p:spPr>
-      </p:sp>
-      <p:sp>
-        <p:nvSpPr>
-          <p:cNvPr name="TextBox 11" id="11"/>
-          <p:cNvSpPr txBox="true"/>
-          <p:nvPr/>
-        </p:nvSpPr>
-        <p:spPr>
-          <a:xfrm rot="0">
-            <a:off x="8245241" y="9751450"/>
-            <a:ext cx="1684932" cy="233169"/>
-          </a:xfrm>
-          <a:prstGeom prst="rect">
-            <a:avLst/>
-          </a:prstGeom>
-        </p:spPr>
-        <p:txBody>
-          <a:bodyPr anchor="t" rtlCol="false" tIns="0" lIns="0" bIns="0" rIns="0">
-            <a:spAutoFit/>
-          </a:bodyPr>
-          <a:lstStyle/>
-          <a:p>
-            <a:pPr algn="ctr">
-              <a:lnSpc>
-                <a:spcPts val="1826"/>
-              </a:lnSpc>
-            </a:pPr>
-            <a:r>
-              <a:rPr lang="en-US" b="true" sz="1739">
-                <a:solidFill>
-                  <a:srgbClr val="FFFFFF"/>
-                </a:solidFill>
-                <a:latin typeface="TT Lakes Neue Expanded Bold"/>
-                <a:ea typeface="TT Lakes Neue Expanded Bold"/>
-                <a:cs typeface="TT Lakes Neue Expanded Bold"/>
-                <a:sym typeface="TT Lakes Neue Expanded Bold"/>
-              </a:rPr>
-              <a:t>PAGE 4</a:t>
-            </a:r>
-          </a:p>
-        </p:txBody>
-      </p:sp>
-      <p:sp>
-        <p:nvSpPr>
-          <p:cNvPr name="Freeform 12" id="12"/>
-          <p:cNvSpPr/>
-          <p:nvPr/>
-        </p:nvSpPr>
-        <p:spPr>
-          <a:xfrm flipH="false" flipV="false" rot="0">
-            <a:off x="930041" y="1700332"/>
-            <a:ext cx="7315200" cy="2433967"/>
-          </a:xfrm>
-          <a:custGeom>
-            <a:avLst/>
-            <a:gdLst/>
-            <a:ahLst/>
-            <a:cxnLst/>
-            <a:rect r="r" b="b" t="t" l="l"/>
-            <a:pathLst>
-              <a:path h="2433967" w="7315200">
-                <a:moveTo>
-                  <a:pt x="0" y="0"/>
-                </a:moveTo>
-                <a:lnTo>
-                  <a:pt x="7315200" y="0"/>
-                </a:lnTo>
-                <a:lnTo>
-                  <a:pt x="7315200" y="2433966"/>
-                </a:lnTo>
-                <a:lnTo>
-                  <a:pt x="0" y="2433966"/>
-                </a:lnTo>
-                <a:lnTo>
-                  <a:pt x="0" y="0"/>
-                </a:lnTo>
-                <a:close/>
-              </a:path>
-            </a:pathLst>
-          </a:custGeom>
-          <a:blipFill>
-            <a:blip r:embed="rId7">
-              <a:extLst>
-                <a:ext uri="{96DAC541-7B7A-43D3-8B79-37D633B846F1}">
-                  <asvg:svgBlip xmlns:asvg="http://schemas.microsoft.com/office/drawing/2016/SVG/main" r:embed="rId8"/>
-                </a:ext>
-              </a:extLst>
-            </a:blip>
-            <a:stretch>
-              <a:fillRect l="0" t="0" r="0" b="0"/>
-            </a:stretch>
-          </a:blipFill>
-        </p:spPr>
-      </p:sp>
-      <p:sp>
-        <p:nvSpPr>
-          <p:cNvPr name="TextBox 13" id="13"/>
-          <p:cNvSpPr txBox="true"/>
-          <p:nvPr/>
-        </p:nvSpPr>
-        <p:spPr>
-          <a:xfrm rot="0">
-            <a:off x="1653802" y="2291125"/>
-            <a:ext cx="5867677" cy="1300004"/>
-          </a:xfrm>
-          <a:prstGeom prst="rect">
-            <a:avLst/>
-          </a:prstGeom>
-        </p:spPr>
-        <p:txBody>
-          <a:bodyPr anchor="t" rtlCol="false" tIns="0" lIns="0" bIns="0" rIns="0">
-            <a:spAutoFit/>
-          </a:bodyPr>
-          <a:lstStyle/>
-          <a:p>
-            <a:pPr algn="ctr">
-              <a:lnSpc>
-                <a:spcPts val="3403"/>
-              </a:lnSpc>
-            </a:pPr>
-            <a:r>
-              <a:rPr lang="en-US" b="true" sz="3241">
-                <a:solidFill>
-                  <a:srgbClr val="FFFFFF"/>
-                </a:solidFill>
-                <a:latin typeface="TT Lakes Neue Expanded Bold"/>
-                <a:ea typeface="TT Lakes Neue Expanded Bold"/>
-                <a:cs typeface="TT Lakes Neue Expanded Bold"/>
-                <a:sym typeface="TT Lakes Neue Expanded Bold"/>
-              </a:rPr>
-              <a:t>IL SISTEMA ORIGINALE  E LE SUE LIMITAZIONI</a:t>
-            </a:r>
-          </a:p>
-        </p:txBody>
-      </p:sp>
-      <p:sp>
-        <p:nvSpPr>
-          <p:cNvPr name="TextBox 14" id="14"/>
-          <p:cNvSpPr txBox="true"/>
-          <p:nvPr/>
-        </p:nvSpPr>
-        <p:spPr>
-          <a:xfrm rot="0">
-            <a:off x="260683" y="4305748"/>
-            <a:ext cx="9370689" cy="4727062"/>
-          </a:xfrm>
-          <a:prstGeom prst="rect">
-            <a:avLst/>
-          </a:prstGeom>
-        </p:spPr>
-        <p:txBody>
-          <a:bodyPr anchor="t" rtlCol="false" tIns="0" lIns="0" bIns="0" rIns="0">
-            <a:spAutoFit/>
-          </a:bodyPr>
-          <a:lstStyle/>
-          <a:p>
-            <a:pPr algn="l" marL="461969" indent="-230984" lvl="1">
-              <a:lnSpc>
-                <a:spcPts val="2246"/>
-              </a:lnSpc>
-              <a:buFont typeface="Arial"/>
-              <a:buChar char="•"/>
-            </a:pPr>
-            <a:r>
-              <a:rPr lang="en-US" sz="2139" spc="72">
-                <a:solidFill>
-                  <a:srgbClr val="FFDE59"/>
-                </a:solidFill>
-                <a:latin typeface="Poppins"/>
-                <a:ea typeface="Poppins"/>
-                <a:cs typeface="Poppins"/>
-                <a:sym typeface="Poppins"/>
-              </a:rPr>
-              <a:t>Forte Accoppiamento Architetturale: </a:t>
-            </a:r>
-            <a:r>
-              <a:rPr lang="en-US" sz="2139" spc="72">
-                <a:solidFill>
-                  <a:srgbClr val="FFFFFF"/>
-                </a:solidFill>
-                <a:latin typeface="Poppins"/>
-                <a:ea typeface="Poppins"/>
-                <a:cs typeface="Poppins"/>
-                <a:sym typeface="Poppins"/>
-              </a:rPr>
-              <a:t>Supporto esclusivo al framework legacy JUnit 4. Nessu</a:t>
-            </a:r>
-            <a:r>
-              <a:rPr lang="en-US" sz="2139" spc="72">
-                <a:solidFill>
-                  <a:srgbClr val="FFFFFF"/>
-                </a:solidFill>
-                <a:latin typeface="Poppins"/>
-                <a:ea typeface="Poppins"/>
-                <a:cs typeface="Poppins"/>
-                <a:sym typeface="Poppins"/>
-              </a:rPr>
-              <a:t>na compatibilità con l'architettura modulare di JUnit 5 </a:t>
-            </a:r>
-          </a:p>
-          <a:p>
-            <a:pPr algn="l">
-              <a:lnSpc>
-                <a:spcPts val="2246"/>
-              </a:lnSpc>
-            </a:pPr>
-          </a:p>
-          <a:p>
-            <a:pPr algn="l" marL="461969" indent="-230984" lvl="1">
-              <a:lnSpc>
-                <a:spcPts val="2246"/>
-              </a:lnSpc>
-              <a:buFont typeface="Arial"/>
-              <a:buChar char="•"/>
-            </a:pPr>
-            <a:r>
-              <a:rPr lang="en-US" sz="2139" spc="72">
-                <a:solidFill>
-                  <a:srgbClr val="FFDE59"/>
-                </a:solidFill>
-                <a:latin typeface="Poppins"/>
-                <a:ea typeface="Poppins"/>
-                <a:cs typeface="Poppins"/>
-                <a:sym typeface="Poppins"/>
-              </a:rPr>
-              <a:t>Obsolescenza Sintattica dell'AST: </a:t>
-            </a:r>
-            <a:r>
-              <a:rPr lang="en-US" sz="2139" spc="72">
-                <a:solidFill>
-                  <a:srgbClr val="FFFFFF"/>
-                </a:solidFill>
-                <a:latin typeface="Poppins"/>
-                <a:ea typeface="Poppins"/>
-                <a:cs typeface="Poppins"/>
-                <a:sym typeface="Poppins"/>
-              </a:rPr>
-              <a:t>Il parser originale generava errori imbattendosi in codice Java moderno </a:t>
-            </a:r>
-          </a:p>
-          <a:p>
-            <a:pPr algn="l">
-              <a:lnSpc>
-                <a:spcPts val="2246"/>
-              </a:lnSpc>
-            </a:pPr>
-          </a:p>
-          <a:p>
-            <a:pPr algn="l" marL="461969" indent="-230984" lvl="1">
-              <a:lnSpc>
-                <a:spcPts val="2246"/>
-              </a:lnSpc>
-              <a:buFont typeface="Arial"/>
-              <a:buChar char="•"/>
-            </a:pPr>
-            <a:r>
-              <a:rPr lang="en-US" sz="2139" spc="72">
-                <a:solidFill>
-                  <a:srgbClr val="FFDE59"/>
-                </a:solidFill>
-                <a:latin typeface="Poppins"/>
-                <a:ea typeface="Poppins"/>
-                <a:cs typeface="Poppins"/>
-                <a:sym typeface="Poppins"/>
-              </a:rPr>
-              <a:t>Granularità Grossolana</a:t>
-            </a:r>
-            <a:r>
-              <a:rPr lang="en-US" sz="2139" spc="72">
-                <a:solidFill>
-                  <a:srgbClr val="FFFFFF"/>
-                </a:solidFill>
-                <a:latin typeface="Poppins"/>
-                <a:ea typeface="Poppins"/>
-                <a:cs typeface="Poppins"/>
-                <a:sym typeface="Poppins"/>
-              </a:rPr>
-              <a:t>: Impossibilità di selezionare singoli metodi di test.</a:t>
-            </a:r>
-          </a:p>
-          <a:p>
-            <a:pPr algn="l">
-              <a:lnSpc>
-                <a:spcPts val="2246"/>
-              </a:lnSpc>
-            </a:pPr>
-          </a:p>
-          <a:p>
-            <a:pPr algn="l" marL="461969" indent="-230984" lvl="1">
-              <a:lnSpc>
-                <a:spcPts val="2246"/>
-              </a:lnSpc>
-              <a:buFont typeface="Arial"/>
-              <a:buChar char="•"/>
-            </a:pPr>
-            <a:r>
-              <a:rPr lang="en-US" sz="2139" spc="72">
-                <a:solidFill>
-                  <a:srgbClr val="FFDE59"/>
-                </a:solidFill>
-                <a:latin typeface="Poppins"/>
-                <a:ea typeface="Poppins"/>
-                <a:cs typeface="Poppins"/>
-                <a:sym typeface="Poppins"/>
-              </a:rPr>
-              <a:t>Spreco di Risorse Computazionali:</a:t>
-            </a:r>
-            <a:r>
-              <a:rPr lang="en-US" sz="2139" spc="72">
-                <a:solidFill>
-                  <a:srgbClr val="FFFFFF"/>
-                </a:solidFill>
-                <a:latin typeface="Poppins"/>
-                <a:ea typeface="Poppins"/>
-                <a:cs typeface="Poppins"/>
-                <a:sym typeface="Poppins"/>
-              </a:rPr>
-              <a:t> Eseguire benchmark JMH su test irrilevanti dilatava enormemente i tempi di esecuzione e l'uso di CPU/RAM.</a:t>
-            </a:r>
-          </a:p>
-          <a:p>
-            <a:pPr algn="l">
-              <a:lnSpc>
-                <a:spcPts val="2246"/>
-              </a:lnSpc>
-            </a:pPr>
-          </a:p>
-          <a:p>
-            <a:pPr algn="l" marL="461969" indent="-230984" lvl="1">
-              <a:lnSpc>
-                <a:spcPts val="2246"/>
-              </a:lnSpc>
-              <a:buFont typeface="Arial"/>
-              <a:buChar char="•"/>
-            </a:pPr>
-            <a:r>
-              <a:rPr lang="en-US" sz="2139" spc="72">
-                <a:solidFill>
-                  <a:srgbClr val="FFDE59"/>
-                </a:solidFill>
-                <a:latin typeface="Poppins"/>
-                <a:ea typeface="Poppins"/>
-                <a:cs typeface="Poppins"/>
-                <a:sym typeface="Poppins"/>
-              </a:rPr>
-              <a:t>Rischi di Data Loss</a:t>
-            </a:r>
-            <a:r>
-              <a:rPr lang="en-US" sz="2139" spc="72">
-                <a:solidFill>
-                  <a:srgbClr val="FFFFFF"/>
-                </a:solidFill>
-                <a:latin typeface="Poppins"/>
-                <a:ea typeface="Poppins"/>
-                <a:cs typeface="Poppins"/>
-                <a:sym typeface="Poppins"/>
-              </a:rPr>
-              <a:t>: Assenza di politiche di Conflict Resolution per la sovrascrittura sicura dei file generati.</a:t>
-            </a:r>
-          </a:p>
-          <a:p>
-            <a:pPr algn="just">
-              <a:lnSpc>
-                <a:spcPts val="2246"/>
-              </a:lnSpc>
-              <a:spcBef>
-                <a:spcPct val="0"/>
-              </a:spcBef>
-            </a:pPr>
-          </a:p>
-        </p:txBody>
-      </p:sp>
-      <p:sp>
-        <p:nvSpPr>
-          <p:cNvPr name="Freeform 15" id="15"/>
-          <p:cNvSpPr/>
-          <p:nvPr/>
-        </p:nvSpPr>
-        <p:spPr>
-          <a:xfrm flipH="false" flipV="false" rot="0">
-            <a:off x="260683" y="160116"/>
-            <a:ext cx="1052888" cy="1052888"/>
-          </a:xfrm>
-          <a:custGeom>
-            <a:avLst/>
-            <a:gdLst/>
-            <a:ahLst/>
-            <a:cxnLst/>
-            <a:rect r="r" b="b" t="t" l="l"/>
-            <a:pathLst>
-              <a:path h="1052888" w="1052888">
-                <a:moveTo>
-                  <a:pt x="0" y="0"/>
-                </a:moveTo>
-                <a:lnTo>
-                  <a:pt x="1052888" y="0"/>
-                </a:lnTo>
-                <a:lnTo>
-                  <a:pt x="1052888" y="1052888"/>
-                </a:lnTo>
-                <a:lnTo>
-                  <a:pt x="0" y="1052888"/>
-                </a:lnTo>
-                <a:lnTo>
-                  <a:pt x="0" y="0"/>
-                </a:lnTo>
-                <a:close/>
-              </a:path>
-            </a:pathLst>
-          </a:custGeom>
-          <a:blipFill>
-            <a:blip r:embed="rId9"/>
-            <a:stretch>
-              <a:fillRect l="0" t="0" r="0" b="0"/>
-            </a:stretch>
-          </a:blipFill>
-        </p:spPr>
-      </p:sp>
-      <p:sp>
-        <p:nvSpPr>
-          <p:cNvPr name="Freeform 16" id="16"/>
-          <p:cNvSpPr/>
-          <p:nvPr/>
-        </p:nvSpPr>
-        <p:spPr>
-          <a:xfrm flipH="false" flipV="false" rot="0">
-            <a:off x="2010516" y="68708"/>
-            <a:ext cx="1235703" cy="1235703"/>
-          </a:xfrm>
-          <a:custGeom>
-            <a:avLst/>
-            <a:gdLst/>
-            <a:ahLst/>
-            <a:cxnLst/>
-            <a:rect r="r" b="b" t="t" l="l"/>
-            <a:pathLst>
-              <a:path h="1235703" w="1235703">
-                <a:moveTo>
-                  <a:pt x="0" y="0"/>
-                </a:moveTo>
-                <a:lnTo>
-                  <a:pt x="1235703" y="0"/>
-                </a:lnTo>
-                <a:lnTo>
-                  <a:pt x="1235703" y="1235704"/>
-                </a:lnTo>
-                <a:lnTo>
-                  <a:pt x="0" y="1235704"/>
-                </a:lnTo>
-                <a:lnTo>
-                  <a:pt x="0" y="0"/>
-                </a:lnTo>
-                <a:close/>
-              </a:path>
-            </a:pathLst>
-          </a:custGeom>
-          <a:blipFill>
-            <a:blip r:embed="rId10"/>
-            <a:stretch>
-              <a:fillRect l="0" t="0" r="0" b="0"/>
-            </a:stretch>
-          </a:blipFill>
-        </p:spPr>
-      </p:sp>
-      <p:sp>
-        <p:nvSpPr>
-          <p:cNvPr name="Freeform 17" id="17"/>
-          <p:cNvSpPr/>
-          <p:nvPr/>
-        </p:nvSpPr>
-        <p:spPr>
-          <a:xfrm flipH="false" flipV="false" rot="0">
-            <a:off x="16710018" y="287848"/>
-            <a:ext cx="549282" cy="549282"/>
-          </a:xfrm>
-          <a:custGeom>
-            <a:avLst/>
-            <a:gdLst/>
-            <a:ahLst/>
-            <a:cxnLst/>
-            <a:rect r="r" b="b" t="t" l="l"/>
-            <a:pathLst>
-              <a:path h="549282" w="549282">
-                <a:moveTo>
-                  <a:pt x="0" y="0"/>
-                </a:moveTo>
-                <a:lnTo>
-                  <a:pt x="549282" y="0"/>
-                </a:lnTo>
-                <a:lnTo>
-                  <a:pt x="549282" y="549282"/>
-                </a:lnTo>
-                <a:lnTo>
-                  <a:pt x="0" y="549282"/>
-                </a:lnTo>
-                <a:lnTo>
-                  <a:pt x="0" y="0"/>
-                </a:lnTo>
-                <a:close/>
-              </a:path>
-            </a:pathLst>
-          </a:custGeom>
-          <a:blipFill>
-            <a:blip r:embed="rId11">
-              <a:extLst>
-                <a:ext uri="{96DAC541-7B7A-43D3-8B79-37D633B846F1}">
-                  <asvg:svgBlip xmlns:asvg="http://schemas.microsoft.com/office/drawing/2016/SVG/main" r:embed="rId12"/>
-                </a:ext>
-              </a:extLst>
-            </a:blip>
-            <a:stretch>
-              <a:fillRect l="0" t="0" r="0" b="0"/>
-            </a:stretch>
-          </a:blipFill>
-        </p:spPr>
-      </p:sp>
-    </p:spTree>
-  </p:cSld>
-  <p:clrMapOvr>
-    <a:masterClrMapping/>
-  </p:clrMapOvr>
-</p:sld>
-</file>
-
-<file path=ppt/slides/slide5.xml><?xml version="1.0" encoding="utf-8"?>
-<p:sld xmlns:p="http://schemas.openxmlformats.org/presentationml/2006/main" xmlns:a="http://schemas.openxmlformats.org/drawingml/2006/main" xmlns:r="http://schemas.openxmlformats.org/officeDocument/2006/relationships">
-  <p:cSld>
-    <p:bg>
-      <p:bgPr>
-        <a:gradFill rotWithShape="true">
-          <a:gsLst>
-            <a:gs pos="0">
-              <a:srgbClr val="0097B2">
-                <a:alpha val="100000"/>
-              </a:srgbClr>
-            </a:gs>
-            <a:gs pos="50000">
-              <a:srgbClr val="3A6A9E">
-                <a:alpha val="100000"/>
-              </a:srgbClr>
-            </a:gs>
-            <a:gs pos="100000">
-              <a:srgbClr val="103863">
-                <a:alpha val="100000"/>
-              </a:srgbClr>
-            </a:gs>
-          </a:gsLst>
-          <a:lin ang="5400000"/>
-        </a:gradFill>
-      </p:bgPr>
-    </p:bg>
-    <p:spTree>
-      <p:nvGrpSpPr>
-        <p:cNvPr id="1" name=""/>
-        <p:cNvGrpSpPr/>
-        <p:nvPr/>
-      </p:nvGrpSpPr>
-      <p:grpSpPr>
-        <a:xfrm>
-          <a:off x="0" y="0"/>
-          <a:ext cx="0" cy="0"/>
-          <a:chOff x="0" y="0"/>
-          <a:chExt cx="0" cy="0"/>
-        </a:xfrm>
-      </p:grpSpPr>
       <p:grpSp>
         <p:nvGrpSpPr>
-          <p:cNvPr name="Group 2" id="2"/>
-          <p:cNvGrpSpPr/>
-          <p:nvPr/>
-        </p:nvGrpSpPr>
-        <p:grpSpPr>
-          <a:xfrm rot="0">
-            <a:off x="-365251" y="-1543050"/>
-            <a:ext cx="4199655" cy="3086100"/>
-            <a:chOff x="0" y="0"/>
-            <a:chExt cx="1106082" cy="812800"/>
-          </a:xfrm>
-        </p:grpSpPr>
-        <p:sp>
-          <p:nvSpPr>
-            <p:cNvPr name="Freeform 3" id="3"/>
-            <p:cNvSpPr/>
-            <p:nvPr/>
-          </p:nvSpPr>
-          <p:spPr>
-            <a:xfrm flipH="false" flipV="false" rot="0">
-              <a:off x="0" y="0"/>
-              <a:ext cx="1106082" cy="812800"/>
-            </a:xfrm>
-            <a:custGeom>
-              <a:avLst/>
-              <a:gdLst/>
-              <a:ahLst/>
-              <a:cxnLst/>
-              <a:rect r="r" b="b" t="t" l="l"/>
-              <a:pathLst>
-                <a:path h="812800" w="1106082">
-                  <a:moveTo>
-                    <a:pt x="46087" y="0"/>
-                  </a:moveTo>
-                  <a:lnTo>
-                    <a:pt x="1059995" y="0"/>
-                  </a:lnTo>
-                  <a:cubicBezTo>
-                    <a:pt x="1072218" y="0"/>
-                    <a:pt x="1083941" y="4856"/>
-                    <a:pt x="1092584" y="13498"/>
-                  </a:cubicBezTo>
-                  <a:cubicBezTo>
-                    <a:pt x="1101226" y="22141"/>
-                    <a:pt x="1106082" y="33864"/>
-                    <a:pt x="1106082" y="46087"/>
-                  </a:cubicBezTo>
-                  <a:lnTo>
-                    <a:pt x="1106082" y="766713"/>
-                  </a:lnTo>
-                  <a:cubicBezTo>
-                    <a:pt x="1106082" y="778936"/>
-                    <a:pt x="1101226" y="790659"/>
-                    <a:pt x="1092584" y="799302"/>
-                  </a:cubicBezTo>
-                  <a:cubicBezTo>
-                    <a:pt x="1083941" y="807944"/>
-                    <a:pt x="1072218" y="812800"/>
-                    <a:pt x="1059995" y="812800"/>
-                  </a:cubicBezTo>
-                  <a:lnTo>
-                    <a:pt x="46087" y="812800"/>
-                  </a:lnTo>
-                  <a:cubicBezTo>
-                    <a:pt x="33864" y="812800"/>
-                    <a:pt x="22141" y="807944"/>
-                    <a:pt x="13498" y="799302"/>
-                  </a:cubicBezTo>
-                  <a:cubicBezTo>
-                    <a:pt x="4856" y="790659"/>
-                    <a:pt x="0" y="778936"/>
-                    <a:pt x="0" y="766713"/>
-                  </a:cubicBezTo>
-                  <a:lnTo>
-                    <a:pt x="0" y="46087"/>
-                  </a:lnTo>
-                  <a:cubicBezTo>
-                    <a:pt x="0" y="33864"/>
-                    <a:pt x="4856" y="22141"/>
-                    <a:pt x="13498" y="13498"/>
-                  </a:cubicBezTo>
-                  <a:cubicBezTo>
-                    <a:pt x="22141" y="4856"/>
-                    <a:pt x="33864" y="0"/>
-                    <a:pt x="46087" y="0"/>
-                  </a:cubicBezTo>
-                  <a:close/>
-                </a:path>
-              </a:pathLst>
-            </a:custGeom>
-            <a:gradFill rotWithShape="true">
-              <a:gsLst>
-                <a:gs pos="0">
-                  <a:srgbClr val="0097B2">
-                    <a:alpha val="100000"/>
-                  </a:srgbClr>
-                </a:gs>
-                <a:gs pos="50000">
-                  <a:srgbClr val="3A6A9E">
-                    <a:alpha val="100000"/>
-                  </a:srgbClr>
-                </a:gs>
-                <a:gs pos="100000">
-                  <a:srgbClr val="103863">
-                    <a:alpha val="100000"/>
-                  </a:srgbClr>
-                </a:gs>
-              </a:gsLst>
-              <a:lin ang="0"/>
-            </a:gradFill>
-            <a:ln w="19050" cap="rnd">
-              <a:solidFill>
-                <a:srgbClr val="000000"/>
-              </a:solidFill>
-              <a:prstDash val="solid"/>
-              <a:round/>
-            </a:ln>
-          </p:spPr>
-        </p:sp>
-        <p:sp>
-          <p:nvSpPr>
-            <p:cNvPr name="TextBox 4" id="4"/>
-            <p:cNvSpPr txBox="true"/>
-            <p:nvPr/>
-          </p:nvSpPr>
-          <p:spPr>
-            <a:xfrm>
-              <a:off x="0" y="28575"/>
-              <a:ext cx="1106082" cy="784225"/>
-            </a:xfrm>
-            <a:prstGeom prst="rect">
-              <a:avLst/>
-            </a:prstGeom>
-          </p:spPr>
-          <p:txBody>
-            <a:bodyPr anchor="ctr" rtlCol="false" tIns="50800" lIns="50800" bIns="50800" rIns="50800"/>
-            <a:lstStyle/>
-            <a:p>
-              <a:pPr algn="ctr">
-                <a:lnSpc>
-                  <a:spcPts val="1826"/>
-                </a:lnSpc>
-              </a:pPr>
-            </a:p>
-          </p:txBody>
-        </p:sp>
-      </p:grpSp>
-      <p:sp>
-        <p:nvSpPr>
-          <p:cNvPr name="Freeform 5" id="5"/>
-          <p:cNvSpPr/>
-          <p:nvPr/>
-        </p:nvSpPr>
-        <p:spPr>
-          <a:xfrm flipH="false" flipV="false" rot="0">
-            <a:off x="13333483" y="-5083807"/>
-            <a:ext cx="11706247" cy="11706247"/>
-          </a:xfrm>
-          <a:custGeom>
-            <a:avLst/>
-            <a:gdLst/>
-            <a:ahLst/>
-            <a:cxnLst/>
-            <a:rect r="r" b="b" t="t" l="l"/>
-            <a:pathLst>
-              <a:path h="11706247" w="11706247">
-                <a:moveTo>
-                  <a:pt x="0" y="0"/>
-                </a:moveTo>
-                <a:lnTo>
-                  <a:pt x="11706247" y="0"/>
-                </a:lnTo>
-                <a:lnTo>
-                  <a:pt x="11706247" y="11706247"/>
-                </a:lnTo>
-                <a:lnTo>
-                  <a:pt x="0" y="11706247"/>
-                </a:lnTo>
-                <a:lnTo>
-                  <a:pt x="0" y="0"/>
-                </a:lnTo>
-                <a:close/>
-              </a:path>
-            </a:pathLst>
-          </a:custGeom>
-          <a:blipFill>
-            <a:blip r:embed="rId2">
-              <a:extLst>
-                <a:ext uri="{96DAC541-7B7A-43D3-8B79-37D633B846F1}">
-                  <asvg:svgBlip xmlns:asvg="http://schemas.microsoft.com/office/drawing/2016/SVG/main" r:embed="rId3"/>
-                </a:ext>
-              </a:extLst>
-            </a:blip>
-            <a:stretch>
-              <a:fillRect l="0" t="0" r="0" b="0"/>
-            </a:stretch>
-          </a:blipFill>
-        </p:spPr>
-      </p:sp>
-      <p:sp>
-        <p:nvSpPr>
-          <p:cNvPr name="Freeform 6" id="6"/>
-          <p:cNvSpPr/>
-          <p:nvPr/>
-        </p:nvSpPr>
-        <p:spPr>
-          <a:xfrm flipH="false" flipV="false" rot="0">
-            <a:off x="6783619" y="1543050"/>
-            <a:ext cx="10611757" cy="9782111"/>
-          </a:xfrm>
-          <a:custGeom>
-            <a:avLst/>
-            <a:gdLst/>
-            <a:ahLst/>
-            <a:cxnLst/>
-            <a:rect r="r" b="b" t="t" l="l"/>
-            <a:pathLst>
-              <a:path h="9782111" w="10611757">
-                <a:moveTo>
-                  <a:pt x="0" y="0"/>
-                </a:moveTo>
-                <a:lnTo>
-                  <a:pt x="10611758" y="0"/>
-                </a:lnTo>
-                <a:lnTo>
-                  <a:pt x="10611758" y="9782111"/>
-                </a:lnTo>
-                <a:lnTo>
-                  <a:pt x="0" y="9782111"/>
-                </a:lnTo>
-                <a:lnTo>
-                  <a:pt x="0" y="0"/>
-                </a:lnTo>
-                <a:close/>
-              </a:path>
-            </a:pathLst>
-          </a:custGeom>
-          <a:blipFill>
-            <a:blip r:embed="rId4">
-              <a:extLst>
-                <a:ext uri="{96DAC541-7B7A-43D3-8B79-37D633B846F1}">
-                  <asvg:svgBlip xmlns:asvg="http://schemas.microsoft.com/office/drawing/2016/SVG/main" r:embed="rId5"/>
-                </a:ext>
-              </a:extLst>
-            </a:blip>
-            <a:stretch>
-              <a:fillRect l="0" t="0" r="0" b="0"/>
-            </a:stretch>
-          </a:blipFill>
-        </p:spPr>
-      </p:sp>
-      <p:grpSp>
-        <p:nvGrpSpPr>
-          <p:cNvPr name="Group 7" id="7"/>
+          <p:cNvPr name="Group 9" id="9"/>
           <p:cNvGrpSpPr/>
           <p:nvPr/>
         </p:nvGrpSpPr>
@@ -19932,7 +19273,7 @@
         </p:grpSpPr>
         <p:sp>
           <p:nvSpPr>
-            <p:cNvPr name="Freeform 8" id="8"/>
+            <p:cNvPr name="Freeform 10" id="10"/>
             <p:cNvSpPr/>
             <p:nvPr/>
           </p:nvSpPr>
@@ -20003,1111 +19344,6 @@
                     <a:pt x="30131" y="6608"/>
                     <a:pt x="46083" y="0"/>
                     <a:pt x="62716" y="0"/>
-                  </a:cubicBezTo>
-                  <a:close/>
-                </a:path>
-              </a:pathLst>
-            </a:custGeom>
-            <a:gradFill rotWithShape="true">
-              <a:gsLst>
-                <a:gs pos="0">
-                  <a:srgbClr val="0097B2">
-                    <a:alpha val="100000"/>
-                  </a:srgbClr>
-                </a:gs>
-                <a:gs pos="50000">
-                  <a:srgbClr val="3A6A9E">
-                    <a:alpha val="100000"/>
-                  </a:srgbClr>
-                </a:gs>
-                <a:gs pos="100000">
-                  <a:srgbClr val="103863">
-                    <a:alpha val="100000"/>
-                  </a:srgbClr>
-                </a:gs>
-              </a:gsLst>
-              <a:lin ang="0"/>
-            </a:gradFill>
-            <a:ln w="19050" cap="rnd">
-              <a:solidFill>
-                <a:srgbClr val="000000"/>
-              </a:solidFill>
-              <a:prstDash val="solid"/>
-              <a:round/>
-            </a:ln>
-          </p:spPr>
-        </p:sp>
-        <p:sp>
-          <p:nvSpPr>
-            <p:cNvPr name="TextBox 9" id="9"/>
-            <p:cNvSpPr txBox="true"/>
-            <p:nvPr/>
-          </p:nvSpPr>
-          <p:spPr>
-            <a:xfrm>
-              <a:off x="0" y="28575"/>
-              <a:ext cx="812800" cy="784225"/>
-            </a:xfrm>
-            <a:prstGeom prst="rect">
-              <a:avLst/>
-            </a:prstGeom>
-          </p:spPr>
-          <p:txBody>
-            <a:bodyPr anchor="ctr" rtlCol="false" tIns="50800" lIns="50800" bIns="50800" rIns="50800"/>
-            <a:lstStyle/>
-            <a:p>
-              <a:pPr algn="ctr">
-                <a:lnSpc>
-                  <a:spcPts val="1826"/>
-                </a:lnSpc>
-              </a:pPr>
-            </a:p>
-          </p:txBody>
-        </p:sp>
-      </p:grpSp>
-      <p:sp>
-        <p:nvSpPr>
-          <p:cNvPr name="Freeform 10" id="10"/>
-          <p:cNvSpPr/>
-          <p:nvPr/>
-        </p:nvSpPr>
-        <p:spPr>
-          <a:xfrm flipH="false" flipV="false" rot="0">
-            <a:off x="-4062196" y="1351079"/>
-            <a:ext cx="6994113" cy="8229600"/>
-          </a:xfrm>
-          <a:custGeom>
-            <a:avLst/>
-            <a:gdLst/>
-            <a:ahLst/>
-            <a:cxnLst/>
-            <a:rect r="r" b="b" t="t" l="l"/>
-            <a:pathLst>
-              <a:path h="8229600" w="6994113">
-                <a:moveTo>
-                  <a:pt x="0" y="0"/>
-                </a:moveTo>
-                <a:lnTo>
-                  <a:pt x="6994113" y="0"/>
-                </a:lnTo>
-                <a:lnTo>
-                  <a:pt x="6994113" y="8229600"/>
-                </a:lnTo>
-                <a:lnTo>
-                  <a:pt x="0" y="8229600"/>
-                </a:lnTo>
-                <a:lnTo>
-                  <a:pt x="0" y="0"/>
-                </a:lnTo>
-                <a:close/>
-              </a:path>
-            </a:pathLst>
-          </a:custGeom>
-          <a:blipFill>
-            <a:blip r:embed="rId6"/>
-            <a:stretch>
-              <a:fillRect l="0" t="0" r="0" b="0"/>
-            </a:stretch>
-          </a:blipFill>
-        </p:spPr>
-      </p:sp>
-      <p:sp>
-        <p:nvSpPr>
-          <p:cNvPr name="Freeform 11" id="11"/>
-          <p:cNvSpPr/>
-          <p:nvPr/>
-        </p:nvSpPr>
-        <p:spPr>
-          <a:xfrm flipH="false" flipV="false" rot="0">
-            <a:off x="1714696" y="2463304"/>
-            <a:ext cx="4950393" cy="7521315"/>
-          </a:xfrm>
-          <a:custGeom>
-            <a:avLst/>
-            <a:gdLst/>
-            <a:ahLst/>
-            <a:cxnLst/>
-            <a:rect r="r" b="b" t="t" l="l"/>
-            <a:pathLst>
-              <a:path h="7521315" w="4950393">
-                <a:moveTo>
-                  <a:pt x="0" y="0"/>
-                </a:moveTo>
-                <a:lnTo>
-                  <a:pt x="4950393" y="0"/>
-                </a:lnTo>
-                <a:lnTo>
-                  <a:pt x="4950393" y="7521315"/>
-                </a:lnTo>
-                <a:lnTo>
-                  <a:pt x="0" y="7521315"/>
-                </a:lnTo>
-                <a:lnTo>
-                  <a:pt x="0" y="0"/>
-                </a:lnTo>
-                <a:close/>
-              </a:path>
-            </a:pathLst>
-          </a:custGeom>
-          <a:blipFill>
-            <a:blip r:embed="rId7">
-              <a:extLst>
-                <a:ext uri="{96DAC541-7B7A-43D3-8B79-37D633B846F1}">
-                  <asvg:svgBlip xmlns:asvg="http://schemas.microsoft.com/office/drawing/2016/SVG/main" r:embed="rId8"/>
-                </a:ext>
-              </a:extLst>
-            </a:blip>
-            <a:stretch>
-              <a:fillRect l="0" t="0" r="0" b="0"/>
-            </a:stretch>
-          </a:blipFill>
-        </p:spPr>
-      </p:sp>
-      <p:sp>
-        <p:nvSpPr>
-          <p:cNvPr name="Freeform 12" id="12"/>
-          <p:cNvSpPr/>
-          <p:nvPr/>
-        </p:nvSpPr>
-        <p:spPr>
-          <a:xfrm flipH="false" flipV="false" rot="0">
-            <a:off x="523980" y="2655858"/>
-            <a:ext cx="3665913" cy="4114800"/>
-          </a:xfrm>
-          <a:custGeom>
-            <a:avLst/>
-            <a:gdLst/>
-            <a:ahLst/>
-            <a:cxnLst/>
-            <a:rect r="r" b="b" t="t" l="l"/>
-            <a:pathLst>
-              <a:path h="4114800" w="3665913">
-                <a:moveTo>
-                  <a:pt x="0" y="0"/>
-                </a:moveTo>
-                <a:lnTo>
-                  <a:pt x="3665912" y="0"/>
-                </a:lnTo>
-                <a:lnTo>
-                  <a:pt x="3665912" y="4114800"/>
-                </a:lnTo>
-                <a:lnTo>
-                  <a:pt x="0" y="4114800"/>
-                </a:lnTo>
-                <a:lnTo>
-                  <a:pt x="0" y="0"/>
-                </a:lnTo>
-                <a:close/>
-              </a:path>
-            </a:pathLst>
-          </a:custGeom>
-          <a:blipFill>
-            <a:blip r:embed="rId9">
-              <a:extLst>
-                <a:ext uri="{96DAC541-7B7A-43D3-8B79-37D633B846F1}">
-                  <asvg:svgBlip xmlns:asvg="http://schemas.microsoft.com/office/drawing/2016/SVG/main" r:embed="rId10"/>
-                </a:ext>
-              </a:extLst>
-            </a:blip>
-            <a:stretch>
-              <a:fillRect l="0" t="0" r="0" b="0"/>
-            </a:stretch>
-          </a:blipFill>
-        </p:spPr>
-      </p:sp>
-      <p:sp>
-        <p:nvSpPr>
-          <p:cNvPr name="TextBox 13" id="13"/>
-          <p:cNvSpPr txBox="true"/>
-          <p:nvPr/>
-        </p:nvSpPr>
-        <p:spPr>
-          <a:xfrm rot="0">
-            <a:off x="8245241" y="9751450"/>
-            <a:ext cx="1684932" cy="233169"/>
-          </a:xfrm>
-          <a:prstGeom prst="rect">
-            <a:avLst/>
-          </a:prstGeom>
-        </p:spPr>
-        <p:txBody>
-          <a:bodyPr anchor="t" rtlCol="false" tIns="0" lIns="0" bIns="0" rIns="0">
-            <a:spAutoFit/>
-          </a:bodyPr>
-          <a:lstStyle/>
-          <a:p>
-            <a:pPr algn="ctr">
-              <a:lnSpc>
-                <a:spcPts val="1826"/>
-              </a:lnSpc>
-            </a:pPr>
-            <a:r>
-              <a:rPr lang="en-US" b="true" sz="1739">
-                <a:solidFill>
-                  <a:srgbClr val="FFFFFF"/>
-                </a:solidFill>
-                <a:latin typeface="TT Lakes Neue Expanded Bold"/>
-                <a:ea typeface="TT Lakes Neue Expanded Bold"/>
-                <a:cs typeface="TT Lakes Neue Expanded Bold"/>
-                <a:sym typeface="TT Lakes Neue Expanded Bold"/>
-              </a:rPr>
-              <a:t>PAGE 5</a:t>
-            </a:r>
-          </a:p>
-        </p:txBody>
-      </p:sp>
-      <p:sp>
-        <p:nvSpPr>
-          <p:cNvPr name="TextBox 14" id="14"/>
-          <p:cNvSpPr txBox="true"/>
-          <p:nvPr/>
-        </p:nvSpPr>
-        <p:spPr>
-          <a:xfrm rot="0">
-            <a:off x="7582912" y="2362109"/>
-            <a:ext cx="9401747" cy="654173"/>
-          </a:xfrm>
-          <a:prstGeom prst="rect">
-            <a:avLst/>
-          </a:prstGeom>
-        </p:spPr>
-        <p:txBody>
-          <a:bodyPr anchor="t" rtlCol="false" tIns="0" lIns="0" bIns="0" rIns="0">
-            <a:spAutoFit/>
-          </a:bodyPr>
-          <a:lstStyle/>
-          <a:p>
-            <a:pPr algn="l">
-              <a:lnSpc>
-                <a:spcPts val="4978"/>
-              </a:lnSpc>
-            </a:pPr>
-            <a:r>
-              <a:rPr lang="en-US" sz="4741" b="true">
-                <a:solidFill>
-                  <a:srgbClr val="FFFFFF"/>
-                </a:solidFill>
-                <a:latin typeface="TT Lakes Neue Expanded Bold"/>
-                <a:ea typeface="TT Lakes Neue Expanded Bold"/>
-                <a:cs typeface="TT Lakes Neue Expanded Bold"/>
-                <a:sym typeface="TT Lakes Neue Expanded Bold"/>
-              </a:rPr>
-              <a:t>LE CHANGE REQUEST</a:t>
-            </a:r>
-          </a:p>
-        </p:txBody>
-      </p:sp>
-      <p:sp>
-        <p:nvSpPr>
-          <p:cNvPr name="TextBox 15" id="15"/>
-          <p:cNvSpPr txBox="true"/>
-          <p:nvPr/>
-        </p:nvSpPr>
-        <p:spPr>
-          <a:xfrm rot="0">
-            <a:off x="7600950" y="3277082"/>
-            <a:ext cx="8114095" cy="4676581"/>
-          </a:xfrm>
-          <a:prstGeom prst="rect">
-            <a:avLst/>
-          </a:prstGeom>
-        </p:spPr>
-        <p:txBody>
-          <a:bodyPr anchor="t" rtlCol="false" tIns="0" lIns="0" bIns="0" rIns="0">
-            <a:spAutoFit/>
-          </a:bodyPr>
-          <a:lstStyle/>
-          <a:p>
-            <a:pPr algn="just">
-              <a:lnSpc>
-                <a:spcPts val="2456"/>
-              </a:lnSpc>
-            </a:pPr>
-            <a:r>
-              <a:rPr lang="en-US" sz="2339" spc="79">
-                <a:solidFill>
-                  <a:srgbClr val="FFFFFF"/>
-                </a:solidFill>
-                <a:latin typeface="Poppins"/>
-                <a:ea typeface="Poppins"/>
-                <a:cs typeface="Poppins"/>
-                <a:sym typeface="Poppins"/>
-              </a:rPr>
-              <a:t>Abbiamo pianificato tre interventi mirati:</a:t>
-            </a:r>
-          </a:p>
-          <a:p>
-            <a:pPr algn="just">
-              <a:lnSpc>
-                <a:spcPts val="2456"/>
-              </a:lnSpc>
-            </a:pPr>
-          </a:p>
-          <a:p>
-            <a:pPr algn="just" marL="505164" indent="-252582" lvl="1">
-              <a:lnSpc>
-                <a:spcPts val="2456"/>
-              </a:lnSpc>
-              <a:buFont typeface="Arial"/>
-              <a:buChar char="•"/>
-            </a:pPr>
-            <a:r>
-              <a:rPr lang="en-US" sz="2339" spc="79">
-                <a:solidFill>
-                  <a:srgbClr val="FFDE59"/>
-                </a:solidFill>
-                <a:latin typeface="Poppins"/>
-                <a:ea typeface="Poppins"/>
-                <a:cs typeface="Poppins"/>
-                <a:sym typeface="Poppins"/>
-              </a:rPr>
-              <a:t>CR01 (Manutenzione Evolutiva):</a:t>
-            </a:r>
-            <a:r>
-              <a:rPr lang="en-US" sz="2339" spc="79">
-                <a:solidFill>
-                  <a:srgbClr val="FFFFFF"/>
-                </a:solidFill>
-                <a:latin typeface="Poppins"/>
-                <a:ea typeface="Poppins"/>
-                <a:cs typeface="Poppins"/>
-                <a:sym typeface="Poppins"/>
-              </a:rPr>
-              <a:t> Supporto a JUnit 5 (riconoscimento e conversione delle nuove annotazioni).</a:t>
-            </a:r>
-          </a:p>
-          <a:p>
-            <a:pPr algn="just">
-              <a:lnSpc>
-                <a:spcPts val="2456"/>
-              </a:lnSpc>
-            </a:pPr>
-          </a:p>
-          <a:p>
-            <a:pPr algn="just">
-              <a:lnSpc>
-                <a:spcPts val="2456"/>
-              </a:lnSpc>
-            </a:pPr>
-          </a:p>
-          <a:p>
-            <a:pPr algn="just" marL="505164" indent="-252582" lvl="1">
-              <a:lnSpc>
-                <a:spcPts val="2456"/>
-              </a:lnSpc>
-              <a:buFont typeface="Arial"/>
-              <a:buChar char="•"/>
-            </a:pPr>
-            <a:r>
-              <a:rPr lang="en-US" sz="2339" spc="79">
-                <a:solidFill>
-                  <a:srgbClr val="FFDE59"/>
-                </a:solidFill>
-                <a:latin typeface="Poppins"/>
-                <a:ea typeface="Poppins"/>
-                <a:cs typeface="Poppins"/>
-                <a:sym typeface="Poppins"/>
-              </a:rPr>
-              <a:t>CR02 (Manutenzione Adattiva):</a:t>
-            </a:r>
-            <a:r>
-              <a:rPr lang="en-US" sz="2339" spc="79">
-                <a:solidFill>
-                  <a:srgbClr val="FFFFFF"/>
-                </a:solidFill>
-                <a:latin typeface="Poppins"/>
-                <a:ea typeface="Poppins"/>
-                <a:cs typeface="Poppins"/>
-                <a:sym typeface="Poppins"/>
-              </a:rPr>
-              <a:t> Integrazione Project AMBER. Aggiornamento del parser per supportare il livello linguistico Java 17/21.</a:t>
-            </a:r>
-          </a:p>
-          <a:p>
-            <a:pPr algn="just">
-              <a:lnSpc>
-                <a:spcPts val="2456"/>
-              </a:lnSpc>
-            </a:pPr>
-          </a:p>
-          <a:p>
-            <a:pPr algn="just">
-              <a:lnSpc>
-                <a:spcPts val="2456"/>
-              </a:lnSpc>
-            </a:pPr>
-          </a:p>
-          <a:p>
-            <a:pPr algn="just" marL="505164" indent="-252582" lvl="1">
-              <a:lnSpc>
-                <a:spcPts val="2456"/>
-              </a:lnSpc>
-              <a:buFont typeface="Arial"/>
-              <a:buChar char="•"/>
-            </a:pPr>
-            <a:r>
-              <a:rPr lang="en-US" sz="2339" spc="79">
-                <a:solidFill>
-                  <a:srgbClr val="FFDE59"/>
-                </a:solidFill>
-                <a:latin typeface="Poppins"/>
-                <a:ea typeface="Poppins"/>
-                <a:cs typeface="Poppins"/>
-                <a:sym typeface="Poppins"/>
-              </a:rPr>
-              <a:t>CR03 (Manutenzione Perfettiva)</a:t>
-            </a:r>
-            <a:r>
-              <a:rPr lang="en-US" sz="2339" spc="79">
-                <a:solidFill>
-                  <a:srgbClr val="FFFFFF"/>
-                </a:solidFill>
-                <a:latin typeface="Poppins"/>
-                <a:ea typeface="Poppins"/>
-                <a:cs typeface="Poppins"/>
-                <a:sym typeface="Poppins"/>
-              </a:rPr>
-              <a:t>: Controllo di granularità sui metodi scelti dall'utente.</a:t>
-            </a:r>
-          </a:p>
-          <a:p>
-            <a:pPr algn="just">
-              <a:lnSpc>
-                <a:spcPts val="2771"/>
-              </a:lnSpc>
-              <a:spcBef>
-                <a:spcPct val="0"/>
-              </a:spcBef>
-            </a:pPr>
-          </a:p>
-        </p:txBody>
-      </p:sp>
-      <p:sp>
-        <p:nvSpPr>
-          <p:cNvPr name="Freeform 16" id="16"/>
-          <p:cNvSpPr/>
-          <p:nvPr/>
-        </p:nvSpPr>
-        <p:spPr>
-          <a:xfrm flipH="false" flipV="false" rot="0">
-            <a:off x="16984659" y="653111"/>
-            <a:ext cx="549282" cy="549282"/>
-          </a:xfrm>
-          <a:custGeom>
-            <a:avLst/>
-            <a:gdLst/>
-            <a:ahLst/>
-            <a:cxnLst/>
-            <a:rect r="r" b="b" t="t" l="l"/>
-            <a:pathLst>
-              <a:path h="549282" w="549282">
-                <a:moveTo>
-                  <a:pt x="0" y="0"/>
-                </a:moveTo>
-                <a:lnTo>
-                  <a:pt x="549282" y="0"/>
-                </a:lnTo>
-                <a:lnTo>
-                  <a:pt x="549282" y="549283"/>
-                </a:lnTo>
-                <a:lnTo>
-                  <a:pt x="0" y="549283"/>
-                </a:lnTo>
-                <a:lnTo>
-                  <a:pt x="0" y="0"/>
-                </a:lnTo>
-                <a:close/>
-              </a:path>
-            </a:pathLst>
-          </a:custGeom>
-          <a:blipFill>
-            <a:blip r:embed="rId11">
-              <a:extLst>
-                <a:ext uri="{96DAC541-7B7A-43D3-8B79-37D633B846F1}">
-                  <asvg:svgBlip xmlns:asvg="http://schemas.microsoft.com/office/drawing/2016/SVG/main" r:embed="rId12"/>
-                </a:ext>
-              </a:extLst>
-            </a:blip>
-            <a:stretch>
-              <a:fillRect l="0" t="0" r="0" b="0"/>
-            </a:stretch>
-          </a:blipFill>
-        </p:spPr>
-      </p:sp>
-      <p:sp>
-        <p:nvSpPr>
-          <p:cNvPr name="Freeform 17" id="17"/>
-          <p:cNvSpPr/>
-          <p:nvPr/>
-        </p:nvSpPr>
-        <p:spPr>
-          <a:xfrm flipH="false" flipV="false" rot="0">
-            <a:off x="325534" y="242872"/>
-            <a:ext cx="1052888" cy="1052888"/>
-          </a:xfrm>
-          <a:custGeom>
-            <a:avLst/>
-            <a:gdLst/>
-            <a:ahLst/>
-            <a:cxnLst/>
-            <a:rect r="r" b="b" t="t" l="l"/>
-            <a:pathLst>
-              <a:path h="1052888" w="1052888">
-                <a:moveTo>
-                  <a:pt x="0" y="0"/>
-                </a:moveTo>
-                <a:lnTo>
-                  <a:pt x="1052888" y="0"/>
-                </a:lnTo>
-                <a:lnTo>
-                  <a:pt x="1052888" y="1052888"/>
-                </a:lnTo>
-                <a:lnTo>
-                  <a:pt x="0" y="1052888"/>
-                </a:lnTo>
-                <a:lnTo>
-                  <a:pt x="0" y="0"/>
-                </a:lnTo>
-                <a:close/>
-              </a:path>
-            </a:pathLst>
-          </a:custGeom>
-          <a:blipFill>
-            <a:blip r:embed="rId13"/>
-            <a:stretch>
-              <a:fillRect l="0" t="0" r="0" b="0"/>
-            </a:stretch>
-          </a:blipFill>
-        </p:spPr>
-      </p:sp>
-      <p:sp>
-        <p:nvSpPr>
-          <p:cNvPr name="Freeform 18" id="18"/>
-          <p:cNvSpPr/>
-          <p:nvPr/>
-        </p:nvSpPr>
-        <p:spPr>
-          <a:xfrm flipH="false" flipV="false" rot="0">
-            <a:off x="1987817" y="151465"/>
-            <a:ext cx="1235703" cy="1235703"/>
-          </a:xfrm>
-          <a:custGeom>
-            <a:avLst/>
-            <a:gdLst/>
-            <a:ahLst/>
-            <a:cxnLst/>
-            <a:rect r="r" b="b" t="t" l="l"/>
-            <a:pathLst>
-              <a:path h="1235703" w="1235703">
-                <a:moveTo>
-                  <a:pt x="0" y="0"/>
-                </a:moveTo>
-                <a:lnTo>
-                  <a:pt x="1235703" y="0"/>
-                </a:lnTo>
-                <a:lnTo>
-                  <a:pt x="1235703" y="1235703"/>
-                </a:lnTo>
-                <a:lnTo>
-                  <a:pt x="0" y="1235703"/>
-                </a:lnTo>
-                <a:lnTo>
-                  <a:pt x="0" y="0"/>
-                </a:lnTo>
-                <a:close/>
-              </a:path>
-            </a:pathLst>
-          </a:custGeom>
-          <a:blipFill>
-            <a:blip r:embed="rId14"/>
-            <a:stretch>
-              <a:fillRect l="0" t="0" r="0" b="0"/>
-            </a:stretch>
-          </a:blipFill>
-        </p:spPr>
-      </p:sp>
-    </p:spTree>
-  </p:cSld>
-  <p:clrMapOvr>
-    <a:masterClrMapping/>
-  </p:clrMapOvr>
-</p:sld>
-</file>
-
-<file path=ppt/slides/slide6.xml><?xml version="1.0" encoding="utf-8"?>
-<p:sld xmlns:p="http://schemas.openxmlformats.org/presentationml/2006/main" xmlns:a="http://schemas.openxmlformats.org/drawingml/2006/main" xmlns:r="http://schemas.openxmlformats.org/officeDocument/2006/relationships">
-  <p:cSld>
-    <p:bg>
-      <p:bgPr>
-        <a:gradFill rotWithShape="true">
-          <a:gsLst>
-            <a:gs pos="0">
-              <a:srgbClr val="0097B2">
-                <a:alpha val="100000"/>
-              </a:srgbClr>
-            </a:gs>
-            <a:gs pos="50000">
-              <a:srgbClr val="3A6A9E">
-                <a:alpha val="100000"/>
-              </a:srgbClr>
-            </a:gs>
-            <a:gs pos="100000">
-              <a:srgbClr val="103863">
-                <a:alpha val="100000"/>
-              </a:srgbClr>
-            </a:gs>
-          </a:gsLst>
-          <a:lin ang="5400000"/>
-        </a:gradFill>
-      </p:bgPr>
-    </p:bg>
-    <p:spTree>
-      <p:nvGrpSpPr>
-        <p:cNvPr id="1" name=""/>
-        <p:cNvGrpSpPr/>
-        <p:nvPr/>
-      </p:nvGrpSpPr>
-      <p:grpSpPr>
-        <a:xfrm>
-          <a:off x="0" y="0"/>
-          <a:ext cx="0" cy="0"/>
-          <a:chOff x="0" y="0"/>
-          <a:chExt cx="0" cy="0"/>
-        </a:xfrm>
-      </p:grpSpPr>
-      <p:grpSp>
-        <p:nvGrpSpPr>
-          <p:cNvPr name="Group 2" id="2"/>
-          <p:cNvGrpSpPr/>
-          <p:nvPr/>
-        </p:nvGrpSpPr>
-        <p:grpSpPr>
-          <a:xfrm rot="0">
-            <a:off x="-365251" y="-1543050"/>
-            <a:ext cx="4199655" cy="3086100"/>
-            <a:chOff x="0" y="0"/>
-            <a:chExt cx="1106082" cy="812800"/>
-          </a:xfrm>
-        </p:grpSpPr>
-        <p:sp>
-          <p:nvSpPr>
-            <p:cNvPr name="Freeform 3" id="3"/>
-            <p:cNvSpPr/>
-            <p:nvPr/>
-          </p:nvSpPr>
-          <p:spPr>
-            <a:xfrm flipH="false" flipV="false" rot="0">
-              <a:off x="0" y="0"/>
-              <a:ext cx="1106082" cy="812800"/>
-            </a:xfrm>
-            <a:custGeom>
-              <a:avLst/>
-              <a:gdLst/>
-              <a:ahLst/>
-              <a:cxnLst/>
-              <a:rect r="r" b="b" t="t" l="l"/>
-              <a:pathLst>
-                <a:path h="812800" w="1106082">
-                  <a:moveTo>
-                    <a:pt x="46087" y="0"/>
-                  </a:moveTo>
-                  <a:lnTo>
-                    <a:pt x="1059995" y="0"/>
-                  </a:lnTo>
-                  <a:cubicBezTo>
-                    <a:pt x="1072218" y="0"/>
-                    <a:pt x="1083941" y="4856"/>
-                    <a:pt x="1092584" y="13498"/>
-                  </a:cubicBezTo>
-                  <a:cubicBezTo>
-                    <a:pt x="1101226" y="22141"/>
-                    <a:pt x="1106082" y="33864"/>
-                    <a:pt x="1106082" y="46087"/>
-                  </a:cubicBezTo>
-                  <a:lnTo>
-                    <a:pt x="1106082" y="766713"/>
-                  </a:lnTo>
-                  <a:cubicBezTo>
-                    <a:pt x="1106082" y="778936"/>
-                    <a:pt x="1101226" y="790659"/>
-                    <a:pt x="1092584" y="799302"/>
-                  </a:cubicBezTo>
-                  <a:cubicBezTo>
-                    <a:pt x="1083941" y="807944"/>
-                    <a:pt x="1072218" y="812800"/>
-                    <a:pt x="1059995" y="812800"/>
-                  </a:cubicBezTo>
-                  <a:lnTo>
-                    <a:pt x="46087" y="812800"/>
-                  </a:lnTo>
-                  <a:cubicBezTo>
-                    <a:pt x="33864" y="812800"/>
-                    <a:pt x="22141" y="807944"/>
-                    <a:pt x="13498" y="799302"/>
-                  </a:cubicBezTo>
-                  <a:cubicBezTo>
-                    <a:pt x="4856" y="790659"/>
-                    <a:pt x="0" y="778936"/>
-                    <a:pt x="0" y="766713"/>
-                  </a:cubicBezTo>
-                  <a:lnTo>
-                    <a:pt x="0" y="46087"/>
-                  </a:lnTo>
-                  <a:cubicBezTo>
-                    <a:pt x="0" y="33864"/>
-                    <a:pt x="4856" y="22141"/>
-                    <a:pt x="13498" y="13498"/>
-                  </a:cubicBezTo>
-                  <a:cubicBezTo>
-                    <a:pt x="22141" y="4856"/>
-                    <a:pt x="33864" y="0"/>
-                    <a:pt x="46087" y="0"/>
-                  </a:cubicBezTo>
-                  <a:close/>
-                </a:path>
-              </a:pathLst>
-            </a:custGeom>
-            <a:gradFill rotWithShape="true">
-              <a:gsLst>
-                <a:gs pos="0">
-                  <a:srgbClr val="0097B2">
-                    <a:alpha val="100000"/>
-                  </a:srgbClr>
-                </a:gs>
-                <a:gs pos="50000">
-                  <a:srgbClr val="3A6A9E">
-                    <a:alpha val="100000"/>
-                  </a:srgbClr>
-                </a:gs>
-                <a:gs pos="100000">
-                  <a:srgbClr val="103863">
-                    <a:alpha val="100000"/>
-                  </a:srgbClr>
-                </a:gs>
-              </a:gsLst>
-              <a:lin ang="0"/>
-            </a:gradFill>
-            <a:ln w="19050" cap="rnd">
-              <a:solidFill>
-                <a:srgbClr val="000000"/>
-              </a:solidFill>
-              <a:prstDash val="solid"/>
-              <a:round/>
-            </a:ln>
-          </p:spPr>
-        </p:sp>
-        <p:sp>
-          <p:nvSpPr>
-            <p:cNvPr name="TextBox 4" id="4"/>
-            <p:cNvSpPr txBox="true"/>
-            <p:nvPr/>
-          </p:nvSpPr>
-          <p:spPr>
-            <a:xfrm>
-              <a:off x="0" y="28575"/>
-              <a:ext cx="1106082" cy="784225"/>
-            </a:xfrm>
-            <a:prstGeom prst="rect">
-              <a:avLst/>
-            </a:prstGeom>
-          </p:spPr>
-          <p:txBody>
-            <a:bodyPr anchor="ctr" rtlCol="false" tIns="50800" lIns="50800" bIns="50800" rIns="50800"/>
-            <a:lstStyle/>
-            <a:p>
-              <a:pPr algn="ctr">
-                <a:lnSpc>
-                  <a:spcPts val="1826"/>
-                </a:lnSpc>
-              </a:pPr>
-            </a:p>
-          </p:txBody>
-        </p:sp>
-      </p:grpSp>
-      <p:sp>
-        <p:nvSpPr>
-          <p:cNvPr name="Freeform 5" id="5"/>
-          <p:cNvSpPr/>
-          <p:nvPr/>
-        </p:nvSpPr>
-        <p:spPr>
-          <a:xfrm flipH="false" flipV="false" rot="0">
-            <a:off x="-1387661" y="7108128"/>
-            <a:ext cx="19889989" cy="8313610"/>
-          </a:xfrm>
-          <a:custGeom>
-            <a:avLst/>
-            <a:gdLst/>
-            <a:ahLst/>
-            <a:cxnLst/>
-            <a:rect r="r" b="b" t="t" l="l"/>
-            <a:pathLst>
-              <a:path h="8313610" w="19889989">
-                <a:moveTo>
-                  <a:pt x="0" y="0"/>
-                </a:moveTo>
-                <a:lnTo>
-                  <a:pt x="19889989" y="0"/>
-                </a:lnTo>
-                <a:lnTo>
-                  <a:pt x="19889989" y="8313610"/>
-                </a:lnTo>
-                <a:lnTo>
-                  <a:pt x="0" y="8313610"/>
-                </a:lnTo>
-                <a:lnTo>
-                  <a:pt x="0" y="0"/>
-                </a:lnTo>
-                <a:close/>
-              </a:path>
-            </a:pathLst>
-          </a:custGeom>
-          <a:blipFill>
-            <a:blip r:embed="rId2">
-              <a:alphaModFix amt="43999"/>
-              <a:extLst>
-                <a:ext uri="{96DAC541-7B7A-43D3-8B79-37D633B846F1}">
-                  <asvg:svgBlip xmlns:asvg="http://schemas.microsoft.com/office/drawing/2016/SVG/main" r:embed="rId3"/>
-                </a:ext>
-              </a:extLst>
-            </a:blip>
-            <a:stretch>
-              <a:fillRect l="0" t="0" r="0" b="0"/>
-            </a:stretch>
-          </a:blipFill>
-        </p:spPr>
-      </p:sp>
-      <p:grpSp>
-        <p:nvGrpSpPr>
-          <p:cNvPr name="Group 6" id="6"/>
-          <p:cNvGrpSpPr/>
-          <p:nvPr/>
-        </p:nvGrpSpPr>
-        <p:grpSpPr>
-          <a:xfrm rot="0">
-            <a:off x="7600950" y="9365373"/>
-            <a:ext cx="3086100" cy="3086100"/>
-            <a:chOff x="0" y="0"/>
-            <a:chExt cx="812800" cy="812800"/>
-          </a:xfrm>
-        </p:grpSpPr>
-        <p:sp>
-          <p:nvSpPr>
-            <p:cNvPr name="Freeform 7" id="7"/>
-            <p:cNvSpPr/>
-            <p:nvPr/>
-          </p:nvSpPr>
-          <p:spPr>
-            <a:xfrm flipH="false" flipV="false" rot="0">
-              <a:off x="0" y="0"/>
-              <a:ext cx="812800" cy="812800"/>
-            </a:xfrm>
-            <a:custGeom>
-              <a:avLst/>
-              <a:gdLst/>
-              <a:ahLst/>
-              <a:cxnLst/>
-              <a:rect r="r" b="b" t="t" l="l"/>
-              <a:pathLst>
-                <a:path h="812800" w="812800">
-                  <a:moveTo>
-                    <a:pt x="62716" y="0"/>
-                  </a:moveTo>
-                  <a:lnTo>
-                    <a:pt x="750084" y="0"/>
-                  </a:lnTo>
-                  <a:cubicBezTo>
-                    <a:pt x="766717" y="0"/>
-                    <a:pt x="782669" y="6608"/>
-                    <a:pt x="794431" y="18369"/>
-                  </a:cubicBezTo>
-                  <a:cubicBezTo>
-                    <a:pt x="806192" y="30131"/>
-                    <a:pt x="812800" y="46083"/>
-                    <a:pt x="812800" y="62716"/>
-                  </a:cubicBezTo>
-                  <a:lnTo>
-                    <a:pt x="812800" y="750084"/>
-                  </a:lnTo>
-                  <a:cubicBezTo>
-                    <a:pt x="812800" y="766717"/>
-                    <a:pt x="806192" y="782669"/>
-                    <a:pt x="794431" y="794431"/>
-                  </a:cubicBezTo>
-                  <a:cubicBezTo>
-                    <a:pt x="782669" y="806192"/>
-                    <a:pt x="766717" y="812800"/>
-                    <a:pt x="750084" y="812800"/>
-                  </a:cubicBezTo>
-                  <a:lnTo>
-                    <a:pt x="62716" y="812800"/>
-                  </a:lnTo>
-                  <a:cubicBezTo>
-                    <a:pt x="46083" y="812800"/>
-                    <a:pt x="30131" y="806192"/>
-                    <a:pt x="18369" y="794431"/>
-                  </a:cubicBezTo>
-                  <a:cubicBezTo>
-                    <a:pt x="6608" y="782669"/>
-                    <a:pt x="0" y="766717"/>
-                    <a:pt x="0" y="750084"/>
-                  </a:cubicBezTo>
-                  <a:lnTo>
-                    <a:pt x="0" y="62716"/>
-                  </a:lnTo>
-                  <a:cubicBezTo>
-                    <a:pt x="0" y="46083"/>
-                    <a:pt x="6608" y="30131"/>
-                    <a:pt x="18369" y="18369"/>
-                  </a:cubicBezTo>
-                  <a:cubicBezTo>
-                    <a:pt x="30131" y="6608"/>
-                    <a:pt x="46083" y="0"/>
-                    <a:pt x="62716" y="0"/>
-                  </a:cubicBezTo>
-                  <a:close/>
-                </a:path>
-              </a:pathLst>
-            </a:custGeom>
-            <a:gradFill rotWithShape="true">
-              <a:gsLst>
-                <a:gs pos="0">
-                  <a:srgbClr val="0097B2">
-                    <a:alpha val="100000"/>
-                  </a:srgbClr>
-                </a:gs>
-                <a:gs pos="50000">
-                  <a:srgbClr val="3A6A9E">
-                    <a:alpha val="100000"/>
-                  </a:srgbClr>
-                </a:gs>
-                <a:gs pos="100000">
-                  <a:srgbClr val="103863">
-                    <a:alpha val="100000"/>
-                  </a:srgbClr>
-                </a:gs>
-              </a:gsLst>
-              <a:lin ang="0"/>
-            </a:gradFill>
-            <a:ln w="19050" cap="rnd">
-              <a:solidFill>
-                <a:srgbClr val="000000"/>
-              </a:solidFill>
-              <a:prstDash val="solid"/>
-              <a:round/>
-            </a:ln>
-          </p:spPr>
-        </p:sp>
-        <p:sp>
-          <p:nvSpPr>
-            <p:cNvPr name="TextBox 8" id="8"/>
-            <p:cNvSpPr txBox="true"/>
-            <p:nvPr/>
-          </p:nvSpPr>
-          <p:spPr>
-            <a:xfrm>
-              <a:off x="0" y="28575"/>
-              <a:ext cx="812800" cy="784225"/>
-            </a:xfrm>
-            <a:prstGeom prst="rect">
-              <a:avLst/>
-            </a:prstGeom>
-          </p:spPr>
-          <p:txBody>
-            <a:bodyPr anchor="ctr" rtlCol="false" tIns="50800" lIns="50800" bIns="50800" rIns="50800"/>
-            <a:lstStyle/>
-            <a:p>
-              <a:pPr algn="ctr">
-                <a:lnSpc>
-                  <a:spcPts val="1826"/>
-                </a:lnSpc>
-              </a:pPr>
-            </a:p>
-          </p:txBody>
-        </p:sp>
-      </p:grpSp>
-      <p:grpSp>
-        <p:nvGrpSpPr>
-          <p:cNvPr name="Group 9" id="9"/>
-          <p:cNvGrpSpPr/>
-          <p:nvPr/>
-        </p:nvGrpSpPr>
-        <p:grpSpPr>
-          <a:xfrm rot="0">
-            <a:off x="398944" y="2952088"/>
-            <a:ext cx="3814194" cy="748374"/>
-            <a:chOff x="0" y="0"/>
-            <a:chExt cx="1004561" cy="197103"/>
-          </a:xfrm>
-        </p:grpSpPr>
-        <p:sp>
-          <p:nvSpPr>
-            <p:cNvPr name="Freeform 10" id="10"/>
-            <p:cNvSpPr/>
-            <p:nvPr/>
-          </p:nvSpPr>
-          <p:spPr>
-            <a:xfrm flipH="false" flipV="false" rot="0">
-              <a:off x="0" y="0"/>
-              <a:ext cx="1004561" cy="197103"/>
-            </a:xfrm>
-            <a:custGeom>
-              <a:avLst/>
-              <a:gdLst/>
-              <a:ahLst/>
-              <a:cxnLst/>
-              <a:rect r="r" b="b" t="t" l="l"/>
-              <a:pathLst>
-                <a:path h="197103" w="1004561">
-                  <a:moveTo>
-                    <a:pt x="50744" y="0"/>
-                  </a:moveTo>
-                  <a:lnTo>
-                    <a:pt x="953817" y="0"/>
-                  </a:lnTo>
-                  <a:cubicBezTo>
-                    <a:pt x="967275" y="0"/>
-                    <a:pt x="980182" y="5346"/>
-                    <a:pt x="989699" y="14863"/>
-                  </a:cubicBezTo>
-                  <a:cubicBezTo>
-                    <a:pt x="999215" y="24379"/>
-                    <a:pt x="1004561" y="37286"/>
-                    <a:pt x="1004561" y="50744"/>
-                  </a:cubicBezTo>
-                  <a:lnTo>
-                    <a:pt x="1004561" y="146359"/>
-                  </a:lnTo>
-                  <a:cubicBezTo>
-                    <a:pt x="1004561" y="159817"/>
-                    <a:pt x="999215" y="172724"/>
-                    <a:pt x="989699" y="182240"/>
-                  </a:cubicBezTo>
-                  <a:cubicBezTo>
-                    <a:pt x="980182" y="191756"/>
-                    <a:pt x="967275" y="197103"/>
-                    <a:pt x="953817" y="197103"/>
-                  </a:cubicBezTo>
-                  <a:lnTo>
-                    <a:pt x="50744" y="197103"/>
-                  </a:lnTo>
-                  <a:cubicBezTo>
-                    <a:pt x="22719" y="197103"/>
-                    <a:pt x="0" y="174384"/>
-                    <a:pt x="0" y="146359"/>
-                  </a:cubicBezTo>
-                  <a:lnTo>
-                    <a:pt x="0" y="50744"/>
-                  </a:lnTo>
-                  <a:cubicBezTo>
-                    <a:pt x="0" y="37286"/>
-                    <a:pt x="5346" y="24379"/>
-                    <a:pt x="14863" y="14863"/>
-                  </a:cubicBezTo>
-                  <a:cubicBezTo>
-                    <a:pt x="24379" y="5346"/>
-                    <a:pt x="37286" y="0"/>
-                    <a:pt x="50744" y="0"/>
                   </a:cubicBezTo>
                   <a:close/>
                 </a:path>
@@ -21151,7 +19387,7 @@
           <p:spPr>
             <a:xfrm>
               <a:off x="0" y="28575"/>
-              <a:ext cx="1004561" cy="168528"/>
+              <a:ext cx="812800" cy="784225"/>
             </a:xfrm>
             <a:prstGeom prst="rect">
               <a:avLst/>
@@ -21178,7 +19414,7 @@
         </p:nvGrpSpPr>
         <p:grpSpPr>
           <a:xfrm rot="0">
-            <a:off x="4533955" y="2952088"/>
+            <a:off x="398944" y="2952088"/>
             <a:ext cx="3814194" cy="748374"/>
             <a:chOff x="0" y="0"/>
             <a:chExt cx="1004561" cy="197103"/>
@@ -21322,10 +19558,10 @@
         </p:nvGrpSpPr>
         <p:grpSpPr>
           <a:xfrm rot="0">
-            <a:off x="8668965" y="2989286"/>
-            <a:ext cx="4199461" cy="748374"/>
+            <a:off x="4533955" y="2952088"/>
+            <a:ext cx="3814194" cy="748374"/>
             <a:chOff x="0" y="0"/>
-            <a:chExt cx="1106031" cy="197103"/>
+            <a:chExt cx="1004561" cy="197103"/>
           </a:xfrm>
         </p:grpSpPr>
         <p:sp>
@@ -21337,7 +19573,7 @@
           <p:spPr>
             <a:xfrm flipH="false" flipV="false" rot="0">
               <a:off x="0" y="0"/>
-              <a:ext cx="1106031" cy="197103"/>
+              <a:ext cx="1004561" cy="197103"/>
             </a:xfrm>
             <a:custGeom>
               <a:avLst/>
@@ -21346,41 +19582,56 @@
               <a:cxnLst/>
               <a:rect r="r" b="b" t="t" l="l"/>
               <a:pathLst>
-                <a:path h="197103" w="1106031">
+                <a:path h="197103" w="1004561">
                   <a:moveTo>
-                    <a:pt x="46089" y="0"/>
+                    <a:pt x="50744" y="0"/>
                   </a:moveTo>
                   <a:lnTo>
-                    <a:pt x="1059942" y="0"/>
+                    <a:pt x="953817" y="0"/>
                   </a:lnTo>
                   <a:cubicBezTo>
-                    <a:pt x="1085396" y="0"/>
-                    <a:pt x="1106031" y="20635"/>
-                    <a:pt x="1106031" y="46089"/>
+                    <a:pt x="967275" y="0"/>
+                    <a:pt x="980182" y="5346"/>
+                    <a:pt x="989699" y="14863"/>
+                  </a:cubicBezTo>
+                  <a:cubicBezTo>
+                    <a:pt x="999215" y="24379"/>
+                    <a:pt x="1004561" y="37286"/>
+                    <a:pt x="1004561" y="50744"/>
                   </a:cubicBezTo>
                   <a:lnTo>
-                    <a:pt x="1106031" y="151014"/>
+                    <a:pt x="1004561" y="146359"/>
                   </a:lnTo>
                   <a:cubicBezTo>
-                    <a:pt x="1106031" y="176468"/>
-                    <a:pt x="1085396" y="197103"/>
-                    <a:pt x="1059942" y="197103"/>
+                    <a:pt x="1004561" y="159817"/>
+                    <a:pt x="999215" y="172724"/>
+                    <a:pt x="989699" y="182240"/>
+                  </a:cubicBezTo>
+                  <a:cubicBezTo>
+                    <a:pt x="980182" y="191756"/>
+                    <a:pt x="967275" y="197103"/>
+                    <a:pt x="953817" y="197103"/>
                   </a:cubicBezTo>
                   <a:lnTo>
-                    <a:pt x="46089" y="197103"/>
+                    <a:pt x="50744" y="197103"/>
                   </a:lnTo>
                   <a:cubicBezTo>
-                    <a:pt x="20635" y="197103"/>
-                    <a:pt x="0" y="176468"/>
-                    <a:pt x="0" y="151014"/>
+                    <a:pt x="22719" y="197103"/>
+                    <a:pt x="0" y="174384"/>
+                    <a:pt x="0" y="146359"/>
                   </a:cubicBezTo>
                   <a:lnTo>
-                    <a:pt x="0" y="46089"/>
+                    <a:pt x="0" y="50744"/>
                   </a:lnTo>
                   <a:cubicBezTo>
-                    <a:pt x="0" y="20635"/>
-                    <a:pt x="20635" y="0"/>
-                    <a:pt x="46089" y="0"/>
+                    <a:pt x="0" y="37286"/>
+                    <a:pt x="5346" y="24379"/>
+                    <a:pt x="14863" y="14863"/>
+                  </a:cubicBezTo>
+                  <a:cubicBezTo>
+                    <a:pt x="24379" y="5346"/>
+                    <a:pt x="37286" y="0"/>
+                    <a:pt x="50744" y="0"/>
                   </a:cubicBezTo>
                   <a:close/>
                 </a:path>
@@ -21424,7 +19675,7 @@
           <p:spPr>
             <a:xfrm>
               <a:off x="0" y="28575"/>
-              <a:ext cx="1106031" cy="168528"/>
+              <a:ext cx="1004561" cy="168528"/>
             </a:xfrm>
             <a:prstGeom prst="rect">
               <a:avLst/>
@@ -21443,602 +19694,15 @@
           </p:txBody>
         </p:sp>
       </p:grpSp>
-      <p:sp>
-        <p:nvSpPr>
-          <p:cNvPr name="TextBox 18" id="18"/>
-          <p:cNvSpPr txBox="true"/>
-          <p:nvPr/>
-        </p:nvSpPr>
-        <p:spPr>
-          <a:xfrm rot="0">
-            <a:off x="8245241" y="9751450"/>
-            <a:ext cx="1684932" cy="233169"/>
-          </a:xfrm>
-          <a:prstGeom prst="rect">
-            <a:avLst/>
-          </a:prstGeom>
-        </p:spPr>
-        <p:txBody>
-          <a:bodyPr anchor="t" rtlCol="false" tIns="0" lIns="0" bIns="0" rIns="0">
-            <a:spAutoFit/>
-          </a:bodyPr>
-          <a:lstStyle/>
-          <a:p>
-            <a:pPr algn="ctr">
-              <a:lnSpc>
-                <a:spcPts val="1826"/>
-              </a:lnSpc>
-            </a:pPr>
-            <a:r>
-              <a:rPr lang="en-US" b="true" sz="1739">
-                <a:solidFill>
-                  <a:srgbClr val="FFFFFF"/>
-                </a:solidFill>
-                <a:latin typeface="TT Lakes Neue Expanded Bold"/>
-                <a:ea typeface="TT Lakes Neue Expanded Bold"/>
-                <a:cs typeface="TT Lakes Neue Expanded Bold"/>
-                <a:sym typeface="TT Lakes Neue Expanded Bold"/>
-              </a:rPr>
-              <a:t>PAGE 6</a:t>
-            </a:r>
-          </a:p>
-        </p:txBody>
-      </p:sp>
-      <p:sp>
-        <p:nvSpPr>
-          <p:cNvPr name="TextBox 19" id="19"/>
-          <p:cNvSpPr txBox="true"/>
-          <p:nvPr/>
-        </p:nvSpPr>
-        <p:spPr>
-          <a:xfrm rot="0">
-            <a:off x="3554761" y="259150"/>
-            <a:ext cx="10793017" cy="1909603"/>
-          </a:xfrm>
-          <a:prstGeom prst="rect">
-            <a:avLst/>
-          </a:prstGeom>
-        </p:spPr>
-        <p:txBody>
-          <a:bodyPr anchor="t" rtlCol="false" tIns="0" lIns="0" bIns="0" rIns="0">
-            <a:spAutoFit/>
-          </a:bodyPr>
-          <a:lstStyle/>
-          <a:p>
-            <a:pPr algn="ctr">
-              <a:lnSpc>
-                <a:spcPts val="4978"/>
-              </a:lnSpc>
-            </a:pPr>
-            <a:r>
-              <a:rPr lang="en-US" b="true" sz="4741">
-                <a:solidFill>
-                  <a:srgbClr val="FFFFFF"/>
-                </a:solidFill>
-                <a:latin typeface="TT Lakes Neue Expanded Bold"/>
-                <a:ea typeface="TT Lakes Neue Expanded Bold"/>
-                <a:cs typeface="TT Lakes Neue Expanded Bold"/>
-                <a:sym typeface="TT Lakes Neue Expanded Bold"/>
-              </a:rPr>
-              <a:t>METODOLOGIA DI IMPACT ANALYSIS</a:t>
-            </a:r>
-          </a:p>
-          <a:p>
-            <a:pPr algn="ctr">
-              <a:lnSpc>
-                <a:spcPts val="4978"/>
-              </a:lnSpc>
-            </a:pPr>
-          </a:p>
-        </p:txBody>
-      </p:sp>
-      <p:sp>
-        <p:nvSpPr>
-          <p:cNvPr name="TextBox 20" id="20"/>
-          <p:cNvSpPr txBox="true"/>
-          <p:nvPr/>
-        </p:nvSpPr>
-        <p:spPr>
-          <a:xfrm rot="0">
-            <a:off x="398944" y="4186237"/>
-            <a:ext cx="4348950" cy="2380103"/>
-          </a:xfrm>
-          <a:prstGeom prst="rect">
-            <a:avLst/>
-          </a:prstGeom>
-        </p:spPr>
-        <p:txBody>
-          <a:bodyPr anchor="t" rtlCol="false" tIns="0" lIns="0" bIns="0" rIns="0">
-            <a:spAutoFit/>
-          </a:bodyPr>
-          <a:lstStyle/>
-          <a:p>
-            <a:pPr algn="l">
-              <a:lnSpc>
-                <a:spcPts val="3086"/>
-              </a:lnSpc>
-              <a:spcBef>
-                <a:spcPct val="0"/>
-              </a:spcBef>
-            </a:pPr>
-            <a:r>
-              <a:rPr lang="en-US" sz="2939" spc="99">
-                <a:solidFill>
-                  <a:srgbClr val="FFFFFF"/>
-                </a:solidFill>
-                <a:latin typeface="Poppins"/>
-                <a:ea typeface="Poppins"/>
-                <a:cs typeface="Poppins"/>
-                <a:sym typeface="Poppins"/>
-              </a:rPr>
-              <a:t>Insieme delle componenti direttamente (o inizialmente) coinvolte dalla Change Request.</a:t>
-            </a:r>
-          </a:p>
-        </p:txBody>
-      </p:sp>
-      <p:sp>
-        <p:nvSpPr>
-          <p:cNvPr name="TextBox 21" id="21"/>
-          <p:cNvSpPr txBox="true"/>
-          <p:nvPr/>
-        </p:nvSpPr>
-        <p:spPr>
-          <a:xfrm rot="0">
-            <a:off x="752151" y="3123014"/>
-            <a:ext cx="3038854" cy="416048"/>
-          </a:xfrm>
-          <a:prstGeom prst="rect">
-            <a:avLst/>
-          </a:prstGeom>
-        </p:spPr>
-        <p:txBody>
-          <a:bodyPr anchor="t" rtlCol="false" tIns="0" lIns="0" bIns="0" rIns="0">
-            <a:spAutoFit/>
-          </a:bodyPr>
-          <a:lstStyle/>
-          <a:p>
-            <a:pPr algn="just">
-              <a:lnSpc>
-                <a:spcPts val="2981"/>
-              </a:lnSpc>
-              <a:spcBef>
-                <a:spcPct val="0"/>
-              </a:spcBef>
-            </a:pPr>
-            <a:r>
-              <a:rPr lang="en-US" b="true" sz="2839" spc="96">
-                <a:solidFill>
-                  <a:srgbClr val="FFFFFF"/>
-                </a:solidFill>
-                <a:latin typeface="Poppins Bold"/>
-                <a:ea typeface="Poppins Bold"/>
-                <a:cs typeface="Poppins Bold"/>
-                <a:sym typeface="Poppins Bold"/>
-              </a:rPr>
-              <a:t>             SIS</a:t>
-            </a:r>
-          </a:p>
-        </p:txBody>
-      </p:sp>
-      <p:sp>
-        <p:nvSpPr>
-          <p:cNvPr name="TextBox 22" id="22"/>
-          <p:cNvSpPr txBox="true"/>
-          <p:nvPr/>
-        </p:nvSpPr>
-        <p:spPr>
-          <a:xfrm rot="0">
-            <a:off x="4580905" y="4186237"/>
-            <a:ext cx="4563095" cy="1989578"/>
-          </a:xfrm>
-          <a:prstGeom prst="rect">
-            <a:avLst/>
-          </a:prstGeom>
-        </p:spPr>
-        <p:txBody>
-          <a:bodyPr anchor="t" rtlCol="false" tIns="0" lIns="0" bIns="0" rIns="0">
-            <a:spAutoFit/>
-          </a:bodyPr>
-          <a:lstStyle/>
-          <a:p>
-            <a:pPr algn="l">
-              <a:lnSpc>
-                <a:spcPts val="3086"/>
-              </a:lnSpc>
-              <a:spcBef>
-                <a:spcPct val="0"/>
-              </a:spcBef>
-            </a:pPr>
-            <a:r>
-              <a:rPr lang="en-US" sz="2939" spc="99">
-                <a:solidFill>
-                  <a:srgbClr val="FFFFFF"/>
-                </a:solidFill>
-                <a:latin typeface="Poppins"/>
-                <a:ea typeface="Poppins"/>
-                <a:cs typeface="Poppins"/>
-                <a:sym typeface="Poppins"/>
-              </a:rPr>
-              <a:t>Insieme delle componenti potenzialmente colpite a livello indiretto.</a:t>
-            </a:r>
-          </a:p>
-        </p:txBody>
-      </p:sp>
-      <p:sp>
-        <p:nvSpPr>
-          <p:cNvPr name="TextBox 23" id="23"/>
-          <p:cNvSpPr txBox="true"/>
-          <p:nvPr/>
-        </p:nvSpPr>
-        <p:spPr>
-          <a:xfrm rot="0">
-            <a:off x="4921625" y="3123014"/>
-            <a:ext cx="3038854" cy="416048"/>
-          </a:xfrm>
-          <a:prstGeom prst="rect">
-            <a:avLst/>
-          </a:prstGeom>
-        </p:spPr>
-        <p:txBody>
-          <a:bodyPr anchor="t" rtlCol="false" tIns="0" lIns="0" bIns="0" rIns="0">
-            <a:spAutoFit/>
-          </a:bodyPr>
-          <a:lstStyle/>
-          <a:p>
-            <a:pPr algn="just">
-              <a:lnSpc>
-                <a:spcPts val="2981"/>
-              </a:lnSpc>
-              <a:spcBef>
-                <a:spcPct val="0"/>
-              </a:spcBef>
-            </a:pPr>
-            <a:r>
-              <a:rPr lang="en-US" b="true" sz="2839" spc="96">
-                <a:solidFill>
-                  <a:srgbClr val="FFFFFF"/>
-                </a:solidFill>
-                <a:latin typeface="Poppins Bold"/>
-                <a:ea typeface="Poppins Bold"/>
-                <a:cs typeface="Poppins Bold"/>
-                <a:sym typeface="Poppins Bold"/>
-              </a:rPr>
-              <a:t>            CIS</a:t>
-            </a:r>
-          </a:p>
-        </p:txBody>
-      </p:sp>
-      <p:sp>
-        <p:nvSpPr>
-          <p:cNvPr name="TextBox 24" id="24"/>
-          <p:cNvSpPr txBox="true"/>
-          <p:nvPr/>
-        </p:nvSpPr>
-        <p:spPr>
-          <a:xfrm rot="0">
-            <a:off x="8729056" y="4158236"/>
-            <a:ext cx="4563095" cy="1989578"/>
-          </a:xfrm>
-          <a:prstGeom prst="rect">
-            <a:avLst/>
-          </a:prstGeom>
-        </p:spPr>
-        <p:txBody>
-          <a:bodyPr anchor="t" rtlCol="false" tIns="0" lIns="0" bIns="0" rIns="0">
-            <a:spAutoFit/>
-          </a:bodyPr>
-          <a:lstStyle/>
-          <a:p>
-            <a:pPr algn="l">
-              <a:lnSpc>
-                <a:spcPts val="3086"/>
-              </a:lnSpc>
-              <a:spcBef>
-                <a:spcPct val="0"/>
-              </a:spcBef>
-            </a:pPr>
-            <a:r>
-              <a:rPr lang="en-US" sz="2939" spc="99">
-                <a:solidFill>
-                  <a:srgbClr val="FFFFFF"/>
-                </a:solidFill>
-                <a:latin typeface="Poppins"/>
-                <a:ea typeface="Poppins"/>
-                <a:cs typeface="Poppins"/>
-                <a:sym typeface="Poppins"/>
-              </a:rPr>
-              <a:t>Insieme delle componenti realmente modificate durante l'implementazione.</a:t>
-            </a:r>
-          </a:p>
-        </p:txBody>
-      </p:sp>
-      <p:sp>
-        <p:nvSpPr>
-          <p:cNvPr name="TextBox 25" id="25"/>
-          <p:cNvSpPr txBox="true"/>
-          <p:nvPr/>
-        </p:nvSpPr>
-        <p:spPr>
-          <a:xfrm rot="0">
-            <a:off x="8993811" y="3123014"/>
-            <a:ext cx="3552803" cy="416048"/>
-          </a:xfrm>
-          <a:prstGeom prst="rect">
-            <a:avLst/>
-          </a:prstGeom>
-        </p:spPr>
-        <p:txBody>
-          <a:bodyPr anchor="t" rtlCol="false" tIns="0" lIns="0" bIns="0" rIns="0">
-            <a:spAutoFit/>
-          </a:bodyPr>
-          <a:lstStyle/>
-          <a:p>
-            <a:pPr algn="just">
-              <a:lnSpc>
-                <a:spcPts val="2981"/>
-              </a:lnSpc>
-              <a:spcBef>
-                <a:spcPct val="0"/>
-              </a:spcBef>
-            </a:pPr>
-            <a:r>
-              <a:rPr lang="en-US" b="true" sz="2839" spc="96">
-                <a:solidFill>
-                  <a:srgbClr val="FFFFFF"/>
-                </a:solidFill>
-                <a:latin typeface="Poppins Bold"/>
-                <a:ea typeface="Poppins Bold"/>
-                <a:cs typeface="Poppins Bold"/>
-                <a:sym typeface="Poppins Bold"/>
-              </a:rPr>
-              <a:t>               AIS</a:t>
-            </a:r>
-          </a:p>
-        </p:txBody>
-      </p:sp>
-      <p:sp>
-        <p:nvSpPr>
-          <p:cNvPr name="Freeform 26" id="26"/>
-          <p:cNvSpPr/>
-          <p:nvPr/>
-        </p:nvSpPr>
-        <p:spPr>
-          <a:xfrm flipH="false" flipV="true" rot="0">
-            <a:off x="13292151" y="-2989286"/>
-            <a:ext cx="5081025" cy="5978571"/>
-          </a:xfrm>
-          <a:custGeom>
-            <a:avLst/>
-            <a:gdLst/>
-            <a:ahLst/>
-            <a:cxnLst/>
-            <a:rect r="r" b="b" t="t" l="l"/>
-            <a:pathLst>
-              <a:path h="5978571" w="5081025">
-                <a:moveTo>
-                  <a:pt x="0" y="5978572"/>
-                </a:moveTo>
-                <a:lnTo>
-                  <a:pt x="5081025" y="5978572"/>
-                </a:lnTo>
-                <a:lnTo>
-                  <a:pt x="5081025" y="0"/>
-                </a:lnTo>
-                <a:lnTo>
-                  <a:pt x="0" y="0"/>
-                </a:lnTo>
-                <a:lnTo>
-                  <a:pt x="0" y="5978572"/>
-                </a:lnTo>
-                <a:close/>
-              </a:path>
-            </a:pathLst>
-          </a:custGeom>
-          <a:blipFill>
-            <a:blip r:embed="rId4"/>
-            <a:stretch>
-              <a:fillRect l="0" t="0" r="0" b="0"/>
-            </a:stretch>
-          </a:blipFill>
-        </p:spPr>
-      </p:sp>
-      <p:sp>
-        <p:nvSpPr>
-          <p:cNvPr name="Freeform 27" id="27"/>
-          <p:cNvSpPr/>
-          <p:nvPr/>
-        </p:nvSpPr>
-        <p:spPr>
-          <a:xfrm flipH="false" flipV="false" rot="0">
-            <a:off x="8676628" y="8505949"/>
-            <a:ext cx="549282" cy="549282"/>
-          </a:xfrm>
-          <a:custGeom>
-            <a:avLst/>
-            <a:gdLst/>
-            <a:ahLst/>
-            <a:cxnLst/>
-            <a:rect r="r" b="b" t="t" l="l"/>
-            <a:pathLst>
-              <a:path h="549282" w="549282">
-                <a:moveTo>
-                  <a:pt x="0" y="0"/>
-                </a:moveTo>
-                <a:lnTo>
-                  <a:pt x="549283" y="0"/>
-                </a:lnTo>
-                <a:lnTo>
-                  <a:pt x="549283" y="549282"/>
-                </a:lnTo>
-                <a:lnTo>
-                  <a:pt x="0" y="549282"/>
-                </a:lnTo>
-                <a:lnTo>
-                  <a:pt x="0" y="0"/>
-                </a:lnTo>
-                <a:close/>
-              </a:path>
-            </a:pathLst>
-          </a:custGeom>
-          <a:blipFill>
-            <a:blip r:embed="rId5">
-              <a:extLst>
-                <a:ext uri="{96DAC541-7B7A-43D3-8B79-37D633B846F1}">
-                  <asvg:svgBlip xmlns:asvg="http://schemas.microsoft.com/office/drawing/2016/SVG/main" r:embed="rId6"/>
-                </a:ext>
-              </a:extLst>
-            </a:blip>
-            <a:stretch>
-              <a:fillRect l="0" t="0" r="0" b="0"/>
-            </a:stretch>
-          </a:blipFill>
-        </p:spPr>
-      </p:sp>
-      <p:sp>
-        <p:nvSpPr>
-          <p:cNvPr name="Freeform 28" id="28"/>
-          <p:cNvSpPr/>
-          <p:nvPr/>
-        </p:nvSpPr>
-        <p:spPr>
-          <a:xfrm flipH="false" flipV="false" rot="0">
-            <a:off x="1999962" y="151465"/>
-            <a:ext cx="1235703" cy="1235703"/>
-          </a:xfrm>
-          <a:custGeom>
-            <a:avLst/>
-            <a:gdLst/>
-            <a:ahLst/>
-            <a:cxnLst/>
-            <a:rect r="r" b="b" t="t" l="l"/>
-            <a:pathLst>
-              <a:path h="1235703" w="1235703">
-                <a:moveTo>
-                  <a:pt x="0" y="0"/>
-                </a:moveTo>
-                <a:lnTo>
-                  <a:pt x="1235703" y="0"/>
-                </a:lnTo>
-                <a:lnTo>
-                  <a:pt x="1235703" y="1235703"/>
-                </a:lnTo>
-                <a:lnTo>
-                  <a:pt x="0" y="1235703"/>
-                </a:lnTo>
-                <a:lnTo>
-                  <a:pt x="0" y="0"/>
-                </a:lnTo>
-                <a:close/>
-              </a:path>
-            </a:pathLst>
-          </a:custGeom>
-          <a:blipFill>
-            <a:blip r:embed="rId7"/>
-            <a:stretch>
-              <a:fillRect l="0" t="0" r="0" b="0"/>
-            </a:stretch>
-          </a:blipFill>
-        </p:spPr>
-      </p:sp>
-      <p:sp>
-        <p:nvSpPr>
-          <p:cNvPr name="Freeform 29" id="29"/>
-          <p:cNvSpPr/>
-          <p:nvPr/>
-        </p:nvSpPr>
-        <p:spPr>
-          <a:xfrm flipH="false" flipV="false" rot="0">
-            <a:off x="358594" y="242872"/>
-            <a:ext cx="1052888" cy="1052888"/>
-          </a:xfrm>
-          <a:custGeom>
-            <a:avLst/>
-            <a:gdLst/>
-            <a:ahLst/>
-            <a:cxnLst/>
-            <a:rect r="r" b="b" t="t" l="l"/>
-            <a:pathLst>
-              <a:path h="1052888" w="1052888">
-                <a:moveTo>
-                  <a:pt x="0" y="0"/>
-                </a:moveTo>
-                <a:lnTo>
-                  <a:pt x="1052888" y="0"/>
-                </a:lnTo>
-                <a:lnTo>
-                  <a:pt x="1052888" y="1052888"/>
-                </a:lnTo>
-                <a:lnTo>
-                  <a:pt x="0" y="1052888"/>
-                </a:lnTo>
-                <a:lnTo>
-                  <a:pt x="0" y="0"/>
-                </a:lnTo>
-                <a:close/>
-              </a:path>
-            </a:pathLst>
-          </a:custGeom>
-          <a:blipFill>
-            <a:blip r:embed="rId8"/>
-            <a:stretch>
-              <a:fillRect l="0" t="0" r="0" b="0"/>
-            </a:stretch>
-          </a:blipFill>
-        </p:spPr>
-      </p:sp>
-      <p:sp>
-        <p:nvSpPr>
-          <p:cNvPr name="TextBox 30" id="30"/>
-          <p:cNvSpPr txBox="true"/>
-          <p:nvPr/>
-        </p:nvSpPr>
-        <p:spPr>
-          <a:xfrm rot="0">
-            <a:off x="3554761" y="1861670"/>
-            <a:ext cx="10986110" cy="623693"/>
-          </a:xfrm>
-          <a:prstGeom prst="rect">
-            <a:avLst/>
-          </a:prstGeom>
-        </p:spPr>
-        <p:txBody>
-          <a:bodyPr anchor="t" rtlCol="false" tIns="0" lIns="0" bIns="0" rIns="0">
-            <a:spAutoFit/>
-          </a:bodyPr>
-          <a:lstStyle/>
-          <a:p>
-            <a:pPr algn="l">
-              <a:lnSpc>
-                <a:spcPts val="2351"/>
-              </a:lnSpc>
-              <a:spcBef>
-                <a:spcPct val="0"/>
-              </a:spcBef>
-            </a:pPr>
-            <a:r>
-              <a:rPr lang="en-US" sz="2239" spc="76">
-                <a:solidFill>
-                  <a:srgbClr val="FFFFFF"/>
-                </a:solidFill>
-                <a:latin typeface="Poppins"/>
-                <a:ea typeface="Poppins"/>
-                <a:cs typeface="Poppins"/>
-                <a:sym typeface="Poppins"/>
-              </a:rPr>
-              <a:t>Prima di modificare il codice, abbiamo effettuato un'analisi statica e costruito Call Graph e Matrici di raggiungibilità.</a:t>
-            </a:r>
-          </a:p>
-        </p:txBody>
-      </p:sp>
       <p:grpSp>
         <p:nvGrpSpPr>
-          <p:cNvPr name="Group 31" id="31"/>
+          <p:cNvPr name="Group 18" id="18"/>
           <p:cNvGrpSpPr/>
           <p:nvPr/>
         </p:nvGrpSpPr>
         <p:grpSpPr>
           <a:xfrm rot="0">
-            <a:off x="13192277" y="2952088"/>
+            <a:off x="8668965" y="2989286"/>
             <a:ext cx="4199461" cy="748374"/>
             <a:chOff x="0" y="0"/>
             <a:chExt cx="1106031" cy="197103"/>
@@ -22046,7 +19710,7 @@
         </p:grpSpPr>
         <p:sp>
           <p:nvSpPr>
-            <p:cNvPr name="Freeform 32" id="32"/>
+            <p:cNvPr name="Freeform 19" id="19"/>
             <p:cNvSpPr/>
             <p:nvPr/>
           </p:nvSpPr>
@@ -22133,7 +19797,7 @@
         </p:sp>
         <p:sp>
           <p:nvSpPr>
-            <p:cNvPr name="TextBox 33" id="33"/>
+            <p:cNvPr name="TextBox 20" id="20"/>
             <p:cNvSpPr txBox="true"/>
             <p:nvPr/>
           </p:nvSpPr>
@@ -22161,7 +19825,671 @@
       </p:grpSp>
       <p:sp>
         <p:nvSpPr>
-          <p:cNvPr name="TextBox 34" id="34"/>
+          <p:cNvPr name="TextBox 21" id="21"/>
+          <p:cNvSpPr txBox="true"/>
+          <p:nvPr/>
+        </p:nvSpPr>
+        <p:spPr>
+          <a:xfrm rot="0">
+            <a:off x="8245241" y="9751450"/>
+            <a:ext cx="1684932" cy="233169"/>
+          </a:xfrm>
+          <a:prstGeom prst="rect">
+            <a:avLst/>
+          </a:prstGeom>
+        </p:spPr>
+        <p:txBody>
+          <a:bodyPr anchor="t" rtlCol="false" tIns="0" lIns="0" bIns="0" rIns="0">
+            <a:spAutoFit/>
+          </a:bodyPr>
+          <a:lstStyle/>
+          <a:p>
+            <a:pPr algn="ctr">
+              <a:lnSpc>
+                <a:spcPts val="1826"/>
+              </a:lnSpc>
+            </a:pPr>
+            <a:r>
+              <a:rPr lang="en-US" b="true" sz="1739">
+                <a:solidFill>
+                  <a:srgbClr val="FFFFFF"/>
+                </a:solidFill>
+                <a:latin typeface="TT Lakes Neue Expanded Bold"/>
+                <a:ea typeface="TT Lakes Neue Expanded Bold"/>
+                <a:cs typeface="TT Lakes Neue Expanded Bold"/>
+                <a:sym typeface="TT Lakes Neue Expanded Bold"/>
+              </a:rPr>
+              <a:t>PAGE 5</a:t>
+            </a:r>
+          </a:p>
+        </p:txBody>
+      </p:sp>
+      <p:sp>
+        <p:nvSpPr>
+          <p:cNvPr name="TextBox 22" id="22"/>
+          <p:cNvSpPr txBox="true"/>
+          <p:nvPr/>
+        </p:nvSpPr>
+        <p:spPr>
+          <a:xfrm rot="0">
+            <a:off x="3554761" y="259150"/>
+            <a:ext cx="10793017" cy="1909603"/>
+          </a:xfrm>
+          <a:prstGeom prst="rect">
+            <a:avLst/>
+          </a:prstGeom>
+        </p:spPr>
+        <p:txBody>
+          <a:bodyPr anchor="t" rtlCol="false" tIns="0" lIns="0" bIns="0" rIns="0">
+            <a:spAutoFit/>
+          </a:bodyPr>
+          <a:lstStyle/>
+          <a:p>
+            <a:pPr algn="ctr">
+              <a:lnSpc>
+                <a:spcPts val="4978"/>
+              </a:lnSpc>
+            </a:pPr>
+            <a:r>
+              <a:rPr lang="en-US" b="true" sz="4741">
+                <a:solidFill>
+                  <a:srgbClr val="FFFFFF"/>
+                </a:solidFill>
+                <a:latin typeface="TT Lakes Neue Expanded Bold"/>
+                <a:ea typeface="TT Lakes Neue Expanded Bold"/>
+                <a:cs typeface="TT Lakes Neue Expanded Bold"/>
+                <a:sym typeface="TT Lakes Neue Expanded Bold"/>
+              </a:rPr>
+              <a:t>METODOLOGIA DI IMPACT ANALYSIS</a:t>
+            </a:r>
+          </a:p>
+          <a:p>
+            <a:pPr algn="ctr">
+              <a:lnSpc>
+                <a:spcPts val="4978"/>
+              </a:lnSpc>
+            </a:pPr>
+          </a:p>
+        </p:txBody>
+      </p:sp>
+      <p:sp>
+        <p:nvSpPr>
+          <p:cNvPr name="TextBox 23" id="23"/>
+          <p:cNvSpPr txBox="true"/>
+          <p:nvPr/>
+        </p:nvSpPr>
+        <p:spPr>
+          <a:xfrm rot="0">
+            <a:off x="398944" y="4186237"/>
+            <a:ext cx="4348950" cy="2380103"/>
+          </a:xfrm>
+          <a:prstGeom prst="rect">
+            <a:avLst/>
+          </a:prstGeom>
+        </p:spPr>
+        <p:txBody>
+          <a:bodyPr anchor="t" rtlCol="false" tIns="0" lIns="0" bIns="0" rIns="0">
+            <a:spAutoFit/>
+          </a:bodyPr>
+          <a:lstStyle/>
+          <a:p>
+            <a:pPr algn="l">
+              <a:lnSpc>
+                <a:spcPts val="3086"/>
+              </a:lnSpc>
+              <a:spcBef>
+                <a:spcPct val="0"/>
+              </a:spcBef>
+            </a:pPr>
+            <a:r>
+              <a:rPr lang="en-US" sz="2939" spc="99">
+                <a:solidFill>
+                  <a:srgbClr val="FFFFFF"/>
+                </a:solidFill>
+                <a:latin typeface="Poppins"/>
+                <a:ea typeface="Poppins"/>
+                <a:cs typeface="Poppins"/>
+                <a:sym typeface="Poppins"/>
+              </a:rPr>
+              <a:t>Insieme delle componenti direttamente (o inizialmente) coinvolte dalla Change Request.</a:t>
+            </a:r>
+          </a:p>
+        </p:txBody>
+      </p:sp>
+      <p:sp>
+        <p:nvSpPr>
+          <p:cNvPr name="TextBox 24" id="24"/>
+          <p:cNvSpPr txBox="true"/>
+          <p:nvPr/>
+        </p:nvSpPr>
+        <p:spPr>
+          <a:xfrm rot="0">
+            <a:off x="752151" y="3123014"/>
+            <a:ext cx="3038854" cy="416048"/>
+          </a:xfrm>
+          <a:prstGeom prst="rect">
+            <a:avLst/>
+          </a:prstGeom>
+        </p:spPr>
+        <p:txBody>
+          <a:bodyPr anchor="t" rtlCol="false" tIns="0" lIns="0" bIns="0" rIns="0">
+            <a:spAutoFit/>
+          </a:bodyPr>
+          <a:lstStyle/>
+          <a:p>
+            <a:pPr algn="just">
+              <a:lnSpc>
+                <a:spcPts val="2981"/>
+              </a:lnSpc>
+              <a:spcBef>
+                <a:spcPct val="0"/>
+              </a:spcBef>
+            </a:pPr>
+            <a:r>
+              <a:rPr lang="en-US" b="true" sz="2839" spc="96">
+                <a:solidFill>
+                  <a:srgbClr val="FFFFFF"/>
+                </a:solidFill>
+                <a:latin typeface="Poppins Bold"/>
+                <a:ea typeface="Poppins Bold"/>
+                <a:cs typeface="Poppins Bold"/>
+                <a:sym typeface="Poppins Bold"/>
+              </a:rPr>
+              <a:t>             SIS</a:t>
+            </a:r>
+          </a:p>
+        </p:txBody>
+      </p:sp>
+      <p:sp>
+        <p:nvSpPr>
+          <p:cNvPr name="TextBox 25" id="25"/>
+          <p:cNvSpPr txBox="true"/>
+          <p:nvPr/>
+        </p:nvSpPr>
+        <p:spPr>
+          <a:xfrm rot="0">
+            <a:off x="4580905" y="4186237"/>
+            <a:ext cx="4563095" cy="1989578"/>
+          </a:xfrm>
+          <a:prstGeom prst="rect">
+            <a:avLst/>
+          </a:prstGeom>
+        </p:spPr>
+        <p:txBody>
+          <a:bodyPr anchor="t" rtlCol="false" tIns="0" lIns="0" bIns="0" rIns="0">
+            <a:spAutoFit/>
+          </a:bodyPr>
+          <a:lstStyle/>
+          <a:p>
+            <a:pPr algn="l">
+              <a:lnSpc>
+                <a:spcPts val="3086"/>
+              </a:lnSpc>
+              <a:spcBef>
+                <a:spcPct val="0"/>
+              </a:spcBef>
+            </a:pPr>
+            <a:r>
+              <a:rPr lang="en-US" sz="2939" spc="99">
+                <a:solidFill>
+                  <a:srgbClr val="FFFFFF"/>
+                </a:solidFill>
+                <a:latin typeface="Poppins"/>
+                <a:ea typeface="Poppins"/>
+                <a:cs typeface="Poppins"/>
+                <a:sym typeface="Poppins"/>
+              </a:rPr>
+              <a:t>Insieme delle componenti potenzialmente colpite a livello indiretto.</a:t>
+            </a:r>
+          </a:p>
+        </p:txBody>
+      </p:sp>
+      <p:sp>
+        <p:nvSpPr>
+          <p:cNvPr name="TextBox 26" id="26"/>
+          <p:cNvSpPr txBox="true"/>
+          <p:nvPr/>
+        </p:nvSpPr>
+        <p:spPr>
+          <a:xfrm rot="0">
+            <a:off x="4921625" y="3123014"/>
+            <a:ext cx="3038854" cy="416048"/>
+          </a:xfrm>
+          <a:prstGeom prst="rect">
+            <a:avLst/>
+          </a:prstGeom>
+        </p:spPr>
+        <p:txBody>
+          <a:bodyPr anchor="t" rtlCol="false" tIns="0" lIns="0" bIns="0" rIns="0">
+            <a:spAutoFit/>
+          </a:bodyPr>
+          <a:lstStyle/>
+          <a:p>
+            <a:pPr algn="just">
+              <a:lnSpc>
+                <a:spcPts val="2981"/>
+              </a:lnSpc>
+              <a:spcBef>
+                <a:spcPct val="0"/>
+              </a:spcBef>
+            </a:pPr>
+            <a:r>
+              <a:rPr lang="en-US" b="true" sz="2839" spc="96">
+                <a:solidFill>
+                  <a:srgbClr val="FFFFFF"/>
+                </a:solidFill>
+                <a:latin typeface="Poppins Bold"/>
+                <a:ea typeface="Poppins Bold"/>
+                <a:cs typeface="Poppins Bold"/>
+                <a:sym typeface="Poppins Bold"/>
+              </a:rPr>
+              <a:t>            CIS</a:t>
+            </a:r>
+          </a:p>
+        </p:txBody>
+      </p:sp>
+      <p:sp>
+        <p:nvSpPr>
+          <p:cNvPr name="TextBox 27" id="27"/>
+          <p:cNvSpPr txBox="true"/>
+          <p:nvPr/>
+        </p:nvSpPr>
+        <p:spPr>
+          <a:xfrm rot="0">
+            <a:off x="8729056" y="4158236"/>
+            <a:ext cx="4563095" cy="1989578"/>
+          </a:xfrm>
+          <a:prstGeom prst="rect">
+            <a:avLst/>
+          </a:prstGeom>
+        </p:spPr>
+        <p:txBody>
+          <a:bodyPr anchor="t" rtlCol="false" tIns="0" lIns="0" bIns="0" rIns="0">
+            <a:spAutoFit/>
+          </a:bodyPr>
+          <a:lstStyle/>
+          <a:p>
+            <a:pPr algn="l">
+              <a:lnSpc>
+                <a:spcPts val="3086"/>
+              </a:lnSpc>
+              <a:spcBef>
+                <a:spcPct val="0"/>
+              </a:spcBef>
+            </a:pPr>
+            <a:r>
+              <a:rPr lang="en-US" sz="2939" spc="99">
+                <a:solidFill>
+                  <a:srgbClr val="FFFFFF"/>
+                </a:solidFill>
+                <a:latin typeface="Poppins"/>
+                <a:ea typeface="Poppins"/>
+                <a:cs typeface="Poppins"/>
+                <a:sym typeface="Poppins"/>
+              </a:rPr>
+              <a:t>Insieme delle componenti realmente modificate durante l'implementazione.</a:t>
+            </a:r>
+          </a:p>
+        </p:txBody>
+      </p:sp>
+      <p:sp>
+        <p:nvSpPr>
+          <p:cNvPr name="TextBox 28" id="28"/>
+          <p:cNvSpPr txBox="true"/>
+          <p:nvPr/>
+        </p:nvSpPr>
+        <p:spPr>
+          <a:xfrm rot="0">
+            <a:off x="8993811" y="3123014"/>
+            <a:ext cx="3552803" cy="416048"/>
+          </a:xfrm>
+          <a:prstGeom prst="rect">
+            <a:avLst/>
+          </a:prstGeom>
+        </p:spPr>
+        <p:txBody>
+          <a:bodyPr anchor="t" rtlCol="false" tIns="0" lIns="0" bIns="0" rIns="0">
+            <a:spAutoFit/>
+          </a:bodyPr>
+          <a:lstStyle/>
+          <a:p>
+            <a:pPr algn="just">
+              <a:lnSpc>
+                <a:spcPts val="2981"/>
+              </a:lnSpc>
+              <a:spcBef>
+                <a:spcPct val="0"/>
+              </a:spcBef>
+            </a:pPr>
+            <a:r>
+              <a:rPr lang="en-US" b="true" sz="2839" spc="96">
+                <a:solidFill>
+                  <a:srgbClr val="FFFFFF"/>
+                </a:solidFill>
+                <a:latin typeface="Poppins Bold"/>
+                <a:ea typeface="Poppins Bold"/>
+                <a:cs typeface="Poppins Bold"/>
+                <a:sym typeface="Poppins Bold"/>
+              </a:rPr>
+              <a:t>               AIS</a:t>
+            </a:r>
+          </a:p>
+        </p:txBody>
+      </p:sp>
+      <p:sp>
+        <p:nvSpPr>
+          <p:cNvPr name="Freeform 29" id="29"/>
+          <p:cNvSpPr/>
+          <p:nvPr/>
+        </p:nvSpPr>
+        <p:spPr>
+          <a:xfrm flipH="false" flipV="true" rot="0">
+            <a:off x="13292151" y="-2989286"/>
+            <a:ext cx="5081025" cy="5978571"/>
+          </a:xfrm>
+          <a:custGeom>
+            <a:avLst/>
+            <a:gdLst/>
+            <a:ahLst/>
+            <a:cxnLst/>
+            <a:rect r="r" b="b" t="t" l="l"/>
+            <a:pathLst>
+              <a:path h="5978571" w="5081025">
+                <a:moveTo>
+                  <a:pt x="0" y="5978572"/>
+                </a:moveTo>
+                <a:lnTo>
+                  <a:pt x="5081025" y="5978572"/>
+                </a:lnTo>
+                <a:lnTo>
+                  <a:pt x="5081025" y="0"/>
+                </a:lnTo>
+                <a:lnTo>
+                  <a:pt x="0" y="0"/>
+                </a:lnTo>
+                <a:lnTo>
+                  <a:pt x="0" y="5978572"/>
+                </a:lnTo>
+                <a:close/>
+              </a:path>
+            </a:pathLst>
+          </a:custGeom>
+          <a:blipFill>
+            <a:blip r:embed="rId4"/>
+            <a:stretch>
+              <a:fillRect l="0" t="0" r="0" b="0"/>
+            </a:stretch>
+          </a:blipFill>
+        </p:spPr>
+      </p:sp>
+      <p:sp>
+        <p:nvSpPr>
+          <p:cNvPr name="Freeform 30" id="30"/>
+          <p:cNvSpPr/>
+          <p:nvPr/>
+        </p:nvSpPr>
+        <p:spPr>
+          <a:xfrm flipH="false" flipV="false" rot="0">
+            <a:off x="1999962" y="151465"/>
+            <a:ext cx="1235703" cy="1235703"/>
+          </a:xfrm>
+          <a:custGeom>
+            <a:avLst/>
+            <a:gdLst/>
+            <a:ahLst/>
+            <a:cxnLst/>
+            <a:rect r="r" b="b" t="t" l="l"/>
+            <a:pathLst>
+              <a:path h="1235703" w="1235703">
+                <a:moveTo>
+                  <a:pt x="0" y="0"/>
+                </a:moveTo>
+                <a:lnTo>
+                  <a:pt x="1235703" y="0"/>
+                </a:lnTo>
+                <a:lnTo>
+                  <a:pt x="1235703" y="1235703"/>
+                </a:lnTo>
+                <a:lnTo>
+                  <a:pt x="0" y="1235703"/>
+                </a:lnTo>
+                <a:lnTo>
+                  <a:pt x="0" y="0"/>
+                </a:lnTo>
+                <a:close/>
+              </a:path>
+            </a:pathLst>
+          </a:custGeom>
+          <a:blipFill>
+            <a:blip r:embed="rId5"/>
+            <a:stretch>
+              <a:fillRect l="0" t="0" r="0" b="0"/>
+            </a:stretch>
+          </a:blipFill>
+        </p:spPr>
+      </p:sp>
+      <p:sp>
+        <p:nvSpPr>
+          <p:cNvPr name="Freeform 31" id="31"/>
+          <p:cNvSpPr/>
+          <p:nvPr/>
+        </p:nvSpPr>
+        <p:spPr>
+          <a:xfrm flipH="false" flipV="false" rot="0">
+            <a:off x="358594" y="242872"/>
+            <a:ext cx="1052888" cy="1052888"/>
+          </a:xfrm>
+          <a:custGeom>
+            <a:avLst/>
+            <a:gdLst/>
+            <a:ahLst/>
+            <a:cxnLst/>
+            <a:rect r="r" b="b" t="t" l="l"/>
+            <a:pathLst>
+              <a:path h="1052888" w="1052888">
+                <a:moveTo>
+                  <a:pt x="0" y="0"/>
+                </a:moveTo>
+                <a:lnTo>
+                  <a:pt x="1052888" y="0"/>
+                </a:lnTo>
+                <a:lnTo>
+                  <a:pt x="1052888" y="1052888"/>
+                </a:lnTo>
+                <a:lnTo>
+                  <a:pt x="0" y="1052888"/>
+                </a:lnTo>
+                <a:lnTo>
+                  <a:pt x="0" y="0"/>
+                </a:lnTo>
+                <a:close/>
+              </a:path>
+            </a:pathLst>
+          </a:custGeom>
+          <a:blipFill>
+            <a:blip r:embed="rId6"/>
+            <a:stretch>
+              <a:fillRect l="0" t="0" r="0" b="0"/>
+            </a:stretch>
+          </a:blipFill>
+        </p:spPr>
+      </p:sp>
+      <p:sp>
+        <p:nvSpPr>
+          <p:cNvPr name="TextBox 32" id="32"/>
+          <p:cNvSpPr txBox="true"/>
+          <p:nvPr/>
+        </p:nvSpPr>
+        <p:spPr>
+          <a:xfrm rot="0">
+            <a:off x="3554761" y="1861670"/>
+            <a:ext cx="10986110" cy="623693"/>
+          </a:xfrm>
+          <a:prstGeom prst="rect">
+            <a:avLst/>
+          </a:prstGeom>
+        </p:spPr>
+        <p:txBody>
+          <a:bodyPr anchor="t" rtlCol="false" tIns="0" lIns="0" bIns="0" rIns="0">
+            <a:spAutoFit/>
+          </a:bodyPr>
+          <a:lstStyle/>
+          <a:p>
+            <a:pPr algn="l">
+              <a:lnSpc>
+                <a:spcPts val="2351"/>
+              </a:lnSpc>
+              <a:spcBef>
+                <a:spcPct val="0"/>
+              </a:spcBef>
+            </a:pPr>
+            <a:r>
+              <a:rPr lang="en-US" sz="2239" spc="76">
+                <a:solidFill>
+                  <a:srgbClr val="FFFFFF"/>
+                </a:solidFill>
+                <a:latin typeface="Poppins"/>
+                <a:ea typeface="Poppins"/>
+                <a:cs typeface="Poppins"/>
+                <a:sym typeface="Poppins"/>
+              </a:rPr>
+              <a:t>Prima di modificare il codice, abbiamo effettuato un'analisi statica e costruito Call Graph e Matrici di raggiungibilità.</a:t>
+            </a:r>
+          </a:p>
+        </p:txBody>
+      </p:sp>
+      <p:grpSp>
+        <p:nvGrpSpPr>
+          <p:cNvPr name="Group 33" id="33"/>
+          <p:cNvGrpSpPr/>
+          <p:nvPr/>
+        </p:nvGrpSpPr>
+        <p:grpSpPr>
+          <a:xfrm rot="0">
+            <a:off x="13192277" y="2952088"/>
+            <a:ext cx="4199461" cy="748374"/>
+            <a:chOff x="0" y="0"/>
+            <a:chExt cx="1106031" cy="197103"/>
+          </a:xfrm>
+        </p:grpSpPr>
+        <p:sp>
+          <p:nvSpPr>
+            <p:cNvPr name="Freeform 34" id="34"/>
+            <p:cNvSpPr/>
+            <p:nvPr/>
+          </p:nvSpPr>
+          <p:spPr>
+            <a:xfrm flipH="false" flipV="false" rot="0">
+              <a:off x="0" y="0"/>
+              <a:ext cx="1106031" cy="197103"/>
+            </a:xfrm>
+            <a:custGeom>
+              <a:avLst/>
+              <a:gdLst/>
+              <a:ahLst/>
+              <a:cxnLst/>
+              <a:rect r="r" b="b" t="t" l="l"/>
+              <a:pathLst>
+                <a:path h="197103" w="1106031">
+                  <a:moveTo>
+                    <a:pt x="46089" y="0"/>
+                  </a:moveTo>
+                  <a:lnTo>
+                    <a:pt x="1059942" y="0"/>
+                  </a:lnTo>
+                  <a:cubicBezTo>
+                    <a:pt x="1085396" y="0"/>
+                    <a:pt x="1106031" y="20635"/>
+                    <a:pt x="1106031" y="46089"/>
+                  </a:cubicBezTo>
+                  <a:lnTo>
+                    <a:pt x="1106031" y="151014"/>
+                  </a:lnTo>
+                  <a:cubicBezTo>
+                    <a:pt x="1106031" y="176468"/>
+                    <a:pt x="1085396" y="197103"/>
+                    <a:pt x="1059942" y="197103"/>
+                  </a:cubicBezTo>
+                  <a:lnTo>
+                    <a:pt x="46089" y="197103"/>
+                  </a:lnTo>
+                  <a:cubicBezTo>
+                    <a:pt x="20635" y="197103"/>
+                    <a:pt x="0" y="176468"/>
+                    <a:pt x="0" y="151014"/>
+                  </a:cubicBezTo>
+                  <a:lnTo>
+                    <a:pt x="0" y="46089"/>
+                  </a:lnTo>
+                  <a:cubicBezTo>
+                    <a:pt x="0" y="20635"/>
+                    <a:pt x="20635" y="0"/>
+                    <a:pt x="46089" y="0"/>
+                  </a:cubicBezTo>
+                  <a:close/>
+                </a:path>
+              </a:pathLst>
+            </a:custGeom>
+            <a:gradFill rotWithShape="true">
+              <a:gsLst>
+                <a:gs pos="0">
+                  <a:srgbClr val="0097B2">
+                    <a:alpha val="100000"/>
+                  </a:srgbClr>
+                </a:gs>
+                <a:gs pos="50000">
+                  <a:srgbClr val="3A6A9E">
+                    <a:alpha val="100000"/>
+                  </a:srgbClr>
+                </a:gs>
+                <a:gs pos="100000">
+                  <a:srgbClr val="103863">
+                    <a:alpha val="100000"/>
+                  </a:srgbClr>
+                </a:gs>
+              </a:gsLst>
+              <a:lin ang="0"/>
+            </a:gradFill>
+            <a:ln w="19050" cap="rnd">
+              <a:solidFill>
+                <a:srgbClr val="000000"/>
+              </a:solidFill>
+              <a:prstDash val="solid"/>
+              <a:round/>
+            </a:ln>
+          </p:spPr>
+        </p:sp>
+        <p:sp>
+          <p:nvSpPr>
+            <p:cNvPr name="TextBox 35" id="35"/>
+            <p:cNvSpPr txBox="true"/>
+            <p:nvPr/>
+          </p:nvSpPr>
+          <p:spPr>
+            <a:xfrm>
+              <a:off x="0" y="28575"/>
+              <a:ext cx="1106031" cy="168528"/>
+            </a:xfrm>
+            <a:prstGeom prst="rect">
+              <a:avLst/>
+            </a:prstGeom>
+          </p:spPr>
+          <p:txBody>
+            <a:bodyPr anchor="ctr" rtlCol="false" tIns="50800" lIns="50800" bIns="50800" rIns="50800"/>
+            <a:lstStyle/>
+            <a:p>
+              <a:pPr algn="ctr">
+                <a:lnSpc>
+                  <a:spcPts val="1826"/>
+                </a:lnSpc>
+              </a:pPr>
+            </a:p>
+          </p:txBody>
+        </p:sp>
+      </p:grpSp>
+      <p:sp>
+        <p:nvSpPr>
+          <p:cNvPr name="TextBox 36" id="36"/>
           <p:cNvSpPr txBox="true"/>
           <p:nvPr/>
         </p:nvSpPr>
@@ -22205,7 +20533,7 @@
       </p:sp>
       <p:sp>
         <p:nvSpPr>
-          <p:cNvPr name="TextBox 35" id="35"/>
+          <p:cNvPr name="TextBox 37" id="37"/>
           <p:cNvSpPr txBox="true"/>
           <p:nvPr/>
         </p:nvSpPr>
@@ -22247,6 +20575,94 @@
           </a:p>
         </p:txBody>
       </p:sp>
+      <p:sp>
+        <p:nvSpPr>
+          <p:cNvPr name="TextBox 38" id="38"/>
+          <p:cNvSpPr txBox="true"/>
+          <p:nvPr/>
+        </p:nvSpPr>
+        <p:spPr>
+          <a:xfrm rot="0">
+            <a:off x="8557334" y="6737266"/>
+            <a:ext cx="3038854" cy="416048"/>
+          </a:xfrm>
+          <a:prstGeom prst="rect">
+            <a:avLst/>
+          </a:prstGeom>
+        </p:spPr>
+        <p:txBody>
+          <a:bodyPr anchor="t" rtlCol="false" tIns="0" lIns="0" bIns="0" rIns="0">
+            <a:spAutoFit/>
+          </a:bodyPr>
+          <a:lstStyle/>
+          <a:p>
+            <a:pPr algn="just">
+              <a:lnSpc>
+                <a:spcPts val="2981"/>
+              </a:lnSpc>
+              <a:spcBef>
+                <a:spcPct val="0"/>
+              </a:spcBef>
+            </a:pPr>
+            <a:r>
+              <a:rPr lang="en-US" b="true" sz="2839" spc="96">
+                <a:solidFill>
+                  <a:srgbClr val="FFFFFF"/>
+                </a:solidFill>
+                <a:latin typeface="Poppins Bold"/>
+                <a:ea typeface="Poppins Bold"/>
+                <a:cs typeface="Poppins Bold"/>
+                <a:sym typeface="Poppins Bold"/>
+              </a:rPr>
+              <a:t>FIPS</a:t>
+            </a:r>
+          </a:p>
+        </p:txBody>
+      </p:sp>
+      <p:sp>
+        <p:nvSpPr>
+          <p:cNvPr name="TextBox 39" id="39"/>
+          <p:cNvSpPr txBox="true"/>
+          <p:nvPr/>
+        </p:nvSpPr>
+        <p:spPr>
+          <a:xfrm rot="0">
+            <a:off x="7033093" y="7572062"/>
+            <a:ext cx="4563095" cy="1208528"/>
+          </a:xfrm>
+          <a:prstGeom prst="rect">
+            <a:avLst/>
+          </a:prstGeom>
+        </p:spPr>
+        <p:txBody>
+          <a:bodyPr anchor="t" rtlCol="false" tIns="0" lIns="0" bIns="0" rIns="0">
+            <a:spAutoFit/>
+          </a:bodyPr>
+          <a:lstStyle/>
+          <a:p>
+            <a:pPr algn="l">
+              <a:lnSpc>
+                <a:spcPts val="3086"/>
+              </a:lnSpc>
+              <a:spcBef>
+                <a:spcPct val="0"/>
+              </a:spcBef>
+            </a:pPr>
+            <a:r>
+              <a:rPr lang="en-US" sz="2939" spc="99">
+                <a:solidFill>
+                  <a:srgbClr val="FFFFFF"/>
+                </a:solidFill>
+                <a:latin typeface="Poppins"/>
+                <a:ea typeface="Poppins"/>
+                <a:cs typeface="Poppins"/>
+                <a:sym typeface="Poppins"/>
+              </a:rPr>
+              <a:t>Insieme dei falsi positivi (Elementi non modificati)</a:t>
+            </a:r>
+          </a:p>
+        </p:txBody>
+      </p:sp>
     </p:spTree>
   </p:cSld>
   <p:clrMapOvr>
@@ -22255,7 +20671,7 @@
 </p:sld>
 </file>
 
-<file path=ppt/slides/slide7.xml><?xml version="1.0" encoding="utf-8"?>
+<file path=ppt/slides/slide6.xml><?xml version="1.0" encoding="utf-8"?>
 <p:sld xmlns:p="http://schemas.openxmlformats.org/presentationml/2006/main" xmlns:a="http://schemas.openxmlformats.org/drawingml/2006/main" xmlns:r="http://schemas.openxmlformats.org/officeDocument/2006/relationships">
   <p:cSld>
     <p:bg>
@@ -22780,7 +21196,7 @@
                 <a:cs typeface="TT Lakes Neue Expanded Bold"/>
                 <a:sym typeface="TT Lakes Neue Expanded Bold"/>
               </a:rPr>
-              <a:t>PAGE 7</a:t>
+              <a:t>PAGE 6</a:t>
             </a:r>
           </a:p>
         </p:txBody>
@@ -23060,7 +21476,7 @@
 </p:sld>
 </file>
 
-<file path=ppt/slides/slide8.xml><?xml version="1.0" encoding="utf-8"?>
+<file path=ppt/slides/slide7.xml><?xml version="1.0" encoding="utf-8"?>
 <p:sld xmlns:p="http://schemas.openxmlformats.org/presentationml/2006/main" xmlns:a="http://schemas.openxmlformats.org/drawingml/2006/main" xmlns:r="http://schemas.openxmlformats.org/officeDocument/2006/relationships">
   <p:cSld>
     <p:bg>
@@ -23769,7 +22185,7 @@
                 <a:cs typeface="TT Lakes Neue Expanded Bold"/>
                 <a:sym typeface="TT Lakes Neue Expanded Bold"/>
               </a:rPr>
-              <a:t>PAGE 8</a:t>
+              <a:t>PAGE 7</a:t>
             </a:r>
           </a:p>
         </p:txBody>
@@ -24319,7 +22735,7 @@
 </p:sld>
 </file>
 
-<file path=ppt/slides/slide9.xml><?xml version="1.0" encoding="utf-8"?>
+<file path=ppt/slides/slide8.xml><?xml version="1.0" encoding="utf-8"?>
 <p:sld xmlns:p="http://schemas.openxmlformats.org/presentationml/2006/main" xmlns:a="http://schemas.openxmlformats.org/drawingml/2006/main" xmlns:r="http://schemas.openxmlformats.org/officeDocument/2006/relationships">
   <p:cSld>
     <p:bg>
@@ -25622,7 +24038,7 @@
                 <a:cs typeface="TT Lakes Neue Expanded Bold"/>
                 <a:sym typeface="TT Lakes Neue Expanded Bold"/>
               </a:rPr>
-              <a:t>PAGE 9</a:t>
+              <a:t>PAGE 8</a:t>
             </a:r>
           </a:p>
         </p:txBody>
@@ -25887,6 +24303,811 @@
             </a:r>
           </a:p>
         </p:txBody>
+      </p:sp>
+    </p:spTree>
+  </p:cSld>
+  <p:clrMapOvr>
+    <a:masterClrMapping/>
+  </p:clrMapOvr>
+</p:sld>
+</file>
+
+<file path=ppt/slides/slide9.xml><?xml version="1.0" encoding="utf-8"?>
+<p:sld xmlns:p="http://schemas.openxmlformats.org/presentationml/2006/main" xmlns:a="http://schemas.openxmlformats.org/drawingml/2006/main" xmlns:r="http://schemas.openxmlformats.org/officeDocument/2006/relationships">
+  <p:cSld>
+    <p:bg>
+      <p:bgPr>
+        <a:gradFill rotWithShape="true">
+          <a:gsLst>
+            <a:gs pos="0">
+              <a:srgbClr val="0097B2">
+                <a:alpha val="100000"/>
+              </a:srgbClr>
+            </a:gs>
+            <a:gs pos="50000">
+              <a:srgbClr val="3A6A9E">
+                <a:alpha val="100000"/>
+              </a:srgbClr>
+            </a:gs>
+            <a:gs pos="100000">
+              <a:srgbClr val="103863">
+                <a:alpha val="100000"/>
+              </a:srgbClr>
+            </a:gs>
+          </a:gsLst>
+          <a:lin ang="5400000"/>
+        </a:gradFill>
+      </p:bgPr>
+    </p:bg>
+    <p:spTree>
+      <p:nvGrpSpPr>
+        <p:cNvPr id="1" name=""/>
+        <p:cNvGrpSpPr/>
+        <p:nvPr/>
+      </p:nvGrpSpPr>
+      <p:grpSpPr>
+        <a:xfrm>
+          <a:off x="0" y="0"/>
+          <a:ext cx="0" cy="0"/>
+          <a:chOff x="0" y="0"/>
+          <a:chExt cx="0" cy="0"/>
+        </a:xfrm>
+      </p:grpSpPr>
+      <p:grpSp>
+        <p:nvGrpSpPr>
+          <p:cNvPr name="Group 2" id="2"/>
+          <p:cNvGrpSpPr/>
+          <p:nvPr/>
+        </p:nvGrpSpPr>
+        <p:grpSpPr>
+          <a:xfrm rot="0">
+            <a:off x="-365251" y="-1543050"/>
+            <a:ext cx="4199655" cy="3086100"/>
+            <a:chOff x="0" y="0"/>
+            <a:chExt cx="1106082" cy="812800"/>
+          </a:xfrm>
+        </p:grpSpPr>
+        <p:sp>
+          <p:nvSpPr>
+            <p:cNvPr name="Freeform 3" id="3"/>
+            <p:cNvSpPr/>
+            <p:nvPr/>
+          </p:nvSpPr>
+          <p:spPr>
+            <a:xfrm flipH="false" flipV="false" rot="0">
+              <a:off x="0" y="0"/>
+              <a:ext cx="1106082" cy="812800"/>
+            </a:xfrm>
+            <a:custGeom>
+              <a:avLst/>
+              <a:gdLst/>
+              <a:ahLst/>
+              <a:cxnLst/>
+              <a:rect r="r" b="b" t="t" l="l"/>
+              <a:pathLst>
+                <a:path h="812800" w="1106082">
+                  <a:moveTo>
+                    <a:pt x="46087" y="0"/>
+                  </a:moveTo>
+                  <a:lnTo>
+                    <a:pt x="1059995" y="0"/>
+                  </a:lnTo>
+                  <a:cubicBezTo>
+                    <a:pt x="1072218" y="0"/>
+                    <a:pt x="1083941" y="4856"/>
+                    <a:pt x="1092584" y="13498"/>
+                  </a:cubicBezTo>
+                  <a:cubicBezTo>
+                    <a:pt x="1101226" y="22141"/>
+                    <a:pt x="1106082" y="33864"/>
+                    <a:pt x="1106082" y="46087"/>
+                  </a:cubicBezTo>
+                  <a:lnTo>
+                    <a:pt x="1106082" y="766713"/>
+                  </a:lnTo>
+                  <a:cubicBezTo>
+                    <a:pt x="1106082" y="778936"/>
+                    <a:pt x="1101226" y="790659"/>
+                    <a:pt x="1092584" y="799302"/>
+                  </a:cubicBezTo>
+                  <a:cubicBezTo>
+                    <a:pt x="1083941" y="807944"/>
+                    <a:pt x="1072218" y="812800"/>
+                    <a:pt x="1059995" y="812800"/>
+                  </a:cubicBezTo>
+                  <a:lnTo>
+                    <a:pt x="46087" y="812800"/>
+                  </a:lnTo>
+                  <a:cubicBezTo>
+                    <a:pt x="33864" y="812800"/>
+                    <a:pt x="22141" y="807944"/>
+                    <a:pt x="13498" y="799302"/>
+                  </a:cubicBezTo>
+                  <a:cubicBezTo>
+                    <a:pt x="4856" y="790659"/>
+                    <a:pt x="0" y="778936"/>
+                    <a:pt x="0" y="766713"/>
+                  </a:cubicBezTo>
+                  <a:lnTo>
+                    <a:pt x="0" y="46087"/>
+                  </a:lnTo>
+                  <a:cubicBezTo>
+                    <a:pt x="0" y="33864"/>
+                    <a:pt x="4856" y="22141"/>
+                    <a:pt x="13498" y="13498"/>
+                  </a:cubicBezTo>
+                  <a:cubicBezTo>
+                    <a:pt x="22141" y="4856"/>
+                    <a:pt x="33864" y="0"/>
+                    <a:pt x="46087" y="0"/>
+                  </a:cubicBezTo>
+                  <a:close/>
+                </a:path>
+              </a:pathLst>
+            </a:custGeom>
+            <a:gradFill rotWithShape="true">
+              <a:gsLst>
+                <a:gs pos="0">
+                  <a:srgbClr val="0097B2">
+                    <a:alpha val="100000"/>
+                  </a:srgbClr>
+                </a:gs>
+                <a:gs pos="50000">
+                  <a:srgbClr val="3A6A9E">
+                    <a:alpha val="100000"/>
+                  </a:srgbClr>
+                </a:gs>
+                <a:gs pos="100000">
+                  <a:srgbClr val="103863">
+                    <a:alpha val="100000"/>
+                  </a:srgbClr>
+                </a:gs>
+              </a:gsLst>
+              <a:lin ang="0"/>
+            </a:gradFill>
+            <a:ln w="19050" cap="rnd">
+              <a:solidFill>
+                <a:srgbClr val="000000"/>
+              </a:solidFill>
+              <a:prstDash val="solid"/>
+              <a:round/>
+            </a:ln>
+          </p:spPr>
+        </p:sp>
+        <p:sp>
+          <p:nvSpPr>
+            <p:cNvPr name="TextBox 4" id="4"/>
+            <p:cNvSpPr txBox="true"/>
+            <p:nvPr/>
+          </p:nvSpPr>
+          <p:spPr>
+            <a:xfrm>
+              <a:off x="0" y="28575"/>
+              <a:ext cx="1106082" cy="784225"/>
+            </a:xfrm>
+            <a:prstGeom prst="rect">
+              <a:avLst/>
+            </a:prstGeom>
+          </p:spPr>
+          <p:txBody>
+            <a:bodyPr anchor="ctr" rtlCol="false" tIns="50800" lIns="50800" bIns="50800" rIns="50800"/>
+            <a:lstStyle/>
+            <a:p>
+              <a:pPr algn="ctr">
+                <a:lnSpc>
+                  <a:spcPts val="1826"/>
+                </a:lnSpc>
+              </a:pPr>
+            </a:p>
+          </p:txBody>
+        </p:sp>
+      </p:grpSp>
+      <p:sp>
+        <p:nvSpPr>
+          <p:cNvPr name="Freeform 5" id="5"/>
+          <p:cNvSpPr/>
+          <p:nvPr/>
+        </p:nvSpPr>
+        <p:spPr>
+          <a:xfrm flipH="false" flipV="false" rot="0">
+            <a:off x="5430107" y="8767636"/>
+            <a:ext cx="7315200" cy="2433967"/>
+          </a:xfrm>
+          <a:custGeom>
+            <a:avLst/>
+            <a:gdLst/>
+            <a:ahLst/>
+            <a:cxnLst/>
+            <a:rect r="r" b="b" t="t" l="l"/>
+            <a:pathLst>
+              <a:path h="2433967" w="7315200">
+                <a:moveTo>
+                  <a:pt x="0" y="0"/>
+                </a:moveTo>
+                <a:lnTo>
+                  <a:pt x="7315200" y="0"/>
+                </a:lnTo>
+                <a:lnTo>
+                  <a:pt x="7315200" y="2433966"/>
+                </a:lnTo>
+                <a:lnTo>
+                  <a:pt x="0" y="2433966"/>
+                </a:lnTo>
+                <a:lnTo>
+                  <a:pt x="0" y="0"/>
+                </a:lnTo>
+                <a:close/>
+              </a:path>
+            </a:pathLst>
+          </a:custGeom>
+          <a:blipFill>
+            <a:blip r:embed="rId2">
+              <a:extLst>
+                <a:ext uri="{96DAC541-7B7A-43D3-8B79-37D633B846F1}">
+                  <asvg:svgBlip xmlns:asvg="http://schemas.microsoft.com/office/drawing/2016/SVG/main" r:embed="rId3"/>
+                </a:ext>
+              </a:extLst>
+            </a:blip>
+            <a:stretch>
+              <a:fillRect l="0" t="0" r="0" b="0"/>
+            </a:stretch>
+          </a:blipFill>
+        </p:spPr>
+      </p:sp>
+      <p:grpSp>
+        <p:nvGrpSpPr>
+          <p:cNvPr name="Group 6" id="6"/>
+          <p:cNvGrpSpPr/>
+          <p:nvPr/>
+        </p:nvGrpSpPr>
+        <p:grpSpPr>
+          <a:xfrm rot="0">
+            <a:off x="7600950" y="9365373"/>
+            <a:ext cx="3086100" cy="3086100"/>
+            <a:chOff x="0" y="0"/>
+            <a:chExt cx="812800" cy="812800"/>
+          </a:xfrm>
+        </p:grpSpPr>
+        <p:sp>
+          <p:nvSpPr>
+            <p:cNvPr name="Freeform 7" id="7"/>
+            <p:cNvSpPr/>
+            <p:nvPr/>
+          </p:nvSpPr>
+          <p:spPr>
+            <a:xfrm flipH="false" flipV="false" rot="0">
+              <a:off x="0" y="0"/>
+              <a:ext cx="812800" cy="812800"/>
+            </a:xfrm>
+            <a:custGeom>
+              <a:avLst/>
+              <a:gdLst/>
+              <a:ahLst/>
+              <a:cxnLst/>
+              <a:rect r="r" b="b" t="t" l="l"/>
+              <a:pathLst>
+                <a:path h="812800" w="812800">
+                  <a:moveTo>
+                    <a:pt x="62716" y="0"/>
+                  </a:moveTo>
+                  <a:lnTo>
+                    <a:pt x="750084" y="0"/>
+                  </a:lnTo>
+                  <a:cubicBezTo>
+                    <a:pt x="766717" y="0"/>
+                    <a:pt x="782669" y="6608"/>
+                    <a:pt x="794431" y="18369"/>
+                  </a:cubicBezTo>
+                  <a:cubicBezTo>
+                    <a:pt x="806192" y="30131"/>
+                    <a:pt x="812800" y="46083"/>
+                    <a:pt x="812800" y="62716"/>
+                  </a:cubicBezTo>
+                  <a:lnTo>
+                    <a:pt x="812800" y="750084"/>
+                  </a:lnTo>
+                  <a:cubicBezTo>
+                    <a:pt x="812800" y="766717"/>
+                    <a:pt x="806192" y="782669"/>
+                    <a:pt x="794431" y="794431"/>
+                  </a:cubicBezTo>
+                  <a:cubicBezTo>
+                    <a:pt x="782669" y="806192"/>
+                    <a:pt x="766717" y="812800"/>
+                    <a:pt x="750084" y="812800"/>
+                  </a:cubicBezTo>
+                  <a:lnTo>
+                    <a:pt x="62716" y="812800"/>
+                  </a:lnTo>
+                  <a:cubicBezTo>
+                    <a:pt x="46083" y="812800"/>
+                    <a:pt x="30131" y="806192"/>
+                    <a:pt x="18369" y="794431"/>
+                  </a:cubicBezTo>
+                  <a:cubicBezTo>
+                    <a:pt x="6608" y="782669"/>
+                    <a:pt x="0" y="766717"/>
+                    <a:pt x="0" y="750084"/>
+                  </a:cubicBezTo>
+                  <a:lnTo>
+                    <a:pt x="0" y="62716"/>
+                  </a:lnTo>
+                  <a:cubicBezTo>
+                    <a:pt x="0" y="46083"/>
+                    <a:pt x="6608" y="30131"/>
+                    <a:pt x="18369" y="18369"/>
+                  </a:cubicBezTo>
+                  <a:cubicBezTo>
+                    <a:pt x="30131" y="6608"/>
+                    <a:pt x="46083" y="0"/>
+                    <a:pt x="62716" y="0"/>
+                  </a:cubicBezTo>
+                  <a:close/>
+                </a:path>
+              </a:pathLst>
+            </a:custGeom>
+            <a:gradFill rotWithShape="true">
+              <a:gsLst>
+                <a:gs pos="0">
+                  <a:srgbClr val="0097B2">
+                    <a:alpha val="100000"/>
+                  </a:srgbClr>
+                </a:gs>
+                <a:gs pos="50000">
+                  <a:srgbClr val="3A6A9E">
+                    <a:alpha val="100000"/>
+                  </a:srgbClr>
+                </a:gs>
+                <a:gs pos="100000">
+                  <a:srgbClr val="103863">
+                    <a:alpha val="100000"/>
+                  </a:srgbClr>
+                </a:gs>
+              </a:gsLst>
+              <a:lin ang="0"/>
+            </a:gradFill>
+            <a:ln w="19050" cap="rnd">
+              <a:solidFill>
+                <a:srgbClr val="000000"/>
+              </a:solidFill>
+              <a:prstDash val="solid"/>
+              <a:round/>
+            </a:ln>
+          </p:spPr>
+        </p:sp>
+        <p:sp>
+          <p:nvSpPr>
+            <p:cNvPr name="TextBox 8" id="8"/>
+            <p:cNvSpPr txBox="true"/>
+            <p:nvPr/>
+          </p:nvSpPr>
+          <p:spPr>
+            <a:xfrm>
+              <a:off x="0" y="28575"/>
+              <a:ext cx="812800" cy="784225"/>
+            </a:xfrm>
+            <a:prstGeom prst="rect">
+              <a:avLst/>
+            </a:prstGeom>
+          </p:spPr>
+          <p:txBody>
+            <a:bodyPr anchor="ctr" rtlCol="false" tIns="50800" lIns="50800" bIns="50800" rIns="50800"/>
+            <a:lstStyle/>
+            <a:p>
+              <a:pPr algn="ctr">
+                <a:lnSpc>
+                  <a:spcPts val="1826"/>
+                </a:lnSpc>
+              </a:pPr>
+            </a:p>
+          </p:txBody>
+        </p:sp>
+      </p:grpSp>
+      <p:sp>
+        <p:nvSpPr>
+          <p:cNvPr name="Freeform 9" id="9"/>
+          <p:cNvSpPr/>
+          <p:nvPr/>
+        </p:nvSpPr>
+        <p:spPr>
+          <a:xfrm flipH="false" flipV="true" rot="0">
+            <a:off x="14540508" y="5987408"/>
+            <a:ext cx="5081025" cy="5978571"/>
+          </a:xfrm>
+          <a:custGeom>
+            <a:avLst/>
+            <a:gdLst/>
+            <a:ahLst/>
+            <a:cxnLst/>
+            <a:rect r="r" b="b" t="t" l="l"/>
+            <a:pathLst>
+              <a:path h="5978571" w="5081025">
+                <a:moveTo>
+                  <a:pt x="0" y="5978571"/>
+                </a:moveTo>
+                <a:lnTo>
+                  <a:pt x="5081025" y="5978571"/>
+                </a:lnTo>
+                <a:lnTo>
+                  <a:pt x="5081025" y="0"/>
+                </a:lnTo>
+                <a:lnTo>
+                  <a:pt x="0" y="0"/>
+                </a:lnTo>
+                <a:lnTo>
+                  <a:pt x="0" y="5978571"/>
+                </a:lnTo>
+                <a:close/>
+              </a:path>
+            </a:pathLst>
+          </a:custGeom>
+          <a:blipFill>
+            <a:blip r:embed="rId4"/>
+            <a:stretch>
+              <a:fillRect l="0" t="0" r="0" b="0"/>
+            </a:stretch>
+          </a:blipFill>
+        </p:spPr>
+      </p:sp>
+      <p:sp>
+        <p:nvSpPr>
+          <p:cNvPr name="Freeform 10" id="10"/>
+          <p:cNvSpPr/>
+          <p:nvPr/>
+        </p:nvSpPr>
+        <p:spPr>
+          <a:xfrm flipH="false" flipV="false" rot="0">
+            <a:off x="16128881" y="1028700"/>
+            <a:ext cx="549282" cy="549282"/>
+          </a:xfrm>
+          <a:custGeom>
+            <a:avLst/>
+            <a:gdLst/>
+            <a:ahLst/>
+            <a:cxnLst/>
+            <a:rect r="r" b="b" t="t" l="l"/>
+            <a:pathLst>
+              <a:path h="549282" w="549282">
+                <a:moveTo>
+                  <a:pt x="0" y="0"/>
+                </a:moveTo>
+                <a:lnTo>
+                  <a:pt x="549282" y="0"/>
+                </a:lnTo>
+                <a:lnTo>
+                  <a:pt x="549282" y="549282"/>
+                </a:lnTo>
+                <a:lnTo>
+                  <a:pt x="0" y="549282"/>
+                </a:lnTo>
+                <a:lnTo>
+                  <a:pt x="0" y="0"/>
+                </a:lnTo>
+                <a:close/>
+              </a:path>
+            </a:pathLst>
+          </a:custGeom>
+          <a:blipFill>
+            <a:blip r:embed="rId5">
+              <a:extLst>
+                <a:ext uri="{96DAC541-7B7A-43D3-8B79-37D633B846F1}">
+                  <asvg:svgBlip xmlns:asvg="http://schemas.microsoft.com/office/drawing/2016/SVG/main" r:embed="rId6"/>
+                </a:ext>
+              </a:extLst>
+            </a:blip>
+            <a:stretch>
+              <a:fillRect l="0" t="0" r="0" b="0"/>
+            </a:stretch>
+          </a:blipFill>
+        </p:spPr>
+      </p:sp>
+      <p:sp>
+        <p:nvSpPr>
+          <p:cNvPr name="TextBox 11" id="11"/>
+          <p:cNvSpPr txBox="true"/>
+          <p:nvPr/>
+        </p:nvSpPr>
+        <p:spPr>
+          <a:xfrm rot="0">
+            <a:off x="8245241" y="9751450"/>
+            <a:ext cx="1684932" cy="233169"/>
+          </a:xfrm>
+          <a:prstGeom prst="rect">
+            <a:avLst/>
+          </a:prstGeom>
+        </p:spPr>
+        <p:txBody>
+          <a:bodyPr anchor="t" rtlCol="false" tIns="0" lIns="0" bIns="0" rIns="0">
+            <a:spAutoFit/>
+          </a:bodyPr>
+          <a:lstStyle/>
+          <a:p>
+            <a:pPr algn="ctr">
+              <a:lnSpc>
+                <a:spcPts val="1826"/>
+              </a:lnSpc>
+            </a:pPr>
+            <a:r>
+              <a:rPr lang="en-US" b="true" sz="1739">
+                <a:solidFill>
+                  <a:srgbClr val="FFFFFF"/>
+                </a:solidFill>
+                <a:latin typeface="TT Lakes Neue Expanded Bold"/>
+                <a:ea typeface="TT Lakes Neue Expanded Bold"/>
+                <a:cs typeface="TT Lakes Neue Expanded Bold"/>
+                <a:sym typeface="TT Lakes Neue Expanded Bold"/>
+              </a:rPr>
+              <a:t>PAGE 9</a:t>
+            </a:r>
+          </a:p>
+        </p:txBody>
+      </p:sp>
+      <p:sp>
+        <p:nvSpPr>
+          <p:cNvPr name="TextBox 12" id="12"/>
+          <p:cNvSpPr txBox="true"/>
+          <p:nvPr/>
+        </p:nvSpPr>
+        <p:spPr>
+          <a:xfrm rot="0">
+            <a:off x="3868899" y="783121"/>
+            <a:ext cx="10793017" cy="1909603"/>
+          </a:xfrm>
+          <a:prstGeom prst="rect">
+            <a:avLst/>
+          </a:prstGeom>
+        </p:spPr>
+        <p:txBody>
+          <a:bodyPr anchor="t" rtlCol="false" tIns="0" lIns="0" bIns="0" rIns="0">
+            <a:spAutoFit/>
+          </a:bodyPr>
+          <a:lstStyle/>
+          <a:p>
+            <a:pPr algn="ctr">
+              <a:lnSpc>
+                <a:spcPts val="4978"/>
+              </a:lnSpc>
+            </a:pPr>
+            <a:r>
+              <a:rPr lang="en-US" b="true" sz="4741">
+                <a:solidFill>
+                  <a:srgbClr val="FFFFFF"/>
+                </a:solidFill>
+                <a:latin typeface="TT Lakes Neue Expanded Bold"/>
+                <a:ea typeface="TT Lakes Neue Expanded Bold"/>
+                <a:cs typeface="TT Lakes Neue Expanded Bold"/>
+                <a:sym typeface="TT Lakes Neue Expanded Bold"/>
+              </a:rPr>
+              <a:t>CR02 - INTEGRAZIONE AMBER (MANUTENZIONE ADATTIVA)</a:t>
+            </a:r>
+          </a:p>
+        </p:txBody>
+      </p:sp>
+      <p:sp>
+        <p:nvSpPr>
+          <p:cNvPr name="Freeform 13" id="13"/>
+          <p:cNvSpPr/>
+          <p:nvPr/>
+        </p:nvSpPr>
+        <p:spPr>
+          <a:xfrm flipH="false" flipV="true" rot="0">
+            <a:off x="-3709327" y="5778350"/>
+            <a:ext cx="5081025" cy="5978571"/>
+          </a:xfrm>
+          <a:custGeom>
+            <a:avLst/>
+            <a:gdLst/>
+            <a:ahLst/>
+            <a:cxnLst/>
+            <a:rect r="r" b="b" t="t" l="l"/>
+            <a:pathLst>
+              <a:path h="5978571" w="5081025">
+                <a:moveTo>
+                  <a:pt x="0" y="5978571"/>
+                </a:moveTo>
+                <a:lnTo>
+                  <a:pt x="5081025" y="5978571"/>
+                </a:lnTo>
+                <a:lnTo>
+                  <a:pt x="5081025" y="0"/>
+                </a:lnTo>
+                <a:lnTo>
+                  <a:pt x="0" y="0"/>
+                </a:lnTo>
+                <a:lnTo>
+                  <a:pt x="0" y="5978571"/>
+                </a:lnTo>
+                <a:close/>
+              </a:path>
+            </a:pathLst>
+          </a:custGeom>
+          <a:blipFill>
+            <a:blip r:embed="rId4"/>
+            <a:stretch>
+              <a:fillRect l="0" t="0" r="0" b="0"/>
+            </a:stretch>
+          </a:blipFill>
+        </p:spPr>
+      </p:sp>
+      <p:sp>
+        <p:nvSpPr>
+          <p:cNvPr name="TextBox 14" id="14"/>
+          <p:cNvSpPr txBox="true"/>
+          <p:nvPr/>
+        </p:nvSpPr>
+        <p:spPr>
+          <a:xfrm rot="0">
+            <a:off x="7767800" y="4054799"/>
+            <a:ext cx="4324746" cy="591307"/>
+          </a:xfrm>
+          <a:prstGeom prst="rect">
+            <a:avLst/>
+          </a:prstGeom>
+        </p:spPr>
+        <p:txBody>
+          <a:bodyPr anchor="t" rtlCol="false" tIns="0" lIns="0" bIns="0" rIns="0">
+            <a:spAutoFit/>
+          </a:bodyPr>
+          <a:lstStyle/>
+          <a:p>
+            <a:pPr algn="just">
+              <a:lnSpc>
+                <a:spcPts val="4241"/>
+              </a:lnSpc>
+              <a:spcBef>
+                <a:spcPct val="0"/>
+              </a:spcBef>
+            </a:pPr>
+            <a:r>
+              <a:rPr lang="en-US" b="true" sz="4039" spc="137">
+                <a:solidFill>
+                  <a:srgbClr val="FFDE59"/>
+                </a:solidFill>
+                <a:latin typeface="Poppins Bold"/>
+                <a:ea typeface="Poppins Bold"/>
+                <a:cs typeface="Poppins Bold"/>
+                <a:sym typeface="Poppins Bold"/>
+              </a:rPr>
+              <a:t>OBIETTIVO</a:t>
+            </a:r>
+          </a:p>
+        </p:txBody>
+      </p:sp>
+      <p:sp>
+        <p:nvSpPr>
+          <p:cNvPr name="TextBox 15" id="15"/>
+          <p:cNvSpPr txBox="true"/>
+          <p:nvPr/>
+        </p:nvSpPr>
+        <p:spPr>
+          <a:xfrm rot="0">
+            <a:off x="2945421" y="5098438"/>
+            <a:ext cx="12639973" cy="1796989"/>
+          </a:xfrm>
+          <a:prstGeom prst="rect">
+            <a:avLst/>
+          </a:prstGeom>
+        </p:spPr>
+        <p:txBody>
+          <a:bodyPr anchor="t" rtlCol="false" tIns="0" lIns="0" bIns="0" rIns="0">
+            <a:spAutoFit/>
+          </a:bodyPr>
+          <a:lstStyle/>
+          <a:p>
+            <a:pPr algn="ctr">
+              <a:lnSpc>
+                <a:spcPts val="3496"/>
+              </a:lnSpc>
+              <a:spcBef>
+                <a:spcPct val="0"/>
+              </a:spcBef>
+            </a:pPr>
+            <a:r>
+              <a:rPr lang="en-US" sz="3330" spc="113">
+                <a:solidFill>
+                  <a:srgbClr val="FFFFFF"/>
+                </a:solidFill>
+                <a:latin typeface="Poppins"/>
+                <a:ea typeface="Poppins"/>
+                <a:cs typeface="Poppins"/>
+                <a:sym typeface="Poppins"/>
+              </a:rPr>
+              <a:t>L'istanza interna di parsing falliva sui file con sintassi Java moderne (livello 17). L'obiettivo era aggiornare l'infrastruttura e configurare il parser per supportare Amber</a:t>
+            </a:r>
+          </a:p>
+        </p:txBody>
+      </p:sp>
+      <p:sp>
+        <p:nvSpPr>
+          <p:cNvPr name="Freeform 16" id="16"/>
+          <p:cNvSpPr/>
+          <p:nvPr/>
+        </p:nvSpPr>
+        <p:spPr>
+          <a:xfrm flipH="false" flipV="false" rot="0">
+            <a:off x="2327569" y="159045"/>
+            <a:ext cx="1235703" cy="1235703"/>
+          </a:xfrm>
+          <a:custGeom>
+            <a:avLst/>
+            <a:gdLst/>
+            <a:ahLst/>
+            <a:cxnLst/>
+            <a:rect r="r" b="b" t="t" l="l"/>
+            <a:pathLst>
+              <a:path h="1235703" w="1235703">
+                <a:moveTo>
+                  <a:pt x="0" y="0"/>
+                </a:moveTo>
+                <a:lnTo>
+                  <a:pt x="1235703" y="0"/>
+                </a:lnTo>
+                <a:lnTo>
+                  <a:pt x="1235703" y="1235704"/>
+                </a:lnTo>
+                <a:lnTo>
+                  <a:pt x="0" y="1235704"/>
+                </a:lnTo>
+                <a:lnTo>
+                  <a:pt x="0" y="0"/>
+                </a:lnTo>
+                <a:close/>
+              </a:path>
+            </a:pathLst>
+          </a:custGeom>
+          <a:blipFill>
+            <a:blip r:embed="rId7"/>
+            <a:stretch>
+              <a:fillRect l="0" t="0" r="0" b="0"/>
+            </a:stretch>
+          </a:blipFill>
+        </p:spPr>
+      </p:sp>
+      <p:sp>
+        <p:nvSpPr>
+          <p:cNvPr name="Freeform 17" id="17"/>
+          <p:cNvSpPr/>
+          <p:nvPr/>
+        </p:nvSpPr>
+        <p:spPr>
+          <a:xfrm flipH="false" flipV="false" rot="0">
+            <a:off x="318810" y="250453"/>
+            <a:ext cx="1052888" cy="1052888"/>
+          </a:xfrm>
+          <a:custGeom>
+            <a:avLst/>
+            <a:gdLst/>
+            <a:ahLst/>
+            <a:cxnLst/>
+            <a:rect r="r" b="b" t="t" l="l"/>
+            <a:pathLst>
+              <a:path h="1052888" w="1052888">
+                <a:moveTo>
+                  <a:pt x="0" y="0"/>
+                </a:moveTo>
+                <a:lnTo>
+                  <a:pt x="1052888" y="0"/>
+                </a:lnTo>
+                <a:lnTo>
+                  <a:pt x="1052888" y="1052888"/>
+                </a:lnTo>
+                <a:lnTo>
+                  <a:pt x="0" y="1052888"/>
+                </a:lnTo>
+                <a:lnTo>
+                  <a:pt x="0" y="0"/>
+                </a:lnTo>
+                <a:close/>
+              </a:path>
+            </a:pathLst>
+          </a:custGeom>
+          <a:blipFill>
+            <a:blip r:embed="rId8"/>
+            <a:stretch>
+              <a:fillRect l="0" t="0" r="0" b="0"/>
+            </a:stretch>
+          </a:blipFill>
+        </p:spPr>
       </p:sp>
     </p:spTree>
   </p:cSld>
